--- a/slides_meat_yolo/meat_yolo_roboflow_presentation.pptx
+++ b/slides_meat_yolo/meat_yolo_roboflow_presentation.pptx
@@ -2185,13 +2185,13 @@
         </p:nvPicPr>
         <p:blipFill>
           <a:blip r:embed="rId1"/>
-          <a:srcRect l="0" r="0" t="1799" b="1799"/>
+          <a:srcRect l="133" r="133" t="0" b="0"/>
           <a:stretch/>
         </p:blipFill>
         <p:spPr>
           <a:xfrm>
-            <a:off x="5074920" y="0"/>
-            <a:ext cx="7114032" cy="6858000"/>
+            <a:off x="5349240" y="0"/>
+            <a:ext cx="6839712" cy="6858000"/>
           </a:xfrm>
           <a:prstGeom prst="rect">
             <a:avLst/>
@@ -2207,7 +2207,7 @@
         <p:spPr>
           <a:xfrm>
             <a:off x="0" y="0"/>
-            <a:ext cx="4892040" cy="6858000"/>
+            <a:ext cx="5166360" cy="6858000"/>
           </a:xfrm>
           <a:prstGeom prst="rect">
             <a:avLst/>
@@ -2235,7 +2235,7 @@
         </p:nvSpPr>
         <p:spPr>
           <a:xfrm>
-            <a:off x="4892040" y="0"/>
+            <a:off x="5166360" y="0"/>
             <a:ext cx="182880" cy="6858000"/>
           </a:xfrm>
           <a:prstGeom prst="rect">
@@ -2281,7 +2281,7 @@
               <a:buNone/>
             </a:pPr>
             <a:r>
-              <a:rPr lang="en-US" sz="700" b="1" dirty="0">
+              <a:rPr lang="en-US" sz="800" b="1" dirty="0">
                 <a:solidFill>
                   <a:srgbClr val="1BAE9D"/>
                 </a:solidFill>
@@ -2291,7 +2291,7 @@
               </a:rPr>
               <a:t>MEAT DETECTION</a:t>
             </a:r>
-            <a:endParaRPr lang="en-US" sz="700" dirty="0"/>
+            <a:endParaRPr lang="en-US" sz="800" dirty="0"/>
           </a:p>
         </p:txBody>
       </p:sp>
@@ -2304,23 +2304,23 @@
         <p:spPr>
           <a:xfrm>
             <a:off x="566928" y="1252728"/>
-            <a:ext cx="4160520" cy="1417320"/>
-          </a:xfrm>
-          <a:prstGeom prst="rect">
-            <a:avLst/>
-          </a:prstGeom>
-          <a:noFill/>
-          <a:ln/>
-        </p:spPr>
-        <p:txBody>
-          <a:bodyPr wrap="square" lIns="0" tIns="0" rIns="0" bIns="0" rtlCol="0" anchor="ctr"/>
-          <a:lstStyle/>
-          <a:p>
-            <a:pPr indent="0" marL="0">
-              <a:buNone/>
-            </a:pPr>
-            <a:r>
-              <a:rPr lang="en-US" sz="2996" b="1" dirty="0">
+            <a:ext cx="4434840" cy="1417320"/>
+          </a:xfrm>
+          <a:prstGeom prst="rect">
+            <a:avLst/>
+          </a:prstGeom>
+          <a:noFill/>
+          <a:ln/>
+        </p:spPr>
+        <p:txBody>
+          <a:bodyPr wrap="square" lIns="0" tIns="0" rIns="0" bIns="0" rtlCol="0" anchor="ctr"/>
+          <a:lstStyle/>
+          <a:p>
+            <a:pPr indent="0" marL="0">
+              <a:buNone/>
+            </a:pPr>
+            <a:r>
+              <a:rPr lang="en-US" sz="3297" b="1" dirty="0">
                 <a:solidFill>
                   <a:srgbClr val="FFFFFF"/>
                 </a:solidFill>
@@ -2330,14 +2330,14 @@
               </a:rPr>
               <a:t>YOLO x Roboflow</a:t>
             </a:r>
-            <a:endParaRPr lang="en-US" sz="2996" dirty="0"/>
-          </a:p>
-          <a:p>
-            <a:pPr indent="0" marL="0">
-              <a:buNone/>
-            </a:pPr>
-            <a:r>
-              <a:rPr lang="en-US" sz="2996" b="1" dirty="0">
+            <a:endParaRPr lang="en-US" sz="3297" dirty="0"/>
+          </a:p>
+          <a:p>
+            <a:pPr indent="0" marL="0">
+              <a:buNone/>
+            </a:pPr>
+            <a:r>
+              <a:rPr lang="en-US" sz="3297" b="1" dirty="0">
                 <a:solidFill>
                   <a:srgbClr val="FFFFFF"/>
                 </a:solidFill>
@@ -2347,7 +2347,7 @@
               </a:rPr>
               <a:t>肉種判定モデルの開発</a:t>
             </a:r>
-            <a:endParaRPr lang="en-US" sz="2996" dirty="0"/>
+            <a:endParaRPr lang="en-US" sz="3297" dirty="0"/>
           </a:p>
         </p:txBody>
       </p:sp>
@@ -2360,23 +2360,23 @@
         <p:spPr>
           <a:xfrm>
             <a:off x="603504" y="2999232"/>
-            <a:ext cx="3749040" cy="411480"/>
-          </a:xfrm>
-          <a:prstGeom prst="rect">
-            <a:avLst/>
-          </a:prstGeom>
-          <a:noFill/>
-          <a:ln/>
-        </p:spPr>
-        <p:txBody>
-          <a:bodyPr wrap="square" lIns="0" tIns="0" rIns="0" bIns="0" rtlCol="0" anchor="ctr"/>
-          <a:lstStyle/>
-          <a:p>
-            <a:pPr indent="0" marL="0">
-              <a:buNone/>
-            </a:pPr>
-            <a:r>
-              <a:rPr lang="en-US" sz="1220" dirty="0">
+            <a:ext cx="4160520" cy="411480"/>
+          </a:xfrm>
+          <a:prstGeom prst="rect">
+            <a:avLst/>
+          </a:prstGeom>
+          <a:noFill/>
+          <a:ln/>
+        </p:spPr>
+        <p:txBody>
+          <a:bodyPr wrap="square" lIns="0" tIns="0" rIns="0" bIns="0" rtlCol="0" anchor="ctr"/>
+          <a:lstStyle/>
+          <a:p>
+            <a:pPr indent="0" marL="0">
+              <a:buNone/>
+            </a:pPr>
+            <a:r>
+              <a:rPr lang="en-US" sz="1360" dirty="0">
                 <a:solidFill>
                   <a:srgbClr val="D9D0C8"/>
                 </a:solidFill>
@@ -2386,7 +2386,7 @@
               </a:rPr>
               <a:t>画像中の肉領域を検出し、beef / chicken / lamb / pork を推定する</a:t>
             </a:r>
-            <a:endParaRPr lang="en-US" sz="1220" dirty="0"/>
+            <a:endParaRPr lang="en-US" sz="1360" dirty="0"/>
           </a:p>
         </p:txBody>
       </p:sp>
@@ -2399,7 +2399,7 @@
         <p:spPr>
           <a:xfrm>
             <a:off x="603504" y="3913632"/>
-            <a:ext cx="1051560" cy="292608"/>
+            <a:ext cx="1143000" cy="365760"/>
           </a:xfrm>
           <a:prstGeom prst="rect">
             <a:avLst/>
@@ -2425,8 +2425,8 @@
         </p:nvSpPr>
         <p:spPr>
           <a:xfrm>
-            <a:off x="685800" y="3982212"/>
-            <a:ext cx="886968" cy="73152"/>
+            <a:off x="685800" y="4009644"/>
+            <a:ext cx="978408" cy="91440"/>
           </a:xfrm>
           <a:prstGeom prst="rect">
             <a:avLst/>
@@ -2442,7 +2442,7 @@
               <a:buNone/>
             </a:pPr>
             <a:r>
-              <a:rPr lang="en-US" sz="730" b="1" dirty="0">
+              <a:rPr lang="en-US" sz="820" b="1" dirty="0">
                 <a:solidFill>
                   <a:srgbClr val="FFFFFF"/>
                 </a:solidFill>
@@ -2452,7 +2452,7 @@
               </a:rPr>
               <a:t>YOLO11s</a:t>
             </a:r>
-            <a:endParaRPr lang="en-US" sz="730" dirty="0"/>
+            <a:endParaRPr lang="en-US" sz="820" dirty="0"/>
           </a:p>
         </p:txBody>
       </p:sp>
@@ -2464,8 +2464,8 @@
         </p:nvSpPr>
         <p:spPr>
           <a:xfrm>
-            <a:off x="1783080" y="3913632"/>
-            <a:ext cx="1143000" cy="292608"/>
+            <a:off x="1901952" y="3913632"/>
+            <a:ext cx="1261872" cy="365760"/>
           </a:xfrm>
           <a:prstGeom prst="rect">
             <a:avLst/>
@@ -2491,8 +2491,8 @@
         </p:nvSpPr>
         <p:spPr>
           <a:xfrm>
-            <a:off x="1865376" y="3982212"/>
-            <a:ext cx="978408" cy="73152"/>
+            <a:off x="1984248" y="4009644"/>
+            <a:ext cx="1097280" cy="91440"/>
           </a:xfrm>
           <a:prstGeom prst="rect">
             <a:avLst/>
@@ -2508,7 +2508,7 @@
               <a:buNone/>
             </a:pPr>
             <a:r>
-              <a:rPr lang="en-US" sz="730" b="1" dirty="0">
+              <a:rPr lang="en-US" sz="820" b="1" dirty="0">
                 <a:solidFill>
                   <a:srgbClr val="FFFFFF"/>
                 </a:solidFill>
@@ -2518,7 +2518,7 @@
               </a:rPr>
               <a:t>Roboflow</a:t>
             </a:r>
-            <a:endParaRPr lang="en-US" sz="730" dirty="0"/>
+            <a:endParaRPr lang="en-US" sz="820" dirty="0"/>
           </a:p>
         </p:txBody>
       </p:sp>
@@ -2530,8 +2530,8 @@
         </p:nvSpPr>
         <p:spPr>
           <a:xfrm>
-            <a:off x="3063240" y="3913632"/>
-            <a:ext cx="1572768" cy="292608"/>
+            <a:off x="3319272" y="3913632"/>
+            <a:ext cx="1755648" cy="365760"/>
           </a:xfrm>
           <a:prstGeom prst="rect">
             <a:avLst/>
@@ -2557,8 +2557,8 @@
         </p:nvSpPr>
         <p:spPr>
           <a:xfrm>
-            <a:off x="3145536" y="3982212"/>
-            <a:ext cx="1408176" cy="73152"/>
+            <a:off x="3401568" y="4009644"/>
+            <a:ext cx="1591056" cy="91440"/>
           </a:xfrm>
           <a:prstGeom prst="rect">
             <a:avLst/>
@@ -2574,7 +2574,7 @@
               <a:buNone/>
             </a:pPr>
             <a:r>
-              <a:rPr lang="en-US" sz="730" b="1" dirty="0">
+              <a:rPr lang="en-US" sz="820" b="1" dirty="0">
                 <a:solidFill>
                   <a:srgbClr val="FFFFFF"/>
                 </a:solidFill>
@@ -2584,7 +2584,7 @@
               </a:rPr>
               <a:t>Object Detection</a:t>
             </a:r>
-            <a:endParaRPr lang="en-US" sz="730" dirty="0"/>
+            <a:endParaRPr lang="en-US" sz="820" dirty="0"/>
           </a:p>
         </p:txBody>
       </p:sp>
@@ -2613,7 +2613,7 @@
               <a:buNone/>
             </a:pPr>
             <a:r>
-              <a:rPr lang="en-US" sz="800" dirty="0">
+              <a:rPr lang="en-US" sz="920" dirty="0">
                 <a:solidFill>
                   <a:srgbClr val="BFB3AA"/>
                 </a:solidFill>
@@ -2623,7 +2623,7 @@
               </a:rPr>
               <a:t>Programming 1 Project</a:t>
             </a:r>
-            <a:endParaRPr lang="en-US" sz="800" dirty="0"/>
+            <a:endParaRPr lang="en-US" sz="920" dirty="0"/>
           </a:p>
         </p:txBody>
       </p:sp>
@@ -2652,7 +2652,7 @@
               <a:buNone/>
             </a:pPr>
             <a:r>
-              <a:rPr lang="en-US" sz="750" b="1" dirty="0">
+              <a:rPr lang="en-US" sz="850" b="1" dirty="0">
                 <a:solidFill>
                   <a:srgbClr val="776C64"/>
                 </a:solidFill>
@@ -2662,7 +2662,7 @@
               </a:rPr>
               <a:t>01</a:t>
             </a:r>
-            <a:endParaRPr lang="en-US" sz="750" dirty="0"/>
+            <a:endParaRPr lang="en-US" sz="850" dirty="0"/>
           </a:p>
         </p:txBody>
       </p:sp>
@@ -2771,24 +2771,24 @@
         </p:nvSpPr>
         <p:spPr>
           <a:xfrm>
-            <a:off x="530352" y="320040"/>
-            <a:ext cx="1325880" cy="182880"/>
-          </a:xfrm>
-          <a:prstGeom prst="rect">
-            <a:avLst/>
-          </a:prstGeom>
-          <a:noFill/>
-          <a:ln/>
-        </p:spPr>
-        <p:txBody>
-          <a:bodyPr wrap="square" lIns="0" tIns="0" rIns="0" bIns="0" rtlCol="0" anchor="ctr"/>
-          <a:lstStyle/>
-          <a:p>
-            <a:pPr indent="0" marL="0">
-              <a:buNone/>
-            </a:pPr>
-            <a:r>
-              <a:rPr lang="en-US" sz="750" b="1" dirty="0">
+            <a:off x="530352" y="292608"/>
+            <a:ext cx="1600200" cy="201168"/>
+          </a:xfrm>
+          <a:prstGeom prst="rect">
+            <a:avLst/>
+          </a:prstGeom>
+          <a:noFill/>
+          <a:ln/>
+        </p:spPr>
+        <p:txBody>
+          <a:bodyPr wrap="square" lIns="0" tIns="0" rIns="0" bIns="0" rtlCol="0" anchor="ctr"/>
+          <a:lstStyle/>
+          <a:p>
+            <a:pPr indent="0" marL="0">
+              <a:buNone/>
+            </a:pPr>
+            <a:r>
+              <a:rPr lang="en-US" sz="840" b="1" dirty="0">
                 <a:solidFill>
                   <a:srgbClr val="8E2335"/>
                 </a:solidFill>
@@ -2798,7 +2798,7 @@
               </a:rPr>
               <a:t>2章 手法</a:t>
             </a:r>
-            <a:endParaRPr lang="en-US" sz="750" dirty="0"/>
+            <a:endParaRPr lang="en-US" sz="840" dirty="0"/>
           </a:p>
         </p:txBody>
       </p:sp>
@@ -2810,8 +2810,8 @@
         </p:nvSpPr>
         <p:spPr>
           <a:xfrm>
-            <a:off x="530352" y="566928"/>
-            <a:ext cx="7406640" cy="384048"/>
+            <a:off x="530352" y="557784"/>
+            <a:ext cx="7406640" cy="420624"/>
           </a:xfrm>
           <a:prstGeom prst="rect">
             <a:avLst/>
@@ -2889,7 +2889,7 @@
               <a:buNone/>
             </a:pPr>
             <a:r>
-              <a:rPr lang="en-US" sz="750" b="1" dirty="0">
+              <a:rPr lang="en-US" sz="850" b="1" dirty="0">
                 <a:solidFill>
                   <a:srgbClr val="776C64"/>
                 </a:solidFill>
@@ -2899,7 +2899,7 @@
               </a:rPr>
               <a:t>10</a:t>
             </a:r>
-            <a:endParaRPr lang="en-US" sz="750" dirty="0"/>
+            <a:endParaRPr lang="en-US" sz="850" dirty="0"/>
           </a:p>
         </p:txBody>
       </p:sp>
@@ -2911,8 +2911,8 @@
         </p:nvSpPr>
         <p:spPr>
           <a:xfrm>
-            <a:off x="694944" y="1389888"/>
-            <a:ext cx="3703320" cy="4206240"/>
+            <a:off x="694944" y="1353312"/>
+            <a:ext cx="3794760" cy="4315968"/>
           </a:xfrm>
           <a:prstGeom prst="rect">
             <a:avLst/>
@@ -2953,7 +2953,7 @@
               <a:buNone/>
             </a:pPr>
             <a:r>
-              <a:rPr lang="en-US" sz="1500" b="1" dirty="0">
+              <a:rPr lang="en-US" sz="1650" b="1" dirty="0">
                 <a:solidFill>
                   <a:srgbClr val="1F1A17"/>
                 </a:solidFill>
@@ -2963,7 +2963,7 @@
               </a:rPr>
               <a:t>学習設定</a:t>
             </a:r>
-            <a:endParaRPr lang="en-US" sz="1500" dirty="0"/>
+            <a:endParaRPr lang="en-US" sz="1650" dirty="0"/>
           </a:p>
         </p:txBody>
       </p:sp>
@@ -2992,7 +2992,7 @@
               <a:buNone/>
             </a:pPr>
             <a:r>
-              <a:rPr lang="en-US" sz="820" b="1" dirty="0">
+              <a:rPr lang="en-US" sz="920" b="1" dirty="0">
                 <a:solidFill>
                   <a:srgbClr val="776C64"/>
                 </a:solidFill>
@@ -3002,7 +3002,7 @@
               </a:rPr>
               <a:t>model</a:t>
             </a:r>
-            <a:endParaRPr lang="en-US" sz="820" dirty="0"/>
+            <a:endParaRPr lang="en-US" sz="920" dirty="0"/>
           </a:p>
         </p:txBody>
       </p:sp>
@@ -3031,7 +3031,7 @@
               <a:buNone/>
             </a:pPr>
             <a:r>
-              <a:rPr lang="en-US" sz="1050" dirty="0">
+              <a:rPr lang="en-US" sz="1180" dirty="0">
                 <a:solidFill>
                   <a:srgbClr val="1F1A17"/>
                 </a:solidFill>
@@ -3041,7 +3041,7 @@
               </a:rPr>
               <a:t>yolo11s.pt</a:t>
             </a:r>
-            <a:endParaRPr lang="en-US" sz="1050" dirty="0"/>
+            <a:endParaRPr lang="en-US" sz="1180" dirty="0"/>
           </a:p>
         </p:txBody>
       </p:sp>
@@ -3070,7 +3070,7 @@
               <a:buNone/>
             </a:pPr>
             <a:r>
-              <a:rPr lang="en-US" sz="820" b="1" dirty="0">
+              <a:rPr lang="en-US" sz="920" b="1" dirty="0">
                 <a:solidFill>
                   <a:srgbClr val="776C64"/>
                 </a:solidFill>
@@ -3080,7 +3080,7 @@
               </a:rPr>
               <a:t>epochs</a:t>
             </a:r>
-            <a:endParaRPr lang="en-US" sz="820" dirty="0"/>
+            <a:endParaRPr lang="en-US" sz="920" dirty="0"/>
           </a:p>
         </p:txBody>
       </p:sp>
@@ -3109,7 +3109,7 @@
               <a:buNone/>
             </a:pPr>
             <a:r>
-              <a:rPr lang="en-US" sz="1050" dirty="0">
+              <a:rPr lang="en-US" sz="1180" dirty="0">
                 <a:solidFill>
                   <a:srgbClr val="1F1A17"/>
                 </a:solidFill>
@@ -3119,7 +3119,7 @@
               </a:rPr>
               <a:t>10</a:t>
             </a:r>
-            <a:endParaRPr lang="en-US" sz="1050" dirty="0"/>
+            <a:endParaRPr lang="en-US" sz="1180" dirty="0"/>
           </a:p>
         </p:txBody>
       </p:sp>
@@ -3148,7 +3148,7 @@
               <a:buNone/>
             </a:pPr>
             <a:r>
-              <a:rPr lang="en-US" sz="820" b="1" dirty="0">
+              <a:rPr lang="en-US" sz="920" b="1" dirty="0">
                 <a:solidFill>
                   <a:srgbClr val="776C64"/>
                 </a:solidFill>
@@ -3158,7 +3158,7 @@
               </a:rPr>
               <a:t>imgsz</a:t>
             </a:r>
-            <a:endParaRPr lang="en-US" sz="820" dirty="0"/>
+            <a:endParaRPr lang="en-US" sz="920" dirty="0"/>
           </a:p>
         </p:txBody>
       </p:sp>
@@ -3187,7 +3187,7 @@
               <a:buNone/>
             </a:pPr>
             <a:r>
-              <a:rPr lang="en-US" sz="1050" dirty="0">
+              <a:rPr lang="en-US" sz="1180" dirty="0">
                 <a:solidFill>
                   <a:srgbClr val="1F1A17"/>
                 </a:solidFill>
@@ -3197,7 +3197,7 @@
               </a:rPr>
               <a:t>640</a:t>
             </a:r>
-            <a:endParaRPr lang="en-US" sz="1050" dirty="0"/>
+            <a:endParaRPr lang="en-US" sz="1180" dirty="0"/>
           </a:p>
         </p:txBody>
       </p:sp>
@@ -3226,7 +3226,7 @@
               <a:buNone/>
             </a:pPr>
             <a:r>
-              <a:rPr lang="en-US" sz="820" b="1" dirty="0">
+              <a:rPr lang="en-US" sz="920" b="1" dirty="0">
                 <a:solidFill>
                   <a:srgbClr val="776C64"/>
                 </a:solidFill>
@@ -3236,7 +3236,7 @@
               </a:rPr>
               <a:t>batch</a:t>
             </a:r>
-            <a:endParaRPr lang="en-US" sz="820" dirty="0"/>
+            <a:endParaRPr lang="en-US" sz="920" dirty="0"/>
           </a:p>
         </p:txBody>
       </p:sp>
@@ -3265,7 +3265,7 @@
               <a:buNone/>
             </a:pPr>
             <a:r>
-              <a:rPr lang="en-US" sz="1050" dirty="0">
+              <a:rPr lang="en-US" sz="1180" dirty="0">
                 <a:solidFill>
                   <a:srgbClr val="1F1A17"/>
                 </a:solidFill>
@@ -3275,7 +3275,7 @@
               </a:rPr>
               <a:t>16</a:t>
             </a:r>
-            <a:endParaRPr lang="en-US" sz="1050" dirty="0"/>
+            <a:endParaRPr lang="en-US" sz="1180" dirty="0"/>
           </a:p>
         </p:txBody>
       </p:sp>
@@ -3304,7 +3304,7 @@
               <a:buNone/>
             </a:pPr>
             <a:r>
-              <a:rPr lang="en-US" sz="820" b="1" dirty="0">
+              <a:rPr lang="en-US" sz="920" b="1" dirty="0">
                 <a:solidFill>
                   <a:srgbClr val="776C64"/>
                 </a:solidFill>
@@ -3314,7 +3314,7 @@
               </a:rPr>
               <a:t>task</a:t>
             </a:r>
-            <a:endParaRPr lang="en-US" sz="820" dirty="0"/>
+            <a:endParaRPr lang="en-US" sz="920" dirty="0"/>
           </a:p>
         </p:txBody>
       </p:sp>
@@ -3343,7 +3343,7 @@
               <a:buNone/>
             </a:pPr>
             <a:r>
-              <a:rPr lang="en-US" sz="1050" dirty="0">
+              <a:rPr lang="en-US" sz="1180" dirty="0">
                 <a:solidFill>
                   <a:srgbClr val="1F1A17"/>
                 </a:solidFill>
@@ -3353,7 +3353,7 @@
               </a:rPr>
               <a:t>detect</a:t>
             </a:r>
-            <a:endParaRPr lang="en-US" sz="1050" dirty="0"/>
+            <a:endParaRPr lang="en-US" sz="1180" dirty="0"/>
           </a:p>
         </p:txBody>
       </p:sp>
@@ -3382,7 +3382,7 @@
               <a:buNone/>
             </a:pPr>
             <a:r>
-              <a:rPr lang="en-US" sz="1000" b="1" dirty="0">
+              <a:rPr lang="en-US" sz="1120" b="1" dirty="0">
                 <a:solidFill>
                   <a:srgbClr val="776C64"/>
                 </a:solidFill>
@@ -3392,7 +3392,7 @@
               </a:rPr>
               <a:t>入力</a:t>
             </a:r>
-            <a:endParaRPr lang="en-US" sz="1000" dirty="0"/>
+            <a:endParaRPr lang="en-US" sz="1120" dirty="0"/>
           </a:p>
         </p:txBody>
       </p:sp>
@@ -3451,24 +3451,24 @@
         </p:nvSpPr>
         <p:spPr>
           <a:xfrm>
-            <a:off x="7086600" y="2834640"/>
-            <a:ext cx="658368" cy="146304"/>
-          </a:xfrm>
-          <a:prstGeom prst="rect">
-            <a:avLst/>
-          </a:prstGeom>
-          <a:noFill/>
-          <a:ln/>
-        </p:spPr>
-        <p:txBody>
-          <a:bodyPr wrap="square" lIns="0" tIns="0" rIns="0" bIns="0" rtlCol="0" anchor="ctr"/>
-          <a:lstStyle/>
-          <a:p>
-            <a:pPr indent="0" marL="0">
-              <a:buNone/>
-            </a:pPr>
-            <a:r>
-              <a:rPr lang="en-US" sz="1000" b="1" dirty="0">
+            <a:off x="7040880" y="2816352"/>
+            <a:ext cx="749808" cy="164592"/>
+          </a:xfrm>
+          <a:prstGeom prst="rect">
+            <a:avLst/>
+          </a:prstGeom>
+          <a:noFill/>
+          <a:ln/>
+        </p:spPr>
+        <p:txBody>
+          <a:bodyPr wrap="square" lIns="0" tIns="0" rIns="0" bIns="0" rtlCol="0" anchor="ctr"/>
+          <a:lstStyle/>
+          <a:p>
+            <a:pPr indent="0" marL="0">
+              <a:buNone/>
+            </a:pPr>
+            <a:r>
+              <a:rPr lang="en-US" sz="1150" b="1" dirty="0">
                 <a:solidFill>
                   <a:srgbClr val="8E2335"/>
                 </a:solidFill>
@@ -3478,7 +3478,7 @@
               </a:rPr>
               <a:t>YOLO</a:t>
             </a:r>
-            <a:endParaRPr lang="en-US" sz="1000" dirty="0"/>
+            <a:endParaRPr lang="en-US" sz="1150" dirty="0"/>
           </a:p>
         </p:txBody>
       </p:sp>
@@ -3531,7 +3531,7 @@
               <a:buNone/>
             </a:pPr>
             <a:r>
-              <a:rPr lang="en-US" sz="1000" b="1" dirty="0">
+              <a:rPr lang="en-US" sz="1120" b="1" dirty="0">
                 <a:solidFill>
                   <a:srgbClr val="776C64"/>
                 </a:solidFill>
@@ -3541,7 +3541,7 @@
               </a:rPr>
               <a:t>出力</a:t>
             </a:r>
-            <a:endParaRPr lang="en-US" sz="1000" dirty="0"/>
+            <a:endParaRPr lang="en-US" sz="1120" dirty="0"/>
           </a:p>
         </p:txBody>
       </p:sp>
@@ -3553,8 +3553,8 @@
         </p:nvSpPr>
         <p:spPr>
           <a:xfrm>
-            <a:off x="8302752" y="2212848"/>
-            <a:ext cx="2697480" cy="1344168"/>
+            <a:off x="8302752" y="2176272"/>
+            <a:ext cx="2788920" cy="1481328"/>
           </a:xfrm>
           <a:prstGeom prst="rect">
             <a:avLst/>
@@ -3595,7 +3595,7 @@
               <a:buNone/>
             </a:pPr>
             <a:r>
-              <a:rPr lang="en-US" sz="1300" b="1" dirty="0">
+              <a:rPr lang="en-US" sz="1430" b="1" dirty="0">
                 <a:solidFill>
                   <a:srgbClr val="1F1A17"/>
                 </a:solidFill>
@@ -3605,14 +3605,14 @@
               </a:rPr>
               <a:t>肉の位置</a:t>
             </a:r>
-            <a:endParaRPr lang="en-US" sz="1300" dirty="0"/>
-          </a:p>
-          <a:p>
-            <a:pPr indent="0" marL="0">
-              <a:buNone/>
-            </a:pPr>
-            <a:r>
-              <a:rPr lang="en-US" sz="1300" b="1" dirty="0">
+            <a:endParaRPr lang="en-US" sz="1430" dirty="0"/>
+          </a:p>
+          <a:p>
+            <a:pPr indent="0" marL="0">
+              <a:buNone/>
+            </a:pPr>
+            <a:r>
+              <a:rPr lang="en-US" sz="1430" b="1" dirty="0">
                 <a:solidFill>
                   <a:srgbClr val="1F1A17"/>
                 </a:solidFill>
@@ -3622,14 +3622,14 @@
               </a:rPr>
               <a:t>種類ラベル</a:t>
             </a:r>
-            <a:endParaRPr lang="en-US" sz="1300" dirty="0"/>
-          </a:p>
-          <a:p>
-            <a:pPr indent="0" marL="0">
-              <a:buNone/>
-            </a:pPr>
-            <a:r>
-              <a:rPr lang="en-US" sz="1300" b="1" dirty="0">
+            <a:endParaRPr lang="en-US" sz="1430" dirty="0"/>
+          </a:p>
+          <a:p>
+            <a:pPr indent="0" marL="0">
+              <a:buNone/>
+            </a:pPr>
+            <a:r>
+              <a:rPr lang="en-US" sz="1430" b="1" dirty="0">
                 <a:solidFill>
                   <a:srgbClr val="1F1A17"/>
                 </a:solidFill>
@@ -3639,7 +3639,7 @@
               </a:rPr>
               <a:t>confidence</a:t>
             </a:r>
-            <a:endParaRPr lang="en-US" sz="1300" dirty="0"/>
+            <a:endParaRPr lang="en-US" sz="1430" dirty="0"/>
           </a:p>
         </p:txBody>
       </p:sp>
@@ -3695,7 +3695,7 @@
               <a:buNone/>
             </a:pPr>
             <a:r>
-              <a:rPr lang="en-US" sz="1400" b="1" dirty="0">
+              <a:rPr lang="en-US" sz="1550" b="1" dirty="0">
                 <a:solidFill>
                   <a:srgbClr val="1F1A17"/>
                 </a:solidFill>
@@ -3705,7 +3705,7 @@
               </a:rPr>
               <a:t>担当分担</a:t>
             </a:r>
-            <a:endParaRPr lang="en-US" sz="1400" dirty="0"/>
+            <a:endParaRPr lang="en-US" sz="1550" dirty="0"/>
           </a:p>
         </p:txBody>
       </p:sp>
@@ -3734,7 +3734,7 @@
               <a:buNone/>
             </a:pPr>
             <a:r>
-              <a:rPr lang="en-US" sz="1000" dirty="0">
+              <a:rPr lang="en-US" sz="1120" dirty="0">
                 <a:solidFill>
                   <a:srgbClr val="776C64"/>
                 </a:solidFill>
@@ -3744,7 +3744,7 @@
               </a:rPr>
               <a:t>データ収集 / アノテーション / 前処理 / 学習 / 評価 / 発表資料</a:t>
             </a:r>
-            <a:endParaRPr lang="en-US" sz="1000" dirty="0"/>
+            <a:endParaRPr lang="en-US" sz="1120" dirty="0"/>
           </a:p>
         </p:txBody>
       </p:sp>
@@ -3853,24 +3853,24 @@
         </p:nvSpPr>
         <p:spPr>
           <a:xfrm>
-            <a:off x="530352" y="320040"/>
-            <a:ext cx="1325880" cy="182880"/>
-          </a:xfrm>
-          <a:prstGeom prst="rect">
-            <a:avLst/>
-          </a:prstGeom>
-          <a:noFill/>
-          <a:ln/>
-        </p:spPr>
-        <p:txBody>
-          <a:bodyPr wrap="square" lIns="0" tIns="0" rIns="0" bIns="0" rtlCol="0" anchor="ctr"/>
-          <a:lstStyle/>
-          <a:p>
-            <a:pPr indent="0" marL="0">
-              <a:buNone/>
-            </a:pPr>
-            <a:r>
-              <a:rPr lang="en-US" sz="750" b="1" dirty="0">
+            <a:off x="530352" y="292608"/>
+            <a:ext cx="1600200" cy="201168"/>
+          </a:xfrm>
+          <a:prstGeom prst="rect">
+            <a:avLst/>
+          </a:prstGeom>
+          <a:noFill/>
+          <a:ln/>
+        </p:spPr>
+        <p:txBody>
+          <a:bodyPr wrap="square" lIns="0" tIns="0" rIns="0" bIns="0" rtlCol="0" anchor="ctr"/>
+          <a:lstStyle/>
+          <a:p>
+            <a:pPr indent="0" marL="0">
+              <a:buNone/>
+            </a:pPr>
+            <a:r>
+              <a:rPr lang="en-US" sz="840" b="1" dirty="0">
                 <a:solidFill>
                   <a:srgbClr val="8E2335"/>
                 </a:solidFill>
@@ -3880,7 +3880,7 @@
               </a:rPr>
               <a:t>3章 結果と考察</a:t>
             </a:r>
-            <a:endParaRPr lang="en-US" sz="750" dirty="0"/>
+            <a:endParaRPr lang="en-US" sz="840" dirty="0"/>
           </a:p>
         </p:txBody>
       </p:sp>
@@ -3892,8 +3892,8 @@
         </p:nvSpPr>
         <p:spPr>
           <a:xfrm>
-            <a:off x="530352" y="566928"/>
-            <a:ext cx="7406640" cy="384048"/>
+            <a:off x="530352" y="557784"/>
+            <a:ext cx="7406640" cy="420624"/>
           </a:xfrm>
           <a:prstGeom prst="rect">
             <a:avLst/>
@@ -3971,7 +3971,7 @@
               <a:buNone/>
             </a:pPr>
             <a:r>
-              <a:rPr lang="en-US" sz="750" b="1" dirty="0">
+              <a:rPr lang="en-US" sz="850" b="1" dirty="0">
                 <a:solidFill>
                   <a:srgbClr val="776C64"/>
                 </a:solidFill>
@@ -3981,7 +3981,7 @@
               </a:rPr>
               <a:t>11</a:t>
             </a:r>
-            <a:endParaRPr lang="en-US" sz="750" dirty="0"/>
+            <a:endParaRPr lang="en-US" sz="850" dirty="0"/>
           </a:p>
         </p:txBody>
       </p:sp>
@@ -4010,7 +4010,7 @@
               <a:buNone/>
             </a:pPr>
             <a:r>
-              <a:rPr lang="en-US" sz="1600" b="1" dirty="0">
+              <a:rPr lang="en-US" sz="1750" b="1" dirty="0">
                 <a:solidFill>
                   <a:srgbClr val="1F1A17"/>
                 </a:solidFill>
@@ -4020,7 +4020,7 @@
               </a:rPr>
               <a:t>最終epochの評価指標</a:t>
             </a:r>
-            <a:endParaRPr lang="en-US" sz="1600" dirty="0"/>
+            <a:endParaRPr lang="en-US" sz="1750" dirty="0"/>
           </a:p>
         </p:txBody>
       </p:sp>
@@ -4049,7 +4049,7 @@
               <a:buNone/>
             </a:pPr>
             <a:r>
-              <a:rPr lang="en-US" sz="900" b="1" dirty="0">
+              <a:rPr lang="en-US" sz="1020" b="1" dirty="0">
                 <a:solidFill>
                   <a:srgbClr val="776C64"/>
                 </a:solidFill>
@@ -4059,7 +4059,7 @@
               </a:rPr>
               <a:t>Precision</a:t>
             </a:r>
-            <a:endParaRPr lang="en-US" sz="900" dirty="0"/>
+            <a:endParaRPr lang="en-US" sz="1020" dirty="0"/>
           </a:p>
         </p:txBody>
       </p:sp>
@@ -4071,8 +4071,8 @@
         </p:nvSpPr>
         <p:spPr>
           <a:xfrm>
-            <a:off x="2084832" y="1929384"/>
-            <a:ext cx="2103120" cy="118872"/>
+            <a:off x="2084832" y="1920240"/>
+            <a:ext cx="2240280" cy="164592"/>
           </a:xfrm>
           <a:prstGeom prst="rect">
             <a:avLst/>
@@ -4098,8 +4098,8 @@
         </p:nvSpPr>
         <p:spPr>
           <a:xfrm>
-            <a:off x="2084832" y="1929384"/>
-            <a:ext cx="1867949" cy="118872"/>
+            <a:off x="2084832" y="1920240"/>
+            <a:ext cx="1989772" cy="164592"/>
           </a:xfrm>
           <a:prstGeom prst="rect">
             <a:avLst/>
@@ -4142,7 +4142,7 @@
               <a:buNone/>
             </a:pPr>
             <a:r>
-              <a:rPr lang="en-US" sz="900" b="1" dirty="0">
+              <a:rPr lang="en-US" sz="1020" b="1" dirty="0">
                 <a:solidFill>
                   <a:srgbClr val="1F1A17"/>
                 </a:solidFill>
@@ -4152,7 +4152,7 @@
               </a:rPr>
               <a:t>88.8%</a:t>
             </a:r>
-            <a:endParaRPr lang="en-US" sz="900" dirty="0"/>
+            <a:endParaRPr lang="en-US" sz="1020" dirty="0"/>
           </a:p>
         </p:txBody>
       </p:sp>
@@ -4181,7 +4181,7 @@
               <a:buNone/>
             </a:pPr>
             <a:r>
-              <a:rPr lang="en-US" sz="900" b="1" dirty="0">
+              <a:rPr lang="en-US" sz="1020" b="1" dirty="0">
                 <a:solidFill>
                   <a:srgbClr val="776C64"/>
                 </a:solidFill>
@@ -4191,7 +4191,7 @@
               </a:rPr>
               <a:t>Recall</a:t>
             </a:r>
-            <a:endParaRPr lang="en-US" sz="900" dirty="0"/>
+            <a:endParaRPr lang="en-US" sz="1020" dirty="0"/>
           </a:p>
         </p:txBody>
       </p:sp>
@@ -4203,8 +4203,8 @@
         </p:nvSpPr>
         <p:spPr>
           <a:xfrm>
-            <a:off x="2084832" y="2587752"/>
-            <a:ext cx="2103120" cy="118872"/>
+            <a:off x="2084832" y="2578608"/>
+            <a:ext cx="2240280" cy="164592"/>
           </a:xfrm>
           <a:prstGeom prst="rect">
             <a:avLst/>
@@ -4230,8 +4230,8 @@
         </p:nvSpPr>
         <p:spPr>
           <a:xfrm>
-            <a:off x="2084832" y="2587752"/>
-            <a:ext cx="1657490" cy="118872"/>
+            <a:off x="2084832" y="2578608"/>
+            <a:ext cx="1765587" cy="164592"/>
           </a:xfrm>
           <a:prstGeom prst="rect">
             <a:avLst/>
@@ -4274,7 +4274,7 @@
               <a:buNone/>
             </a:pPr>
             <a:r>
-              <a:rPr lang="en-US" sz="900" b="1" dirty="0">
+              <a:rPr lang="en-US" sz="1020" b="1" dirty="0">
                 <a:solidFill>
                   <a:srgbClr val="1F1A17"/>
                 </a:solidFill>
@@ -4284,7 +4284,7 @@
               </a:rPr>
               <a:t>78.8%</a:t>
             </a:r>
-            <a:endParaRPr lang="en-US" sz="900" dirty="0"/>
+            <a:endParaRPr lang="en-US" sz="1020" dirty="0"/>
           </a:p>
         </p:txBody>
       </p:sp>
@@ -4313,7 +4313,7 @@
               <a:buNone/>
             </a:pPr>
             <a:r>
-              <a:rPr lang="en-US" sz="900" b="1" dirty="0">
+              <a:rPr lang="en-US" sz="1020" b="1" dirty="0">
                 <a:solidFill>
                   <a:srgbClr val="776C64"/>
                 </a:solidFill>
@@ -4323,7 +4323,7 @@
               </a:rPr>
               <a:t>mAP50</a:t>
             </a:r>
-            <a:endParaRPr lang="en-US" sz="900" dirty="0"/>
+            <a:endParaRPr lang="en-US" sz="1020" dirty="0"/>
           </a:p>
         </p:txBody>
       </p:sp>
@@ -4335,8 +4335,8 @@
         </p:nvSpPr>
         <p:spPr>
           <a:xfrm>
-            <a:off x="2084832" y="3246120"/>
-            <a:ext cx="2103120" cy="118872"/>
+            <a:off x="2084832" y="3236976"/>
+            <a:ext cx="2240280" cy="164592"/>
           </a:xfrm>
           <a:prstGeom prst="rect">
             <a:avLst/>
@@ -4362,8 +4362,8 @@
         </p:nvSpPr>
         <p:spPr>
           <a:xfrm>
-            <a:off x="2084832" y="3246120"/>
-            <a:ext cx="1822690" cy="118872"/>
+            <a:off x="2084832" y="3236976"/>
+            <a:ext cx="1941561" cy="164592"/>
           </a:xfrm>
           <a:prstGeom prst="rect">
             <a:avLst/>
@@ -4406,7 +4406,7 @@
               <a:buNone/>
             </a:pPr>
             <a:r>
-              <a:rPr lang="en-US" sz="900" b="1" dirty="0">
+              <a:rPr lang="en-US" sz="1020" b="1" dirty="0">
                 <a:solidFill>
                   <a:srgbClr val="1F1A17"/>
                 </a:solidFill>
@@ -4416,7 +4416,7 @@
               </a:rPr>
               <a:t>86.7%</a:t>
             </a:r>
-            <a:endParaRPr lang="en-US" sz="900" dirty="0"/>
+            <a:endParaRPr lang="en-US" sz="1020" dirty="0"/>
           </a:p>
         </p:txBody>
       </p:sp>
@@ -4445,7 +4445,7 @@
               <a:buNone/>
             </a:pPr>
             <a:r>
-              <a:rPr lang="en-US" sz="900" b="1" dirty="0">
+              <a:rPr lang="en-US" sz="1020" b="1" dirty="0">
                 <a:solidFill>
                   <a:srgbClr val="776C64"/>
                 </a:solidFill>
@@ -4455,7 +4455,7 @@
               </a:rPr>
               <a:t>mAP50-95</a:t>
             </a:r>
-            <a:endParaRPr lang="en-US" sz="900" dirty="0"/>
+            <a:endParaRPr lang="en-US" sz="1020" dirty="0"/>
           </a:p>
         </p:txBody>
       </p:sp>
@@ -4467,8 +4467,8 @@
         </p:nvSpPr>
         <p:spPr>
           <a:xfrm>
-            <a:off x="2084832" y="3904488"/>
-            <a:ext cx="2103120" cy="118872"/>
+            <a:off x="2084832" y="3895344"/>
+            <a:ext cx="2240280" cy="164592"/>
           </a:xfrm>
           <a:prstGeom prst="rect">
             <a:avLst/>
@@ -4494,8 +4494,8 @@
         </p:nvSpPr>
         <p:spPr>
           <a:xfrm>
-            <a:off x="2084832" y="3904488"/>
-            <a:ext cx="1335187" cy="118872"/>
+            <a:off x="2084832" y="3895344"/>
+            <a:ext cx="1422264" cy="164592"/>
           </a:xfrm>
           <a:prstGeom prst="rect">
             <a:avLst/>
@@ -4538,7 +4538,7 @@
               <a:buNone/>
             </a:pPr>
             <a:r>
-              <a:rPr lang="en-US" sz="900" b="1" dirty="0">
+              <a:rPr lang="en-US" sz="1020" b="1" dirty="0">
                 <a:solidFill>
                   <a:srgbClr val="1F1A17"/>
                 </a:solidFill>
@@ -4548,7 +4548,7 @@
               </a:rPr>
               <a:t>63.5%</a:t>
             </a:r>
-            <a:endParaRPr lang="en-US" sz="900" dirty="0"/>
+            <a:endParaRPr lang="en-US" sz="1020" dirty="0"/>
           </a:p>
         </p:txBody>
       </p:sp>
@@ -4577,7 +4577,7 @@
               <a:buNone/>
             </a:pPr>
             <a:r>
-              <a:rPr lang="en-US" sz="1120" dirty="0">
+              <a:rPr lang="en-US" sz="1240" dirty="0">
                 <a:solidFill>
                   <a:srgbClr val="776C64"/>
                 </a:solidFill>
@@ -4587,7 +4587,7 @@
               </a:rPr>
               <a:t>一定条件では検出できたが、mAP50-95は63.5%で、厳密な位置合わせには改善余地がある。</a:t>
             </a:r>
-            <a:endParaRPr lang="en-US" sz="1120" dirty="0"/>
+            <a:endParaRPr lang="en-US" sz="1240" dirty="0"/>
           </a:p>
         </p:txBody>
       </p:sp>
@@ -4640,7 +4640,7 @@
               <a:buNone/>
             </a:pPr>
             <a:r>
-              <a:rPr lang="en-US" sz="670" dirty="0">
+              <a:rPr lang="en-US" sz="760" dirty="0">
                 <a:solidFill>
                   <a:srgbClr val="776C64"/>
                 </a:solidFill>
@@ -4650,7 +4650,7 @@
               </a:rPr>
               <a:t>出典: detect_results/train/results.csv, results.png</a:t>
             </a:r>
-            <a:endParaRPr lang="en-US" sz="670" dirty="0"/>
+            <a:endParaRPr lang="en-US" sz="760" dirty="0"/>
           </a:p>
         </p:txBody>
       </p:sp>
@@ -4759,24 +4759,24 @@
         </p:nvSpPr>
         <p:spPr>
           <a:xfrm>
-            <a:off x="530352" y="320040"/>
-            <a:ext cx="1325880" cy="182880"/>
-          </a:xfrm>
-          <a:prstGeom prst="rect">
-            <a:avLst/>
-          </a:prstGeom>
-          <a:noFill/>
-          <a:ln/>
-        </p:spPr>
-        <p:txBody>
-          <a:bodyPr wrap="square" lIns="0" tIns="0" rIns="0" bIns="0" rtlCol="0" anchor="ctr"/>
-          <a:lstStyle/>
-          <a:p>
-            <a:pPr indent="0" marL="0">
-              <a:buNone/>
-            </a:pPr>
-            <a:r>
-              <a:rPr lang="en-US" sz="750" b="1" dirty="0">
+            <a:off x="530352" y="292608"/>
+            <a:ext cx="1600200" cy="201168"/>
+          </a:xfrm>
+          <a:prstGeom prst="rect">
+            <a:avLst/>
+          </a:prstGeom>
+          <a:noFill/>
+          <a:ln/>
+        </p:spPr>
+        <p:txBody>
+          <a:bodyPr wrap="square" lIns="0" tIns="0" rIns="0" bIns="0" rtlCol="0" anchor="ctr"/>
+          <a:lstStyle/>
+          <a:p>
+            <a:pPr indent="0" marL="0">
+              <a:buNone/>
+            </a:pPr>
+            <a:r>
+              <a:rPr lang="en-US" sz="840" b="1" dirty="0">
                 <a:solidFill>
                   <a:srgbClr val="8E2335"/>
                 </a:solidFill>
@@ -4786,7 +4786,7 @@
               </a:rPr>
               <a:t>3章 結果と考察</a:t>
             </a:r>
-            <a:endParaRPr lang="en-US" sz="750" dirty="0"/>
+            <a:endParaRPr lang="en-US" sz="840" dirty="0"/>
           </a:p>
         </p:txBody>
       </p:sp>
@@ -4798,8 +4798,8 @@
         </p:nvSpPr>
         <p:spPr>
           <a:xfrm>
-            <a:off x="530352" y="566928"/>
-            <a:ext cx="7406640" cy="384048"/>
+            <a:off x="530352" y="557784"/>
+            <a:ext cx="7406640" cy="420624"/>
           </a:xfrm>
           <a:prstGeom prst="rect">
             <a:avLst/>
@@ -4877,7 +4877,7 @@
               <a:buNone/>
             </a:pPr>
             <a:r>
-              <a:rPr lang="en-US" sz="750" b="1" dirty="0">
+              <a:rPr lang="en-US" sz="850" b="1" dirty="0">
                 <a:solidFill>
                   <a:srgbClr val="776C64"/>
                 </a:solidFill>
@@ -4887,7 +4887,7 @@
               </a:rPr>
               <a:t>12</a:t>
             </a:r>
-            <a:endParaRPr lang="en-US" sz="750" dirty="0"/>
+            <a:endParaRPr lang="en-US" sz="850" dirty="0"/>
           </a:p>
         </p:txBody>
       </p:sp>
@@ -4916,7 +4916,7 @@
               <a:buNone/>
             </a:pPr>
             <a:r>
-              <a:rPr lang="en-US" sz="1900" b="1" dirty="0">
+              <a:rPr lang="en-US" sz="2100" b="1" dirty="0">
                 <a:solidFill>
                   <a:srgbClr val="1F1A17"/>
                 </a:solidFill>
@@ -4926,7 +4926,7 @@
               </a:rPr>
               <a:t>confidenceが付いた検出枠として出力される</a:t>
             </a:r>
-            <a:endParaRPr lang="en-US" sz="1900" dirty="0"/>
+            <a:endParaRPr lang="en-US" sz="2100" dirty="0"/>
           </a:p>
         </p:txBody>
       </p:sp>
@@ -4945,8 +4945,8 @@
         </p:blipFill>
         <p:spPr>
           <a:xfrm>
-            <a:off x="768096" y="1865376"/>
-            <a:ext cx="2331720" cy="2331720"/>
+            <a:off x="676656" y="1792224"/>
+            <a:ext cx="2487168" cy="2487168"/>
           </a:xfrm>
           <a:prstGeom prst="rect">
             <a:avLst/>
@@ -4961,8 +4961,8 @@
         </p:nvSpPr>
         <p:spPr>
           <a:xfrm>
-            <a:off x="768096" y="1865376"/>
-            <a:ext cx="2331720" cy="2331720"/>
+            <a:off x="676656" y="1792224"/>
+            <a:ext cx="2487168" cy="2487168"/>
           </a:xfrm>
           <a:prstGeom prst="rect">
             <a:avLst/>
@@ -4988,8 +4988,8 @@
         </p:nvSpPr>
         <p:spPr>
           <a:xfrm>
-            <a:off x="768096" y="1865376"/>
-            <a:ext cx="2331720" cy="310896"/>
+            <a:off x="676656" y="1792224"/>
+            <a:ext cx="2487168" cy="310896"/>
           </a:xfrm>
           <a:prstGeom prst="rect">
             <a:avLst/>
@@ -5015,8 +5015,8 @@
         </p:nvSpPr>
         <p:spPr>
           <a:xfrm>
-            <a:off x="859536" y="1929384"/>
-            <a:ext cx="2148840" cy="109728"/>
+            <a:off x="768096" y="1856232"/>
+            <a:ext cx="2304288" cy="128016"/>
           </a:xfrm>
           <a:prstGeom prst="rect">
             <a:avLst/>
@@ -5032,7 +5032,7 @@
               <a:buNone/>
             </a:pPr>
             <a:r>
-              <a:rPr lang="en-US" sz="750" b="1" dirty="0">
+              <a:rPr lang="en-US" sz="830" b="1" dirty="0">
                 <a:solidFill>
                   <a:srgbClr val="FFFFFF"/>
                 </a:solidFill>
@@ -5042,7 +5042,7 @@
               </a:rPr>
               <a:t>lamb 0.81</a:t>
             </a:r>
-            <a:endParaRPr lang="en-US" sz="750" dirty="0"/>
+            <a:endParaRPr lang="en-US" sz="830" dirty="0"/>
           </a:p>
         </p:txBody>
       </p:sp>
@@ -5061,8 +5061,8 @@
         </p:blipFill>
         <p:spPr>
           <a:xfrm>
-            <a:off x="3355848" y="1865376"/>
-            <a:ext cx="2331720" cy="2331720"/>
+            <a:off x="3310128" y="1792224"/>
+            <a:ext cx="2487168" cy="2487168"/>
           </a:xfrm>
           <a:prstGeom prst="rect">
             <a:avLst/>
@@ -5077,8 +5077,8 @@
         </p:nvSpPr>
         <p:spPr>
           <a:xfrm>
-            <a:off x="3355848" y="1865376"/>
-            <a:ext cx="2331720" cy="2331720"/>
+            <a:off x="3310128" y="1792224"/>
+            <a:ext cx="2487168" cy="2487168"/>
           </a:xfrm>
           <a:prstGeom prst="rect">
             <a:avLst/>
@@ -5104,8 +5104,8 @@
         </p:nvSpPr>
         <p:spPr>
           <a:xfrm>
-            <a:off x="3355848" y="1865376"/>
-            <a:ext cx="2331720" cy="310896"/>
+            <a:off x="3310128" y="1792224"/>
+            <a:ext cx="2487168" cy="310896"/>
           </a:xfrm>
           <a:prstGeom prst="rect">
             <a:avLst/>
@@ -5131,8 +5131,8 @@
         </p:nvSpPr>
         <p:spPr>
           <a:xfrm>
-            <a:off x="3447288" y="1929384"/>
-            <a:ext cx="2148840" cy="109728"/>
+            <a:off x="3401568" y="1856232"/>
+            <a:ext cx="2304288" cy="128016"/>
           </a:xfrm>
           <a:prstGeom prst="rect">
             <a:avLst/>
@@ -5148,7 +5148,7 @@
               <a:buNone/>
             </a:pPr>
             <a:r>
-              <a:rPr lang="en-US" sz="750" b="1" dirty="0">
+              <a:rPr lang="en-US" sz="830" b="1" dirty="0">
                 <a:solidFill>
                   <a:srgbClr val="FFFFFF"/>
                 </a:solidFill>
@@ -5158,7 +5158,7 @@
               </a:rPr>
               <a:t>pork 0.58</a:t>
             </a:r>
-            <a:endParaRPr lang="en-US" sz="750" dirty="0"/>
+            <a:endParaRPr lang="en-US" sz="830" dirty="0"/>
           </a:p>
         </p:txBody>
       </p:sp>
@@ -5177,8 +5177,8 @@
         </p:blipFill>
         <p:spPr>
           <a:xfrm>
-            <a:off x="5943600" y="1865376"/>
-            <a:ext cx="2331720" cy="2331720"/>
+            <a:off x="5943600" y="1792224"/>
+            <a:ext cx="2487168" cy="2487168"/>
           </a:xfrm>
           <a:prstGeom prst="rect">
             <a:avLst/>
@@ -5193,8 +5193,8 @@
         </p:nvSpPr>
         <p:spPr>
           <a:xfrm>
-            <a:off x="5943600" y="1865376"/>
-            <a:ext cx="2331720" cy="2331720"/>
+            <a:off x="5943600" y="1792224"/>
+            <a:ext cx="2487168" cy="2487168"/>
           </a:xfrm>
           <a:prstGeom prst="rect">
             <a:avLst/>
@@ -5220,8 +5220,8 @@
         </p:nvSpPr>
         <p:spPr>
           <a:xfrm>
-            <a:off x="5943600" y="1865376"/>
-            <a:ext cx="2331720" cy="310896"/>
+            <a:off x="5943600" y="1792224"/>
+            <a:ext cx="2487168" cy="310896"/>
           </a:xfrm>
           <a:prstGeom prst="rect">
             <a:avLst/>
@@ -5247,8 +5247,8 @@
         </p:nvSpPr>
         <p:spPr>
           <a:xfrm>
-            <a:off x="6035040" y="1929384"/>
-            <a:ext cx="2148840" cy="109728"/>
+            <a:off x="6035040" y="1856232"/>
+            <a:ext cx="2304288" cy="128016"/>
           </a:xfrm>
           <a:prstGeom prst="rect">
             <a:avLst/>
@@ -5264,7 +5264,7 @@
               <a:buNone/>
             </a:pPr>
             <a:r>
-              <a:rPr lang="en-US" sz="750" b="1" dirty="0">
+              <a:rPr lang="en-US" sz="830" b="1" dirty="0">
                 <a:solidFill>
                   <a:srgbClr val="FFFFFF"/>
                 </a:solidFill>
@@ -5274,7 +5274,7 @@
               </a:rPr>
               <a:t>lamb 0.55</a:t>
             </a:r>
-            <a:endParaRPr lang="en-US" sz="750" dirty="0"/>
+            <a:endParaRPr lang="en-US" sz="830" dirty="0"/>
           </a:p>
         </p:txBody>
       </p:sp>
@@ -5293,8 +5293,8 @@
         </p:blipFill>
         <p:spPr>
           <a:xfrm>
-            <a:off x="8531352" y="1865376"/>
-            <a:ext cx="2331720" cy="2331720"/>
+            <a:off x="8577072" y="1792224"/>
+            <a:ext cx="2487168" cy="2487168"/>
           </a:xfrm>
           <a:prstGeom prst="rect">
             <a:avLst/>
@@ -5309,8 +5309,8 @@
         </p:nvSpPr>
         <p:spPr>
           <a:xfrm>
-            <a:off x="8531352" y="1865376"/>
-            <a:ext cx="2331720" cy="2331720"/>
+            <a:off x="8577072" y="1792224"/>
+            <a:ext cx="2487168" cy="2487168"/>
           </a:xfrm>
           <a:prstGeom prst="rect">
             <a:avLst/>
@@ -5336,8 +5336,8 @@
         </p:nvSpPr>
         <p:spPr>
           <a:xfrm>
-            <a:off x="8531352" y="1865376"/>
-            <a:ext cx="2331720" cy="310896"/>
+            <a:off x="8577072" y="1792224"/>
+            <a:ext cx="2487168" cy="310896"/>
           </a:xfrm>
           <a:prstGeom prst="rect">
             <a:avLst/>
@@ -5363,8 +5363,8 @@
         </p:nvSpPr>
         <p:spPr>
           <a:xfrm>
-            <a:off x="8622792" y="1929384"/>
-            <a:ext cx="2148840" cy="109728"/>
+            <a:off x="8668512" y="1856232"/>
+            <a:ext cx="2304288" cy="128016"/>
           </a:xfrm>
           <a:prstGeom prst="rect">
             <a:avLst/>
@@ -5380,7 +5380,7 @@
               <a:buNone/>
             </a:pPr>
             <a:r>
-              <a:rPr lang="en-US" sz="750" b="1" dirty="0">
+              <a:rPr lang="en-US" sz="830" b="1" dirty="0">
                 <a:solidFill>
                   <a:srgbClr val="FFFFFF"/>
                 </a:solidFill>
@@ -5390,7 +5390,7 @@
               </a:rPr>
               <a:t>例: 判断が難しい画像</a:t>
             </a:r>
-            <a:endParaRPr lang="en-US" sz="750" dirty="0"/>
+            <a:endParaRPr lang="en-US" sz="830" dirty="0"/>
           </a:p>
         </p:txBody>
       </p:sp>
@@ -5402,8 +5402,8 @@
         </p:nvSpPr>
         <p:spPr>
           <a:xfrm>
-            <a:off x="932688" y="4828032"/>
-            <a:ext cx="4526280" cy="658368"/>
+            <a:off x="932688" y="4736592"/>
+            <a:ext cx="4681728" cy="786384"/>
           </a:xfrm>
           <a:prstGeom prst="rect">
             <a:avLst/>
@@ -5427,7 +5427,7 @@
         </p:nvSpPr>
         <p:spPr>
           <a:xfrm>
-            <a:off x="1161288" y="4974336"/>
+            <a:off x="1161288" y="4919472"/>
             <a:ext cx="1463040" cy="128016"/>
           </a:xfrm>
           <a:prstGeom prst="rect">
@@ -5444,7 +5444,7 @@
               <a:buNone/>
             </a:pPr>
             <a:r>
-              <a:rPr lang="en-US" sz="830" b="1" dirty="0">
+              <a:rPr lang="en-US" sz="940" b="1" dirty="0">
                 <a:solidFill>
                   <a:srgbClr val="1BAE9D"/>
                 </a:solidFill>
@@ -5454,7 +5454,7 @@
               </a:rPr>
               <a:t>成功しやすい条件</a:t>
             </a:r>
-            <a:endParaRPr lang="en-US" sz="830" dirty="0"/>
+            <a:endParaRPr lang="en-US" sz="940" dirty="0"/>
           </a:p>
         </p:txBody>
       </p:sp>
@@ -5466,24 +5466,24 @@
         </p:nvSpPr>
         <p:spPr>
           <a:xfrm>
-            <a:off x="2651760" y="4965192"/>
-            <a:ext cx="2514600" cy="164592"/>
-          </a:xfrm>
-          <a:prstGeom prst="rect">
-            <a:avLst/>
-          </a:prstGeom>
-          <a:noFill/>
-          <a:ln/>
-        </p:spPr>
-        <p:txBody>
-          <a:bodyPr wrap="square" lIns="0" tIns="0" rIns="0" bIns="0" rtlCol="0" anchor="ctr"/>
-          <a:lstStyle/>
-          <a:p>
-            <a:pPr indent="0" marL="0">
-              <a:buNone/>
-            </a:pPr>
-            <a:r>
-              <a:rPr lang="en-US" sz="850" dirty="0">
+            <a:off x="2651760" y="4901184"/>
+            <a:ext cx="2670048" cy="237744"/>
+          </a:xfrm>
+          <a:prstGeom prst="rect">
+            <a:avLst/>
+          </a:prstGeom>
+          <a:noFill/>
+          <a:ln/>
+        </p:spPr>
+        <p:txBody>
+          <a:bodyPr wrap="square" lIns="0" tIns="0" rIns="0" bIns="0" rtlCol="0" anchor="ctr"/>
+          <a:lstStyle/>
+          <a:p>
+            <a:pPr indent="0" marL="0">
+              <a:buNone/>
+            </a:pPr>
+            <a:r>
+              <a:rPr lang="en-US" sz="950" dirty="0">
                 <a:solidFill>
                   <a:srgbClr val="776C64"/>
                 </a:solidFill>
@@ -5493,7 +5493,7 @@
               </a:rPr>
               <a:t>肉が大きく、背景が単純で、脂身や色の特徴が見える</a:t>
             </a:r>
-            <a:endParaRPr lang="en-US" sz="850" dirty="0"/>
+            <a:endParaRPr lang="en-US" sz="950" dirty="0"/>
           </a:p>
         </p:txBody>
       </p:sp>
@@ -5505,8 +5505,8 @@
         </p:nvSpPr>
         <p:spPr>
           <a:xfrm>
-            <a:off x="6345936" y="4828032"/>
-            <a:ext cx="4526280" cy="658368"/>
+            <a:off x="6345936" y="4736592"/>
+            <a:ext cx="4681728" cy="786384"/>
           </a:xfrm>
           <a:prstGeom prst="rect">
             <a:avLst/>
@@ -5530,7 +5530,7 @@
         </p:nvSpPr>
         <p:spPr>
           <a:xfrm>
-            <a:off x="6574536" y="4974336"/>
+            <a:off x="6574536" y="4919472"/>
             <a:ext cx="1463040" cy="128016"/>
           </a:xfrm>
           <a:prstGeom prst="rect">
@@ -5547,7 +5547,7 @@
               <a:buNone/>
             </a:pPr>
             <a:r>
-              <a:rPr lang="en-US" sz="830" b="1" dirty="0">
+              <a:rPr lang="en-US" sz="940" b="1" dirty="0">
                 <a:solidFill>
                   <a:srgbClr val="8E2335"/>
                 </a:solidFill>
@@ -5557,7 +5557,7 @@
               </a:rPr>
               <a:t>難しい条件</a:t>
             </a:r>
-            <a:endParaRPr lang="en-US" sz="830" dirty="0"/>
+            <a:endParaRPr lang="en-US" sz="940" dirty="0"/>
           </a:p>
         </p:txBody>
       </p:sp>
@@ -5569,24 +5569,24 @@
         </p:nvSpPr>
         <p:spPr>
           <a:xfrm>
-            <a:off x="8065008" y="4965192"/>
-            <a:ext cx="2514600" cy="164592"/>
-          </a:xfrm>
-          <a:prstGeom prst="rect">
-            <a:avLst/>
-          </a:prstGeom>
-          <a:noFill/>
-          <a:ln/>
-        </p:spPr>
-        <p:txBody>
-          <a:bodyPr wrap="square" lIns="0" tIns="0" rIns="0" bIns="0" rtlCol="0" anchor="ctr"/>
-          <a:lstStyle/>
-          <a:p>
-            <a:pPr indent="0" marL="0">
-              <a:buNone/>
-            </a:pPr>
-            <a:r>
-              <a:rPr lang="en-US" sz="850" dirty="0">
+            <a:off x="8065008" y="4901184"/>
+            <a:ext cx="2670048" cy="237744"/>
+          </a:xfrm>
+          <a:prstGeom prst="rect">
+            <a:avLst/>
+          </a:prstGeom>
+          <a:noFill/>
+          <a:ln/>
+        </p:spPr>
+        <p:txBody>
+          <a:bodyPr wrap="square" lIns="0" tIns="0" rIns="0" bIns="0" rtlCol="0" anchor="ctr"/>
+          <a:lstStyle/>
+          <a:p>
+            <a:pPr indent="0" marL="0">
+              <a:buNone/>
+            </a:pPr>
+            <a:r>
+              <a:rPr lang="en-US" sz="950" dirty="0">
                 <a:solidFill>
                   <a:srgbClr val="776C64"/>
                 </a:solidFill>
@@ -5596,7 +5596,7 @@
               </a:rPr>
               <a:t>透かし、背景、暗さ、肉同士の類似でconfidenceが下がる</a:t>
             </a:r>
-            <a:endParaRPr lang="en-US" sz="850" dirty="0"/>
+            <a:endParaRPr lang="en-US" sz="950" dirty="0"/>
           </a:p>
         </p:txBody>
       </p:sp>
@@ -5705,24 +5705,24 @@
         </p:nvSpPr>
         <p:spPr>
           <a:xfrm>
-            <a:off x="530352" y="320040"/>
-            <a:ext cx="1325880" cy="182880"/>
-          </a:xfrm>
-          <a:prstGeom prst="rect">
-            <a:avLst/>
-          </a:prstGeom>
-          <a:noFill/>
-          <a:ln/>
-        </p:spPr>
-        <p:txBody>
-          <a:bodyPr wrap="square" lIns="0" tIns="0" rIns="0" bIns="0" rtlCol="0" anchor="ctr"/>
-          <a:lstStyle/>
-          <a:p>
-            <a:pPr indent="0" marL="0">
-              <a:buNone/>
-            </a:pPr>
-            <a:r>
-              <a:rPr lang="en-US" sz="750" b="1" dirty="0">
+            <a:off x="530352" y="292608"/>
+            <a:ext cx="1600200" cy="201168"/>
+          </a:xfrm>
+          <a:prstGeom prst="rect">
+            <a:avLst/>
+          </a:prstGeom>
+          <a:noFill/>
+          <a:ln/>
+        </p:spPr>
+        <p:txBody>
+          <a:bodyPr wrap="square" lIns="0" tIns="0" rIns="0" bIns="0" rtlCol="0" anchor="ctr"/>
+          <a:lstStyle/>
+          <a:p>
+            <a:pPr indent="0" marL="0">
+              <a:buNone/>
+            </a:pPr>
+            <a:r>
+              <a:rPr lang="en-US" sz="840" b="1" dirty="0">
                 <a:solidFill>
                   <a:srgbClr val="8E2335"/>
                 </a:solidFill>
@@ -5732,7 +5732,7 @@
               </a:rPr>
               <a:t>3章 結果と考察</a:t>
             </a:r>
-            <a:endParaRPr lang="en-US" sz="750" dirty="0"/>
+            <a:endParaRPr lang="en-US" sz="840" dirty="0"/>
           </a:p>
         </p:txBody>
       </p:sp>
@@ -5744,8 +5744,8 @@
         </p:nvSpPr>
         <p:spPr>
           <a:xfrm>
-            <a:off x="530352" y="566928"/>
-            <a:ext cx="7406640" cy="384048"/>
+            <a:off x="530352" y="557784"/>
+            <a:ext cx="7406640" cy="420624"/>
           </a:xfrm>
           <a:prstGeom prst="rect">
             <a:avLst/>
@@ -5823,7 +5823,7 @@
               <a:buNone/>
             </a:pPr>
             <a:r>
-              <a:rPr lang="en-US" sz="750" b="1" dirty="0">
+              <a:rPr lang="en-US" sz="850" b="1" dirty="0">
                 <a:solidFill>
                   <a:srgbClr val="776C64"/>
                 </a:solidFill>
@@ -5833,7 +5833,7 @@
               </a:rPr>
               <a:t>13</a:t>
             </a:r>
-            <a:endParaRPr lang="en-US" sz="750" dirty="0"/>
+            <a:endParaRPr lang="en-US" sz="850" dirty="0"/>
           </a:p>
         </p:txBody>
       </p:sp>
@@ -5886,7 +5886,7 @@
               <a:buNone/>
             </a:pPr>
             <a:r>
-              <a:rPr lang="en-US" sz="1600" b="1" dirty="0">
+              <a:rPr lang="en-US" sz="1750" b="1" dirty="0">
                 <a:solidFill>
                   <a:srgbClr val="1F1A17"/>
                 </a:solidFill>
@@ -5896,7 +5896,7 @@
               </a:rPr>
               <a:t>混同行列から見えること</a:t>
             </a:r>
-            <a:endParaRPr lang="en-US" sz="1600" dirty="0"/>
+            <a:endParaRPr lang="en-US" sz="1750" dirty="0"/>
           </a:p>
         </p:txBody>
       </p:sp>
@@ -5952,7 +5952,7 @@
               <a:buNone/>
             </a:pPr>
             <a:r>
-              <a:rPr lang="en-US" sz="920" b="1" dirty="0">
+              <a:rPr lang="en-US" sz="1040" b="1" dirty="0">
                 <a:solidFill>
                   <a:srgbClr val="1F1A17"/>
                 </a:solidFill>
@@ -5962,7 +5962,7 @@
               </a:rPr>
               <a:t>判定できた点</a:t>
             </a:r>
-            <a:endParaRPr lang="en-US" sz="920" dirty="0"/>
+            <a:endParaRPr lang="en-US" sz="1040" dirty="0"/>
           </a:p>
         </p:txBody>
       </p:sp>
@@ -5975,23 +5975,23 @@
         <p:spPr>
           <a:xfrm>
             <a:off x="8577072" y="1929384"/>
-            <a:ext cx="2487168" cy="347472"/>
-          </a:xfrm>
-          <a:prstGeom prst="rect">
-            <a:avLst/>
-          </a:prstGeom>
-          <a:noFill/>
-          <a:ln/>
-        </p:spPr>
-        <p:txBody>
-          <a:bodyPr wrap="square" lIns="0" tIns="0" rIns="0" bIns="0" rtlCol="0" anchor="ctr"/>
-          <a:lstStyle/>
-          <a:p>
-            <a:pPr indent="0" marL="0">
-              <a:buNone/>
-            </a:pPr>
-            <a:r>
-              <a:rPr lang="en-US" sz="920" dirty="0">
+            <a:ext cx="2606040" cy="402336"/>
+          </a:xfrm>
+          <a:prstGeom prst="rect">
+            <a:avLst/>
+          </a:prstGeom>
+          <a:noFill/>
+          <a:ln/>
+        </p:spPr>
+        <p:txBody>
+          <a:bodyPr wrap="square" lIns="0" tIns="0" rIns="0" bIns="0" rtlCol="0" anchor="ctr"/>
+          <a:lstStyle/>
+          <a:p>
+            <a:pPr indent="0" marL="0">
+              <a:buNone/>
+            </a:pPr>
+            <a:r>
+              <a:rPr lang="en-US" sz="1030" dirty="0">
                 <a:solidFill>
                   <a:srgbClr val="776C64"/>
                 </a:solidFill>
@@ -6001,7 +6001,7 @@
               </a:rPr>
               <a:t>lambなど特徴が強い画像では正解数が多い</a:t>
             </a:r>
-            <a:endParaRPr lang="en-US" sz="920" dirty="0"/>
+            <a:endParaRPr lang="en-US" sz="1030" dirty="0"/>
           </a:p>
         </p:txBody>
       </p:sp>
@@ -6080,7 +6080,7 @@
               <a:buNone/>
             </a:pPr>
             <a:r>
-              <a:rPr lang="en-US" sz="920" b="1" dirty="0">
+              <a:rPr lang="en-US" sz="1040" b="1" dirty="0">
                 <a:solidFill>
                   <a:srgbClr val="1F1A17"/>
                 </a:solidFill>
@@ -6090,7 +6090,7 @@
               </a:rPr>
               <a:t>誤りやすい点</a:t>
             </a:r>
-            <a:endParaRPr lang="en-US" sz="920" dirty="0"/>
+            <a:endParaRPr lang="en-US" sz="1040" dirty="0"/>
           </a:p>
         </p:txBody>
       </p:sp>
@@ -6103,23 +6103,23 @@
         <p:spPr>
           <a:xfrm>
             <a:off x="8577072" y="2889504"/>
-            <a:ext cx="2487168" cy="347472"/>
-          </a:xfrm>
-          <a:prstGeom prst="rect">
-            <a:avLst/>
-          </a:prstGeom>
-          <a:noFill/>
-          <a:ln/>
-        </p:spPr>
-        <p:txBody>
-          <a:bodyPr wrap="square" lIns="0" tIns="0" rIns="0" bIns="0" rtlCol="0" anchor="ctr"/>
-          <a:lstStyle/>
-          <a:p>
-            <a:pPr indent="0" marL="0">
-              <a:buNone/>
-            </a:pPr>
-            <a:r>
-              <a:rPr lang="en-US" sz="920" dirty="0">
+            <a:ext cx="2606040" cy="402336"/>
+          </a:xfrm>
+          <a:prstGeom prst="rect">
+            <a:avLst/>
+          </a:prstGeom>
+          <a:noFill/>
+          <a:ln/>
+        </p:spPr>
+        <p:txBody>
+          <a:bodyPr wrap="square" lIns="0" tIns="0" rIns="0" bIns="0" rtlCol="0" anchor="ctr"/>
+          <a:lstStyle/>
+          <a:p>
+            <a:pPr indent="0" marL="0">
+              <a:buNone/>
+            </a:pPr>
+            <a:r>
+              <a:rPr lang="en-US" sz="1030" dirty="0">
                 <a:solidFill>
                   <a:srgbClr val="776C64"/>
                 </a:solidFill>
@@ -6129,7 +6129,7 @@
               </a:rPr>
               <a:t>background扱い、pork周辺の混同、検出漏れが発生</a:t>
             </a:r>
-            <a:endParaRPr lang="en-US" sz="920" dirty="0"/>
+            <a:endParaRPr lang="en-US" sz="1030" dirty="0"/>
           </a:p>
         </p:txBody>
       </p:sp>
@@ -6208,7 +6208,7 @@
               <a:buNone/>
             </a:pPr>
             <a:r>
-              <a:rPr lang="en-US" sz="920" b="1" dirty="0">
+              <a:rPr lang="en-US" sz="1040" b="1" dirty="0">
                 <a:solidFill>
                   <a:srgbClr val="1F1A17"/>
                 </a:solidFill>
@@ -6218,7 +6218,7 @@
               </a:rPr>
               <a:t>新たな発見</a:t>
             </a:r>
-            <a:endParaRPr lang="en-US" sz="920" dirty="0"/>
+            <a:endParaRPr lang="en-US" sz="1040" dirty="0"/>
           </a:p>
         </p:txBody>
       </p:sp>
@@ -6231,23 +6231,23 @@
         <p:spPr>
           <a:xfrm>
             <a:off x="8577072" y="3849624"/>
-            <a:ext cx="2487168" cy="347472"/>
-          </a:xfrm>
-          <a:prstGeom prst="rect">
-            <a:avLst/>
-          </a:prstGeom>
-          <a:noFill/>
-          <a:ln/>
-        </p:spPr>
-        <p:txBody>
-          <a:bodyPr wrap="square" lIns="0" tIns="0" rIns="0" bIns="0" rtlCol="0" anchor="ctr"/>
-          <a:lstStyle/>
-          <a:p>
-            <a:pPr indent="0" marL="0">
-              <a:buNone/>
-            </a:pPr>
-            <a:r>
-              <a:rPr lang="en-US" sz="920" dirty="0">
+            <a:ext cx="2606040" cy="402336"/>
+          </a:xfrm>
+          <a:prstGeom prst="rect">
+            <a:avLst/>
+          </a:prstGeom>
+          <a:noFill/>
+          <a:ln/>
+        </p:spPr>
+        <p:txBody>
+          <a:bodyPr wrap="square" lIns="0" tIns="0" rIns="0" bIns="0" rtlCol="0" anchor="ctr"/>
+          <a:lstStyle/>
+          <a:p>
+            <a:pPr indent="0" marL="0">
+              <a:buNone/>
+            </a:pPr>
+            <a:r>
+              <a:rPr lang="en-US" sz="1030" dirty="0">
                 <a:solidFill>
                   <a:srgbClr val="776C64"/>
                 </a:solidFill>
@@ -6257,7 +6257,7 @@
               </a:rPr>
               <a:t>肉そのものだけでなく、背景や撮影条件が結果に影響する</a:t>
             </a:r>
-            <a:endParaRPr lang="en-US" sz="920" dirty="0"/>
+            <a:endParaRPr lang="en-US" sz="1030" dirty="0"/>
           </a:p>
         </p:txBody>
       </p:sp>
@@ -6293,7 +6293,7 @@
         <p:spPr>
           <a:xfrm>
             <a:off x="6473952" y="5184648"/>
-            <a:ext cx="1234440" cy="219456"/>
+            <a:ext cx="1234440" cy="292608"/>
           </a:xfrm>
           <a:prstGeom prst="rect">
             <a:avLst/>
@@ -6319,8 +6319,8 @@
         </p:nvSpPr>
         <p:spPr>
           <a:xfrm>
-            <a:off x="6565392" y="5221224"/>
-            <a:ext cx="1051560" cy="109728"/>
+            <a:off x="6565392" y="5244084"/>
+            <a:ext cx="1051560" cy="128016"/>
           </a:xfrm>
           <a:prstGeom prst="rect">
             <a:avLst/>
@@ -6336,7 +6336,7 @@
               <a:buNone/>
             </a:pPr>
             <a:r>
-              <a:rPr lang="en-US" sz="660" b="1" dirty="0">
+              <a:rPr lang="en-US" sz="760" b="1" dirty="0">
                 <a:solidFill>
                   <a:srgbClr val="FFFFFF"/>
                 </a:solidFill>
@@ -6346,7 +6346,7 @@
               </a:rPr>
               <a:t>Takeaway</a:t>
             </a:r>
-            <a:endParaRPr lang="en-US" sz="660" dirty="0"/>
+            <a:endParaRPr lang="en-US" sz="760" dirty="0"/>
           </a:p>
         </p:txBody>
       </p:sp>
@@ -6375,7 +6375,7 @@
               <a:buNone/>
             </a:pPr>
             <a:r>
-              <a:rPr lang="en-US" sz="1150" b="1" dirty="0">
+              <a:rPr lang="en-US" sz="1260" b="1" dirty="0">
                 <a:solidFill>
                   <a:srgbClr val="1F1A17"/>
                 </a:solidFill>
@@ -6385,7 +6385,7 @@
               </a:rPr>
               <a:t>実用化には、モデル改善より先にデータ多様性の確保が重要</a:t>
             </a:r>
-            <a:endParaRPr lang="en-US" sz="1150" dirty="0"/>
+            <a:endParaRPr lang="en-US" sz="1260" dirty="0"/>
           </a:p>
         </p:txBody>
       </p:sp>
@@ -6563,7 +6563,7 @@
               <a:buNone/>
             </a:pPr>
             <a:r>
-              <a:rPr lang="en-US" sz="800" b="1" dirty="0">
+              <a:rPr lang="en-US" sz="900" b="1" dirty="0">
                 <a:solidFill>
                   <a:srgbClr val="1BAE9D"/>
                 </a:solidFill>
@@ -6573,7 +6573,7 @@
               </a:rPr>
               <a:t>4章 結論</a:t>
             </a:r>
-            <a:endParaRPr lang="en-US" sz="800" dirty="0"/>
+            <a:endParaRPr lang="en-US" sz="900" dirty="0"/>
           </a:p>
         </p:txBody>
       </p:sp>
@@ -6602,7 +6602,7 @@
               <a:buNone/>
             </a:pPr>
             <a:r>
-              <a:rPr lang="en-US" sz="2248" b="1" dirty="0">
+              <a:rPr lang="en-US" sz="2246" b="1" dirty="0">
                 <a:solidFill>
                   <a:srgbClr val="FFFFFF"/>
                 </a:solidFill>
@@ -6612,7 +6612,7 @@
               </a:rPr>
               <a:t>YOLOとRoboflowを用いて、肉画像から肉の種類を判定するモデルを構築し、認識性能と失敗要因を検証した。</a:t>
             </a:r>
-            <a:endParaRPr lang="en-US" sz="2248" dirty="0"/>
+            <a:endParaRPr lang="en-US" sz="2246" dirty="0"/>
           </a:p>
         </p:txBody>
       </p:sp>
@@ -6641,7 +6641,7 @@
               <a:buNone/>
             </a:pPr>
             <a:r>
-              <a:rPr lang="en-US" sz="820" b="1" dirty="0">
+              <a:rPr lang="en-US" sz="920" b="1" dirty="0">
                 <a:solidFill>
                   <a:srgbClr val="1BAE9D"/>
                 </a:solidFill>
@@ -6651,7 +6651,7 @@
               </a:rPr>
               <a:t>確認できたこと</a:t>
             </a:r>
-            <a:endParaRPr lang="en-US" sz="820" dirty="0"/>
+            <a:endParaRPr lang="en-US" sz="920" dirty="0"/>
           </a:p>
         </p:txBody>
       </p:sp>
@@ -6680,7 +6680,7 @@
               <a:buNone/>
             </a:pPr>
             <a:r>
-              <a:rPr lang="en-US" sz="980" dirty="0">
+              <a:rPr lang="en-US" sz="1100" dirty="0">
                 <a:solidFill>
                   <a:srgbClr val="D9D0C8"/>
                 </a:solidFill>
@@ -6690,7 +6690,7 @@
               </a:rPr>
               <a:t>一定条件では肉領域と種類を検出できた</a:t>
             </a:r>
-            <a:endParaRPr lang="en-US" sz="980" dirty="0"/>
+            <a:endParaRPr lang="en-US" sz="1100" dirty="0"/>
           </a:p>
         </p:txBody>
       </p:sp>
@@ -6719,7 +6719,7 @@
               <a:buNone/>
             </a:pPr>
             <a:r>
-              <a:rPr lang="en-US" sz="820" b="1" dirty="0">
+              <a:rPr lang="en-US" sz="920" b="1" dirty="0">
                 <a:solidFill>
                   <a:srgbClr val="D94E59"/>
                 </a:solidFill>
@@ -6729,7 +6729,7 @@
               </a:rPr>
               <a:t>残った課題</a:t>
             </a:r>
-            <a:endParaRPr lang="en-US" sz="820" dirty="0"/>
+            <a:endParaRPr lang="en-US" sz="920" dirty="0"/>
           </a:p>
         </p:txBody>
       </p:sp>
@@ -6758,7 +6758,7 @@
               <a:buNone/>
             </a:pPr>
             <a:r>
-              <a:rPr lang="en-US" sz="980" dirty="0">
+              <a:rPr lang="en-US" sz="1100" dirty="0">
                 <a:solidFill>
                   <a:srgbClr val="D9D0C8"/>
                 </a:solidFill>
@@ -6768,7 +6768,7 @@
               </a:rPr>
               <a:t>照明、部位、背景が誤分類や検出漏れにつながった</a:t>
             </a:r>
-            <a:endParaRPr lang="en-US" sz="980" dirty="0"/>
+            <a:endParaRPr lang="en-US" sz="1100" dirty="0"/>
           </a:p>
         </p:txBody>
       </p:sp>
@@ -6797,7 +6797,7 @@
               <a:buNone/>
             </a:pPr>
             <a:r>
-              <a:rPr lang="en-US" sz="820" b="1" dirty="0">
+              <a:rPr lang="en-US" sz="920" b="1" dirty="0">
                 <a:solidFill>
                   <a:srgbClr val="D79B38"/>
                 </a:solidFill>
@@ -6807,7 +6807,7 @@
               </a:rPr>
               <a:t>今後</a:t>
             </a:r>
-            <a:endParaRPr lang="en-US" sz="820" dirty="0"/>
+            <a:endParaRPr lang="en-US" sz="920" dirty="0"/>
           </a:p>
         </p:txBody>
       </p:sp>
@@ -6836,7 +6836,7 @@
               <a:buNone/>
             </a:pPr>
             <a:r>
-              <a:rPr lang="en-US" sz="980" dirty="0">
+              <a:rPr lang="en-US" sz="1100" dirty="0">
                 <a:solidFill>
                   <a:srgbClr val="D9D0C8"/>
                 </a:solidFill>
@@ -6846,7 +6846,7 @@
               </a:rPr>
               <a:t>多様な画像追加、背景条件の比較、他モデルとの比較を行う</a:t>
             </a:r>
-            <a:endParaRPr lang="en-US" sz="980" dirty="0"/>
+            <a:endParaRPr lang="en-US" sz="1100" dirty="0"/>
           </a:p>
         </p:txBody>
       </p:sp>
@@ -6875,7 +6875,7 @@
               <a:buNone/>
             </a:pPr>
             <a:r>
-              <a:rPr lang="en-US" sz="1050" b="1" dirty="0">
+              <a:rPr lang="en-US" sz="1180" b="1" dirty="0">
                 <a:solidFill>
                   <a:srgbClr val="FFFFFF"/>
                 </a:solidFill>
@@ -6885,7 +6885,7 @@
               </a:rPr>
               <a:t>今後は、実際の利用環境でも安定して判定できるモデルを目指す。</a:t>
             </a:r>
-            <a:endParaRPr lang="en-US" sz="1050" dirty="0"/>
+            <a:endParaRPr lang="en-US" sz="1180" dirty="0"/>
           </a:p>
         </p:txBody>
       </p:sp>
@@ -6914,7 +6914,7 @@
               <a:buNone/>
             </a:pPr>
             <a:r>
-              <a:rPr lang="en-US" sz="750" b="1" dirty="0">
+              <a:rPr lang="en-US" sz="850" b="1" dirty="0">
                 <a:solidFill>
                   <a:srgbClr val="776C64"/>
                 </a:solidFill>
@@ -6924,7 +6924,7 @@
               </a:rPr>
               <a:t>14</a:t>
             </a:r>
-            <a:endParaRPr lang="en-US" sz="750" dirty="0"/>
+            <a:endParaRPr lang="en-US" sz="850" dirty="0"/>
           </a:p>
         </p:txBody>
       </p:sp>
@@ -7100,7 +7100,7 @@
               <a:buNone/>
             </a:pPr>
             <a:r>
-              <a:rPr lang="en-US" sz="2400" b="1" dirty="0">
+              <a:rPr lang="en-US" sz="2700" b="1" dirty="0">
                 <a:solidFill>
                   <a:srgbClr val="1F1A17"/>
                 </a:solidFill>
@@ -7110,7 +7110,7 @@
               </a:rPr>
               <a:t>発表構成</a:t>
             </a:r>
-            <a:endParaRPr lang="en-US" sz="2400" dirty="0"/>
+            <a:endParaRPr lang="en-US" sz="2700" dirty="0"/>
           </a:p>
         </p:txBody>
       </p:sp>
@@ -7139,7 +7139,7 @@
               <a:buNone/>
             </a:pPr>
             <a:r>
-              <a:rPr lang="en-US" sz="1000" dirty="0">
+              <a:rPr lang="en-US" sz="1120" dirty="0">
                 <a:solidFill>
                   <a:srgbClr val="776C64"/>
                 </a:solidFill>
@@ -7149,7 +7149,7 @@
               </a:rPr>
               <a:t>研究目的を正当化し、手法、結果、今後の課題へつなげる</a:t>
             </a:r>
-            <a:endParaRPr lang="en-US" sz="1000" dirty="0"/>
+            <a:endParaRPr lang="en-US" sz="1120" dirty="0"/>
           </a:p>
         </p:txBody>
       </p:sp>
@@ -7178,7 +7178,7 @@
               <a:buNone/>
             </a:pPr>
             <a:r>
-              <a:rPr lang="en-US" sz="800" b="1" dirty="0">
+              <a:rPr lang="en-US" sz="920" b="1" dirty="0">
                 <a:solidFill>
                   <a:srgbClr val="8E2335"/>
                 </a:solidFill>
@@ -7188,7 +7188,7 @@
               </a:rPr>
               <a:t>01</a:t>
             </a:r>
-            <a:endParaRPr lang="en-US" sz="800" dirty="0"/>
+            <a:endParaRPr lang="en-US" sz="920" dirty="0"/>
           </a:p>
         </p:txBody>
       </p:sp>
@@ -7240,7 +7240,7 @@
               <a:buNone/>
             </a:pPr>
             <a:r>
-              <a:rPr lang="en-US" sz="1500" b="1" dirty="0">
+              <a:rPr lang="en-US" sz="1700" b="1" dirty="0">
                 <a:solidFill>
                   <a:srgbClr val="1F1A17"/>
                 </a:solidFill>
@@ -7250,7 +7250,7 @@
               </a:rPr>
               <a:t>はじめに</a:t>
             </a:r>
-            <a:endParaRPr lang="en-US" sz="1500" dirty="0"/>
+            <a:endParaRPr lang="en-US" sz="1700" dirty="0"/>
           </a:p>
         </p:txBody>
       </p:sp>
@@ -7279,7 +7279,7 @@
               <a:buNone/>
             </a:pPr>
             <a:r>
-              <a:rPr lang="en-US" sz="950" dirty="0">
+              <a:rPr lang="en-US" sz="1070" dirty="0">
                 <a:solidFill>
                   <a:srgbClr val="776C64"/>
                 </a:solidFill>
@@ -7289,7 +7289,7 @@
               </a:rPr>
               <a:t>背景、既往研究、課題、目的</a:t>
             </a:r>
-            <a:endParaRPr lang="en-US" sz="950" dirty="0"/>
+            <a:endParaRPr lang="en-US" sz="1070" dirty="0"/>
           </a:p>
         </p:txBody>
       </p:sp>
@@ -7341,7 +7341,7 @@
               <a:buNone/>
             </a:pPr>
             <a:r>
-              <a:rPr lang="en-US" sz="800" b="1" dirty="0">
+              <a:rPr lang="en-US" sz="920" b="1" dirty="0">
                 <a:solidFill>
                   <a:srgbClr val="8E2335"/>
                 </a:solidFill>
@@ -7351,7 +7351,7 @@
               </a:rPr>
               <a:t>02</a:t>
             </a:r>
-            <a:endParaRPr lang="en-US" sz="800" dirty="0"/>
+            <a:endParaRPr lang="en-US" sz="920" dirty="0"/>
           </a:p>
         </p:txBody>
       </p:sp>
@@ -7403,7 +7403,7 @@
               <a:buNone/>
             </a:pPr>
             <a:r>
-              <a:rPr lang="en-US" sz="1500" b="1" dirty="0">
+              <a:rPr lang="en-US" sz="1700" b="1" dirty="0">
                 <a:solidFill>
                   <a:srgbClr val="1F1A17"/>
                 </a:solidFill>
@@ -7413,7 +7413,7 @@
               </a:rPr>
               <a:t>手法</a:t>
             </a:r>
-            <a:endParaRPr lang="en-US" sz="1500" dirty="0"/>
+            <a:endParaRPr lang="en-US" sz="1700" dirty="0"/>
           </a:p>
         </p:txBody>
       </p:sp>
@@ -7442,7 +7442,7 @@
               <a:buNone/>
             </a:pPr>
             <a:r>
-              <a:rPr lang="en-US" sz="950" dirty="0">
+              <a:rPr lang="en-US" sz="1070" dirty="0">
                 <a:solidFill>
                   <a:srgbClr val="776C64"/>
                 </a:solidFill>
@@ -7452,7 +7452,7 @@
               </a:rPr>
               <a:t>全体の流れ、Roboflow、YOLO、担当分担</a:t>
             </a:r>
-            <a:endParaRPr lang="en-US" sz="950" dirty="0"/>
+            <a:endParaRPr lang="en-US" sz="1070" dirty="0"/>
           </a:p>
         </p:txBody>
       </p:sp>
@@ -7504,7 +7504,7 @@
               <a:buNone/>
             </a:pPr>
             <a:r>
-              <a:rPr lang="en-US" sz="800" b="1" dirty="0">
+              <a:rPr lang="en-US" sz="920" b="1" dirty="0">
                 <a:solidFill>
                   <a:srgbClr val="8E2335"/>
                 </a:solidFill>
@@ -7514,7 +7514,7 @@
               </a:rPr>
               <a:t>03</a:t>
             </a:r>
-            <a:endParaRPr lang="en-US" sz="800" dirty="0"/>
+            <a:endParaRPr lang="en-US" sz="920" dirty="0"/>
           </a:p>
         </p:txBody>
       </p:sp>
@@ -7566,7 +7566,7 @@
               <a:buNone/>
             </a:pPr>
             <a:r>
-              <a:rPr lang="en-US" sz="1500" b="1" dirty="0">
+              <a:rPr lang="en-US" sz="1700" b="1" dirty="0">
                 <a:solidFill>
                   <a:srgbClr val="1F1A17"/>
                 </a:solidFill>
@@ -7576,7 +7576,7 @@
               </a:rPr>
               <a:t>結果と考察</a:t>
             </a:r>
-            <a:endParaRPr lang="en-US" sz="1500" dirty="0"/>
+            <a:endParaRPr lang="en-US" sz="1700" dirty="0"/>
           </a:p>
         </p:txBody>
       </p:sp>
@@ -7605,7 +7605,7 @@
               <a:buNone/>
             </a:pPr>
             <a:r>
-              <a:rPr lang="en-US" sz="950" dirty="0">
+              <a:rPr lang="en-US" sz="1070" dirty="0">
                 <a:solidFill>
                   <a:srgbClr val="776C64"/>
                 </a:solidFill>
@@ -7615,7 +7615,7 @@
               </a:rPr>
               <a:t>精度指標、推論例、失敗要因</a:t>
             </a:r>
-            <a:endParaRPr lang="en-US" sz="950" dirty="0"/>
+            <a:endParaRPr lang="en-US" sz="1070" dirty="0"/>
           </a:p>
         </p:txBody>
       </p:sp>
@@ -7667,7 +7667,7 @@
               <a:buNone/>
             </a:pPr>
             <a:r>
-              <a:rPr lang="en-US" sz="800" b="1" dirty="0">
+              <a:rPr lang="en-US" sz="920" b="1" dirty="0">
                 <a:solidFill>
                   <a:srgbClr val="8E2335"/>
                 </a:solidFill>
@@ -7677,7 +7677,7 @@
               </a:rPr>
               <a:t>04</a:t>
             </a:r>
-            <a:endParaRPr lang="en-US" sz="800" dirty="0"/>
+            <a:endParaRPr lang="en-US" sz="920" dirty="0"/>
           </a:p>
         </p:txBody>
       </p:sp>
@@ -7729,7 +7729,7 @@
               <a:buNone/>
             </a:pPr>
             <a:r>
-              <a:rPr lang="en-US" sz="1500" b="1" dirty="0">
+              <a:rPr lang="en-US" sz="1700" b="1" dirty="0">
                 <a:solidFill>
                   <a:srgbClr val="1F1A17"/>
                 </a:solidFill>
@@ -7739,7 +7739,7 @@
               </a:rPr>
               <a:t>結論</a:t>
             </a:r>
-            <a:endParaRPr lang="en-US" sz="1500" dirty="0"/>
+            <a:endParaRPr lang="en-US" sz="1700" dirty="0"/>
           </a:p>
         </p:txBody>
       </p:sp>
@@ -7768,7 +7768,7 @@
               <a:buNone/>
             </a:pPr>
             <a:r>
-              <a:rPr lang="en-US" sz="950" dirty="0">
+              <a:rPr lang="en-US" sz="1070" dirty="0">
                 <a:solidFill>
                   <a:srgbClr val="776C64"/>
                 </a:solidFill>
@@ -7778,7 +7778,7 @@
               </a:rPr>
               <a:t>目的の過去形と今後の課題</a:t>
             </a:r>
-            <a:endParaRPr lang="en-US" sz="950" dirty="0"/>
+            <a:endParaRPr lang="en-US" sz="1070" dirty="0"/>
           </a:p>
         </p:txBody>
       </p:sp>
@@ -7830,7 +7830,7 @@
               <a:buNone/>
             </a:pPr>
             <a:r>
-              <a:rPr lang="en-US" sz="750" b="1" dirty="0">
+              <a:rPr lang="en-US" sz="850" b="1" dirty="0">
                 <a:solidFill>
                   <a:srgbClr val="776C64"/>
                 </a:solidFill>
@@ -7840,7 +7840,7 @@
               </a:rPr>
               <a:t>02</a:t>
             </a:r>
-            <a:endParaRPr lang="en-US" sz="750" dirty="0"/>
+            <a:endParaRPr lang="en-US" sz="850" dirty="0"/>
           </a:p>
         </p:txBody>
       </p:sp>
@@ -7949,24 +7949,24 @@
         </p:nvSpPr>
         <p:spPr>
           <a:xfrm>
-            <a:off x="530352" y="320040"/>
-            <a:ext cx="1325880" cy="182880"/>
-          </a:xfrm>
-          <a:prstGeom prst="rect">
-            <a:avLst/>
-          </a:prstGeom>
-          <a:noFill/>
-          <a:ln/>
-        </p:spPr>
-        <p:txBody>
-          <a:bodyPr wrap="square" lIns="0" tIns="0" rIns="0" bIns="0" rtlCol="0" anchor="ctr"/>
-          <a:lstStyle/>
-          <a:p>
-            <a:pPr indent="0" marL="0">
-              <a:buNone/>
-            </a:pPr>
-            <a:r>
-              <a:rPr lang="en-US" sz="750" b="1" dirty="0">
+            <a:off x="530352" y="292608"/>
+            <a:ext cx="1600200" cy="201168"/>
+          </a:xfrm>
+          <a:prstGeom prst="rect">
+            <a:avLst/>
+          </a:prstGeom>
+          <a:noFill/>
+          <a:ln/>
+        </p:spPr>
+        <p:txBody>
+          <a:bodyPr wrap="square" lIns="0" tIns="0" rIns="0" bIns="0" rtlCol="0" anchor="ctr"/>
+          <a:lstStyle/>
+          <a:p>
+            <a:pPr indent="0" marL="0">
+              <a:buNone/>
+            </a:pPr>
+            <a:r>
+              <a:rPr lang="en-US" sz="840" b="1" dirty="0">
                 <a:solidFill>
                   <a:srgbClr val="8E2335"/>
                 </a:solidFill>
@@ -7976,7 +7976,7 @@
               </a:rPr>
               <a:t>1章 はじめに</a:t>
             </a:r>
-            <a:endParaRPr lang="en-US" sz="750" dirty="0"/>
+            <a:endParaRPr lang="en-US" sz="840" dirty="0"/>
           </a:p>
         </p:txBody>
       </p:sp>
@@ -7988,8 +7988,8 @@
         </p:nvSpPr>
         <p:spPr>
           <a:xfrm>
-            <a:off x="530352" y="566928"/>
-            <a:ext cx="7406640" cy="384048"/>
+            <a:off x="530352" y="557784"/>
+            <a:ext cx="7406640" cy="420624"/>
           </a:xfrm>
           <a:prstGeom prst="rect">
             <a:avLst/>
@@ -8067,7 +8067,7 @@
               <a:buNone/>
             </a:pPr>
             <a:r>
-              <a:rPr lang="en-US" sz="750" b="1" dirty="0">
+              <a:rPr lang="en-US" sz="850" b="1" dirty="0">
                 <a:solidFill>
                   <a:srgbClr val="776C64"/>
                 </a:solidFill>
@@ -8077,7 +8077,7 @@
               </a:rPr>
               <a:t>03</a:t>
             </a:r>
-            <a:endParaRPr lang="en-US" sz="750" dirty="0"/>
+            <a:endParaRPr lang="en-US" sz="850" dirty="0"/>
           </a:p>
         </p:txBody>
       </p:sp>
@@ -8106,7 +8106,7 @@
               <a:buNone/>
             </a:pPr>
             <a:r>
-              <a:rPr lang="en-US" sz="1722" b="1" dirty="0">
+              <a:rPr lang="en-US" sz="1721" b="1" dirty="0">
                 <a:solidFill>
                   <a:srgbClr val="1F1A17"/>
                 </a:solidFill>
@@ -8116,7 +8116,7 @@
               </a:rPr>
               <a:t>肉の種類は目視で判断されるが、画像上の見え方は安定しない</a:t>
             </a:r>
-            <a:endParaRPr lang="en-US" sz="1722" dirty="0"/>
+            <a:endParaRPr lang="en-US" sz="1721" dirty="0"/>
           </a:p>
         </p:txBody>
       </p:sp>
@@ -8145,7 +8145,7 @@
               <a:buNone/>
             </a:pPr>
             <a:r>
-              <a:rPr lang="en-US" sz="1320" dirty="0">
+              <a:rPr lang="en-US" sz="1440" dirty="0">
                 <a:solidFill>
                   <a:srgbClr val="776C64"/>
                 </a:solidFill>
@@ -8155,7 +8155,7 @@
               </a:rPr>
               <a:t>食品管理、食材分類、料理記録では、画像から肉種を自動判定できると有用である。</a:t>
             </a:r>
-            <a:endParaRPr lang="en-US" sz="1320" dirty="0"/>
+            <a:endParaRPr lang="en-US" sz="1440" dirty="0"/>
           </a:p>
         </p:txBody>
       </p:sp>
@@ -8211,7 +8211,7 @@
               <a:buNone/>
             </a:pPr>
             <a:r>
-              <a:rPr lang="en-US" sz="1500" b="1" dirty="0">
+              <a:rPr lang="en-US" sz="1650" b="1" dirty="0">
                 <a:solidFill>
                   <a:srgbClr val="1F1A17"/>
                 </a:solidFill>
@@ -8221,7 +8221,7 @@
               </a:rPr>
               <a:t>色</a:t>
             </a:r>
-            <a:endParaRPr lang="en-US" sz="1500" dirty="0"/>
+            <a:endParaRPr lang="en-US" sz="1650" dirty="0"/>
           </a:p>
         </p:txBody>
       </p:sp>
@@ -8250,7 +8250,7 @@
               <a:buNone/>
             </a:pPr>
             <a:r>
-              <a:rPr lang="en-US" sz="880" dirty="0">
+              <a:rPr lang="en-US" sz="1000" dirty="0">
                 <a:solidFill>
                   <a:srgbClr val="776C64"/>
                 </a:solidFill>
@@ -8260,7 +8260,7 @@
               </a:rPr>
               <a:t>照明で赤みや白さが変わる</a:t>
             </a:r>
-            <a:endParaRPr lang="en-US" sz="880" dirty="0"/>
+            <a:endParaRPr lang="en-US" sz="1000" dirty="0"/>
           </a:p>
         </p:txBody>
       </p:sp>
@@ -8316,7 +8316,7 @@
               <a:buNone/>
             </a:pPr>
             <a:r>
-              <a:rPr lang="en-US" sz="1500" b="1" dirty="0">
+              <a:rPr lang="en-US" sz="1650" b="1" dirty="0">
                 <a:solidFill>
                   <a:srgbClr val="1F1A17"/>
                 </a:solidFill>
@@ -8326,7 +8326,7 @@
               </a:rPr>
               <a:t>脂身</a:t>
             </a:r>
-            <a:endParaRPr lang="en-US" sz="1500" dirty="0"/>
+            <a:endParaRPr lang="en-US" sz="1650" dirty="0"/>
           </a:p>
         </p:txBody>
       </p:sp>
@@ -8355,7 +8355,7 @@
               <a:buNone/>
             </a:pPr>
             <a:r>
-              <a:rPr lang="en-US" sz="880" dirty="0">
+              <a:rPr lang="en-US" sz="1000" dirty="0">
                 <a:solidFill>
                   <a:srgbClr val="776C64"/>
                 </a:solidFill>
@@ -8365,7 +8365,7 @@
               </a:rPr>
               <a:t>部位や切り方で分布が変わる</a:t>
             </a:r>
-            <a:endParaRPr lang="en-US" sz="880" dirty="0"/>
+            <a:endParaRPr lang="en-US" sz="1000" dirty="0"/>
           </a:p>
         </p:txBody>
       </p:sp>
@@ -8421,7 +8421,7 @@
               <a:buNone/>
             </a:pPr>
             <a:r>
-              <a:rPr lang="en-US" sz="1500" b="1" dirty="0">
+              <a:rPr lang="en-US" sz="1650" b="1" dirty="0">
                 <a:solidFill>
                   <a:srgbClr val="1F1A17"/>
                 </a:solidFill>
@@ -8431,7 +8431,7 @@
               </a:rPr>
               <a:t>形状</a:t>
             </a:r>
-            <a:endParaRPr lang="en-US" sz="1500" dirty="0"/>
+            <a:endParaRPr lang="en-US" sz="1650" dirty="0"/>
           </a:p>
         </p:txBody>
       </p:sp>
@@ -8460,7 +8460,7 @@
               <a:buNone/>
             </a:pPr>
             <a:r>
-              <a:rPr lang="en-US" sz="880" dirty="0">
+              <a:rPr lang="en-US" sz="1000" dirty="0">
                 <a:solidFill>
                   <a:srgbClr val="776C64"/>
                 </a:solidFill>
@@ -8470,7 +8470,7 @@
               </a:rPr>
               <a:t>一部だけ写ると特徴が減る</a:t>
             </a:r>
-            <a:endParaRPr lang="en-US" sz="880" dirty="0"/>
+            <a:endParaRPr lang="en-US" sz="1000" dirty="0"/>
           </a:p>
         </p:txBody>
       </p:sp>
@@ -8506,7 +8506,7 @@
         <p:spPr>
           <a:xfrm>
             <a:off x="7315200" y="5742432"/>
-            <a:ext cx="1143000" cy="219456"/>
+            <a:ext cx="1143000" cy="292608"/>
           </a:xfrm>
           <a:prstGeom prst="rect">
             <a:avLst/>
@@ -8532,8 +8532,8 @@
         </p:nvSpPr>
         <p:spPr>
           <a:xfrm>
-            <a:off x="7406640" y="5779008"/>
-            <a:ext cx="960120" cy="109728"/>
+            <a:off x="7406640" y="5801868"/>
+            <a:ext cx="960120" cy="128016"/>
           </a:xfrm>
           <a:prstGeom prst="rect">
             <a:avLst/>
@@ -8549,7 +8549,7 @@
               <a:buNone/>
             </a:pPr>
             <a:r>
-              <a:rPr lang="en-US" sz="660" b="1" dirty="0">
+              <a:rPr lang="en-US" sz="760" b="1" dirty="0">
                 <a:solidFill>
                   <a:srgbClr val="FFFFFF"/>
                 </a:solidFill>
@@ -8559,7 +8559,7 @@
               </a:rPr>
               <a:t>Problem</a:t>
             </a:r>
-            <a:endParaRPr lang="en-US" sz="660" dirty="0"/>
+            <a:endParaRPr lang="en-US" sz="760" dirty="0"/>
           </a:p>
         </p:txBody>
       </p:sp>
@@ -8588,7 +8588,7 @@
               <a:buNone/>
             </a:pPr>
             <a:r>
-              <a:rPr lang="en-US" sz="900" dirty="0">
+              <a:rPr lang="en-US" sz="1020" dirty="0">
                 <a:solidFill>
                   <a:srgbClr val="776C64"/>
                 </a:solidFill>
@@ -8598,7 +8598,7 @@
               </a:rPr>
               <a:t>人の判断が揺れる条件は、モデルの判断も揺らす</a:t>
             </a:r>
-            <a:endParaRPr lang="en-US" sz="900" dirty="0"/>
+            <a:endParaRPr lang="en-US" sz="1020" dirty="0"/>
           </a:p>
         </p:txBody>
       </p:sp>
@@ -8707,24 +8707,24 @@
         </p:nvSpPr>
         <p:spPr>
           <a:xfrm>
-            <a:off x="530352" y="320040"/>
-            <a:ext cx="1325880" cy="182880"/>
-          </a:xfrm>
-          <a:prstGeom prst="rect">
-            <a:avLst/>
-          </a:prstGeom>
-          <a:noFill/>
-          <a:ln/>
-        </p:spPr>
-        <p:txBody>
-          <a:bodyPr wrap="square" lIns="0" tIns="0" rIns="0" bIns="0" rtlCol="0" anchor="ctr"/>
-          <a:lstStyle/>
-          <a:p>
-            <a:pPr indent="0" marL="0">
-              <a:buNone/>
-            </a:pPr>
-            <a:r>
-              <a:rPr lang="en-US" sz="750" b="1" dirty="0">
+            <a:off x="530352" y="292608"/>
+            <a:ext cx="1600200" cy="201168"/>
+          </a:xfrm>
+          <a:prstGeom prst="rect">
+            <a:avLst/>
+          </a:prstGeom>
+          <a:noFill/>
+          <a:ln/>
+        </p:spPr>
+        <p:txBody>
+          <a:bodyPr wrap="square" lIns="0" tIns="0" rIns="0" bIns="0" rtlCol="0" anchor="ctr"/>
+          <a:lstStyle/>
+          <a:p>
+            <a:pPr indent="0" marL="0">
+              <a:buNone/>
+            </a:pPr>
+            <a:r>
+              <a:rPr lang="en-US" sz="840" b="1" dirty="0">
                 <a:solidFill>
                   <a:srgbClr val="8E2335"/>
                 </a:solidFill>
@@ -8734,7 +8734,7 @@
               </a:rPr>
               <a:t>1章 はじめに</a:t>
             </a:r>
-            <a:endParaRPr lang="en-US" sz="750" dirty="0"/>
+            <a:endParaRPr lang="en-US" sz="840" dirty="0"/>
           </a:p>
         </p:txBody>
       </p:sp>
@@ -8746,8 +8746,8 @@
         </p:nvSpPr>
         <p:spPr>
           <a:xfrm>
-            <a:off x="530352" y="566928"/>
-            <a:ext cx="7406640" cy="384048"/>
+            <a:off x="530352" y="557784"/>
+            <a:ext cx="7406640" cy="420624"/>
           </a:xfrm>
           <a:prstGeom prst="rect">
             <a:avLst/>
@@ -8825,7 +8825,7 @@
               <a:buNone/>
             </a:pPr>
             <a:r>
-              <a:rPr lang="en-US" sz="750" b="1" dirty="0">
+              <a:rPr lang="en-US" sz="850" b="1" dirty="0">
                 <a:solidFill>
                   <a:srgbClr val="776C64"/>
                 </a:solidFill>
@@ -8835,7 +8835,7 @@
               </a:rPr>
               <a:t>04</a:t>
             </a:r>
-            <a:endParaRPr lang="en-US" sz="750" dirty="0"/>
+            <a:endParaRPr lang="en-US" sz="850" dirty="0"/>
           </a:p>
         </p:txBody>
       </p:sp>
@@ -8864,7 +8864,7 @@
               <a:buNone/>
             </a:pPr>
             <a:r>
-              <a:rPr lang="en-US" sz="2100" b="1" dirty="0">
+              <a:rPr lang="en-US" sz="2300" b="1" dirty="0">
                 <a:solidFill>
                   <a:srgbClr val="1F1A17"/>
                 </a:solidFill>
@@ -8874,7 +8874,7 @@
               </a:rPr>
               <a:t>食品画像認識では、画像分類と物体検出がよく使われる</a:t>
             </a:r>
-            <a:endParaRPr lang="en-US" sz="2100" dirty="0"/>
+            <a:endParaRPr lang="en-US" sz="2300" dirty="0"/>
           </a:p>
         </p:txBody>
       </p:sp>
@@ -8886,8 +8886,8 @@
         </p:nvSpPr>
         <p:spPr>
           <a:xfrm>
-            <a:off x="749808" y="2048256"/>
-            <a:ext cx="2880360" cy="1920240"/>
+            <a:off x="749808" y="1993392"/>
+            <a:ext cx="2880360" cy="2084832"/>
           </a:xfrm>
           <a:prstGeom prst="rect">
             <a:avLst/>
@@ -8911,8 +8911,8 @@
         </p:nvSpPr>
         <p:spPr>
           <a:xfrm>
-            <a:off x="749808" y="2048256"/>
-            <a:ext cx="2880360" cy="109728"/>
+            <a:off x="749808" y="1993392"/>
+            <a:ext cx="2880360" cy="128016"/>
           </a:xfrm>
           <a:prstGeom prst="rect">
             <a:avLst/>
@@ -8938,7 +8938,7 @@
         </p:nvSpPr>
         <p:spPr>
           <a:xfrm>
-            <a:off x="969264" y="2395728"/>
+            <a:off x="969264" y="2359152"/>
             <a:ext cx="2286000" cy="201168"/>
           </a:xfrm>
           <a:prstGeom prst="rect">
@@ -8955,7 +8955,7 @@
               <a:buNone/>
             </a:pPr>
             <a:r>
-              <a:rPr lang="en-US" sz="1500" b="1" dirty="0">
+              <a:rPr lang="en-US" sz="1650" b="1" dirty="0">
                 <a:solidFill>
                   <a:srgbClr val="1F1A17"/>
                 </a:solidFill>
@@ -8965,7 +8965,7 @@
               </a:rPr>
               <a:t>CNN分類</a:t>
             </a:r>
-            <a:endParaRPr lang="en-US" sz="1500" dirty="0"/>
+            <a:endParaRPr lang="en-US" sz="1650" dirty="0"/>
           </a:p>
         </p:txBody>
       </p:sp>
@@ -8977,24 +8977,24 @@
         </p:nvSpPr>
         <p:spPr>
           <a:xfrm>
-            <a:off x="969264" y="2788920"/>
-            <a:ext cx="2331720" cy="640080"/>
-          </a:xfrm>
-          <a:prstGeom prst="rect">
-            <a:avLst/>
-          </a:prstGeom>
-          <a:noFill/>
-          <a:ln/>
-        </p:spPr>
-        <p:txBody>
-          <a:bodyPr wrap="square" lIns="0" tIns="0" rIns="0" bIns="0" rtlCol="0" anchor="ctr"/>
-          <a:lstStyle/>
-          <a:p>
-            <a:pPr indent="0" marL="0">
-              <a:buNone/>
-            </a:pPr>
-            <a:r>
-              <a:rPr lang="en-US" sz="920" dirty="0">
+            <a:off x="969264" y="2770632"/>
+            <a:ext cx="2331720" cy="713232"/>
+          </a:xfrm>
+          <a:prstGeom prst="rect">
+            <a:avLst/>
+          </a:prstGeom>
+          <a:noFill/>
+          <a:ln/>
+        </p:spPr>
+        <p:txBody>
+          <a:bodyPr wrap="square" lIns="0" tIns="0" rIns="0" bIns="0" rtlCol="0" anchor="ctr"/>
+          <a:lstStyle/>
+          <a:p>
+            <a:pPr indent="0" marL="0">
+              <a:buNone/>
+            </a:pPr>
+            <a:r>
+              <a:rPr lang="en-US" sz="1030" dirty="0">
                 <a:solidFill>
                   <a:srgbClr val="776C64"/>
                 </a:solidFill>
@@ -9004,7 +9004,7 @@
               </a:rPr>
               <a:t>画像全体を1つのクラスに分類する。食材写真の分類で広く利用される。</a:t>
             </a:r>
-            <a:endParaRPr lang="en-US" sz="920" dirty="0"/>
+            <a:endParaRPr lang="en-US" sz="1030" dirty="0"/>
           </a:p>
         </p:txBody>
       </p:sp>
@@ -9016,8 +9016,8 @@
         </p:nvSpPr>
         <p:spPr>
           <a:xfrm>
-            <a:off x="4425696" y="2048256"/>
-            <a:ext cx="2880360" cy="1920240"/>
+            <a:off x="4425696" y="1993392"/>
+            <a:ext cx="2880360" cy="2084832"/>
           </a:xfrm>
           <a:prstGeom prst="rect">
             <a:avLst/>
@@ -9041,8 +9041,8 @@
         </p:nvSpPr>
         <p:spPr>
           <a:xfrm>
-            <a:off x="4425696" y="2048256"/>
-            <a:ext cx="2880360" cy="109728"/>
+            <a:off x="4425696" y="1993392"/>
+            <a:ext cx="2880360" cy="128016"/>
           </a:xfrm>
           <a:prstGeom prst="rect">
             <a:avLst/>
@@ -9068,7 +9068,7 @@
         </p:nvSpPr>
         <p:spPr>
           <a:xfrm>
-            <a:off x="4645152" y="2395728"/>
+            <a:off x="4645152" y="2359152"/>
             <a:ext cx="2286000" cy="201168"/>
           </a:xfrm>
           <a:prstGeom prst="rect">
@@ -9085,7 +9085,7 @@
               <a:buNone/>
             </a:pPr>
             <a:r>
-              <a:rPr lang="en-US" sz="1500" b="1" dirty="0">
+              <a:rPr lang="en-US" sz="1650" b="1" dirty="0">
                 <a:solidFill>
                   <a:srgbClr val="1F1A17"/>
                 </a:solidFill>
@@ -9095,7 +9095,7 @@
               </a:rPr>
               <a:t>YOLO検出</a:t>
             </a:r>
-            <a:endParaRPr lang="en-US" sz="1500" dirty="0"/>
+            <a:endParaRPr lang="en-US" sz="1650" dirty="0"/>
           </a:p>
         </p:txBody>
       </p:sp>
@@ -9107,24 +9107,24 @@
         </p:nvSpPr>
         <p:spPr>
           <a:xfrm>
-            <a:off x="4645152" y="2788920"/>
-            <a:ext cx="2331720" cy="640080"/>
-          </a:xfrm>
-          <a:prstGeom prst="rect">
-            <a:avLst/>
-          </a:prstGeom>
-          <a:noFill/>
-          <a:ln/>
-        </p:spPr>
-        <p:txBody>
-          <a:bodyPr wrap="square" lIns="0" tIns="0" rIns="0" bIns="0" rtlCol="0" anchor="ctr"/>
-          <a:lstStyle/>
-          <a:p>
-            <a:pPr indent="0" marL="0">
-              <a:buNone/>
-            </a:pPr>
-            <a:r>
-              <a:rPr lang="en-US" sz="920" dirty="0">
+            <a:off x="4645152" y="2770632"/>
+            <a:ext cx="2331720" cy="713232"/>
+          </a:xfrm>
+          <a:prstGeom prst="rect">
+            <a:avLst/>
+          </a:prstGeom>
+          <a:noFill/>
+          <a:ln/>
+        </p:spPr>
+        <p:txBody>
+          <a:bodyPr wrap="square" lIns="0" tIns="0" rIns="0" bIns="0" rtlCol="0" anchor="ctr"/>
+          <a:lstStyle/>
+          <a:p>
+            <a:pPr indent="0" marL="0">
+              <a:buNone/>
+            </a:pPr>
+            <a:r>
+              <a:rPr lang="en-US" sz="1030" dirty="0">
                 <a:solidFill>
                   <a:srgbClr val="776C64"/>
                 </a:solidFill>
@@ -9134,7 +9134,7 @@
               </a:rPr>
               <a:t>物体の位置と種類を同時に推定する。複数対象や背景を含む画像に向く。</a:t>
             </a:r>
-            <a:endParaRPr lang="en-US" sz="920" dirty="0"/>
+            <a:endParaRPr lang="en-US" sz="1030" dirty="0"/>
           </a:p>
         </p:txBody>
       </p:sp>
@@ -9146,8 +9146,8 @@
         </p:nvSpPr>
         <p:spPr>
           <a:xfrm>
-            <a:off x="8101584" y="2048256"/>
-            <a:ext cx="2880360" cy="1920240"/>
+            <a:off x="8101584" y="1993392"/>
+            <a:ext cx="2880360" cy="2084832"/>
           </a:xfrm>
           <a:prstGeom prst="rect">
             <a:avLst/>
@@ -9171,8 +9171,8 @@
         </p:nvSpPr>
         <p:spPr>
           <a:xfrm>
-            <a:off x="8101584" y="2048256"/>
-            <a:ext cx="2880360" cy="109728"/>
+            <a:off x="8101584" y="1993392"/>
+            <a:ext cx="2880360" cy="128016"/>
           </a:xfrm>
           <a:prstGeom prst="rect">
             <a:avLst/>
@@ -9198,7 +9198,7 @@
         </p:nvSpPr>
         <p:spPr>
           <a:xfrm>
-            <a:off x="8321040" y="2395728"/>
+            <a:off x="8321040" y="2359152"/>
             <a:ext cx="2286000" cy="201168"/>
           </a:xfrm>
           <a:prstGeom prst="rect">
@@ -9215,7 +9215,7 @@
               <a:buNone/>
             </a:pPr>
             <a:r>
-              <a:rPr lang="en-US" sz="1500" b="1" dirty="0">
+              <a:rPr lang="en-US" sz="1650" b="1" dirty="0">
                 <a:solidFill>
                   <a:srgbClr val="1F1A17"/>
                 </a:solidFill>
@@ -9225,7 +9225,7 @@
               </a:rPr>
               <a:t>Roboflow</a:t>
             </a:r>
-            <a:endParaRPr lang="en-US" sz="1500" dirty="0"/>
+            <a:endParaRPr lang="en-US" sz="1650" dirty="0"/>
           </a:p>
         </p:txBody>
       </p:sp>
@@ -9237,24 +9237,24 @@
         </p:nvSpPr>
         <p:spPr>
           <a:xfrm>
-            <a:off x="8321040" y="2788920"/>
-            <a:ext cx="2331720" cy="640080"/>
-          </a:xfrm>
-          <a:prstGeom prst="rect">
-            <a:avLst/>
-          </a:prstGeom>
-          <a:noFill/>
-          <a:ln/>
-        </p:spPr>
-        <p:txBody>
-          <a:bodyPr wrap="square" lIns="0" tIns="0" rIns="0" bIns="0" rtlCol="0" anchor="ctr"/>
-          <a:lstStyle/>
-          <a:p>
-            <a:pPr indent="0" marL="0">
-              <a:buNone/>
-            </a:pPr>
-            <a:r>
-              <a:rPr lang="en-US" sz="920" dirty="0">
+            <a:off x="8321040" y="2770632"/>
+            <a:ext cx="2331720" cy="713232"/>
+          </a:xfrm>
+          <a:prstGeom prst="rect">
+            <a:avLst/>
+          </a:prstGeom>
+          <a:noFill/>
+          <a:ln/>
+        </p:spPr>
+        <p:txBody>
+          <a:bodyPr wrap="square" lIns="0" tIns="0" rIns="0" bIns="0" rtlCol="0" anchor="ctr"/>
+          <a:lstStyle/>
+          <a:p>
+            <a:pPr indent="0" marL="0">
+              <a:buNone/>
+            </a:pPr>
+            <a:r>
+              <a:rPr lang="en-US" sz="1030" dirty="0">
                 <a:solidFill>
                   <a:srgbClr val="776C64"/>
                 </a:solidFill>
@@ -9264,7 +9264,7 @@
               </a:rPr>
               <a:t>アノテーション、分割、前処理、拡張、YOLO形式出力を一元管理する。</a:t>
             </a:r>
-            <a:endParaRPr lang="en-US" sz="920" dirty="0"/>
+            <a:endParaRPr lang="en-US" sz="1030" dirty="0"/>
           </a:p>
         </p:txBody>
       </p:sp>
@@ -9316,7 +9316,7 @@
               <a:buNone/>
             </a:pPr>
             <a:r>
-              <a:rPr lang="en-US" sz="1300" b="1" dirty="0">
+              <a:rPr lang="en-US" sz="1420" b="1" dirty="0">
                 <a:solidFill>
                   <a:srgbClr val="1F1A17"/>
                 </a:solidFill>
@@ -9326,7 +9326,7 @@
               </a:rPr>
               <a:t>本研究の位置づけ</a:t>
             </a:r>
-            <a:endParaRPr lang="en-US" sz="1300" dirty="0"/>
+            <a:endParaRPr lang="en-US" sz="1420" dirty="0"/>
           </a:p>
         </p:txBody>
       </p:sp>
@@ -9355,7 +9355,7 @@
               <a:buNone/>
             </a:pPr>
             <a:r>
-              <a:rPr lang="en-US" sz="1050" dirty="0">
+              <a:rPr lang="en-US" sz="1160" dirty="0">
                 <a:solidFill>
                   <a:srgbClr val="776C64"/>
                 </a:solidFill>
@@ -9365,7 +9365,7 @@
               </a:rPr>
               <a:t>既存モデルを使い、肉種に合わせたデータセット設計と失敗分析に焦点を置く</a:t>
             </a:r>
-            <a:endParaRPr lang="en-US" sz="1050" dirty="0"/>
+            <a:endParaRPr lang="en-US" sz="1160" dirty="0"/>
           </a:p>
         </p:txBody>
       </p:sp>
@@ -9378,7 +9378,7 @@
         <p:spPr>
           <a:xfrm>
             <a:off x="9372600" y="5230368"/>
-            <a:ext cx="685800" cy="292608"/>
+            <a:ext cx="685800" cy="365760"/>
           </a:xfrm>
           <a:prstGeom prst="rect">
             <a:avLst/>
@@ -9404,8 +9404,8 @@
         </p:nvSpPr>
         <p:spPr>
           <a:xfrm>
-            <a:off x="9454896" y="5298948"/>
-            <a:ext cx="521208" cy="73152"/>
+            <a:off x="9454896" y="5326380"/>
+            <a:ext cx="521208" cy="91440"/>
           </a:xfrm>
           <a:prstGeom prst="rect">
             <a:avLst/>
@@ -9421,7 +9421,7 @@
               <a:buNone/>
             </a:pPr>
             <a:r>
-              <a:rPr lang="en-US" sz="730" b="1" dirty="0">
+              <a:rPr lang="en-US" sz="820" b="1" dirty="0">
                 <a:solidFill>
                   <a:srgbClr val="FFFFFF"/>
                 </a:solidFill>
@@ -9431,7 +9431,7 @@
               </a:rPr>
               <a:t>検出</a:t>
             </a:r>
-            <a:endParaRPr lang="en-US" sz="730" dirty="0"/>
+            <a:endParaRPr lang="en-US" sz="820" dirty="0"/>
           </a:p>
         </p:txBody>
       </p:sp>
@@ -9444,7 +9444,7 @@
         <p:spPr>
           <a:xfrm>
             <a:off x="10195560" y="5230368"/>
-            <a:ext cx="685800" cy="292608"/>
+            <a:ext cx="685800" cy="365760"/>
           </a:xfrm>
           <a:prstGeom prst="rect">
             <a:avLst/>
@@ -9470,8 +9470,8 @@
         </p:nvSpPr>
         <p:spPr>
           <a:xfrm>
-            <a:off x="10277856" y="5298948"/>
-            <a:ext cx="521208" cy="73152"/>
+            <a:off x="10277856" y="5326380"/>
+            <a:ext cx="521208" cy="91440"/>
           </a:xfrm>
           <a:prstGeom prst="rect">
             <a:avLst/>
@@ -9487,7 +9487,7 @@
               <a:buNone/>
             </a:pPr>
             <a:r>
-              <a:rPr lang="en-US" sz="730" b="1" dirty="0">
+              <a:rPr lang="en-US" sz="820" b="1" dirty="0">
                 <a:solidFill>
                   <a:srgbClr val="FFFFFF"/>
                 </a:solidFill>
@@ -9497,7 +9497,7 @@
               </a:rPr>
               <a:t>分類</a:t>
             </a:r>
-            <a:endParaRPr lang="en-US" sz="730" dirty="0"/>
+            <a:endParaRPr lang="en-US" sz="820" dirty="0"/>
           </a:p>
         </p:txBody>
       </p:sp>
@@ -9510,7 +9510,7 @@
         <p:spPr>
           <a:xfrm>
             <a:off x="11018520" y="5230368"/>
-            <a:ext cx="685800" cy="292608"/>
+            <a:ext cx="685800" cy="365760"/>
           </a:xfrm>
           <a:prstGeom prst="rect">
             <a:avLst/>
@@ -9536,8 +9536,8 @@
         </p:nvSpPr>
         <p:spPr>
           <a:xfrm>
-            <a:off x="11100816" y="5298948"/>
-            <a:ext cx="521208" cy="73152"/>
+            <a:off x="11100816" y="5326380"/>
+            <a:ext cx="521208" cy="91440"/>
           </a:xfrm>
           <a:prstGeom prst="rect">
             <a:avLst/>
@@ -9553,7 +9553,7 @@
               <a:buNone/>
             </a:pPr>
             <a:r>
-              <a:rPr lang="en-US" sz="730" b="1" dirty="0">
+              <a:rPr lang="en-US" sz="820" b="1" dirty="0">
                 <a:solidFill>
                   <a:srgbClr val="FFFFFF"/>
                 </a:solidFill>
@@ -9563,7 +9563,7 @@
               </a:rPr>
               <a:t>考察</a:t>
             </a:r>
-            <a:endParaRPr lang="en-US" sz="730" dirty="0"/>
+            <a:endParaRPr lang="en-US" sz="820" dirty="0"/>
           </a:p>
         </p:txBody>
       </p:sp>
@@ -9672,24 +9672,24 @@
         </p:nvSpPr>
         <p:spPr>
           <a:xfrm>
-            <a:off x="530352" y="320040"/>
-            <a:ext cx="1325880" cy="182880"/>
-          </a:xfrm>
-          <a:prstGeom prst="rect">
-            <a:avLst/>
-          </a:prstGeom>
-          <a:noFill/>
-          <a:ln/>
-        </p:spPr>
-        <p:txBody>
-          <a:bodyPr wrap="square" lIns="0" tIns="0" rIns="0" bIns="0" rtlCol="0" anchor="ctr"/>
-          <a:lstStyle/>
-          <a:p>
-            <a:pPr indent="0" marL="0">
-              <a:buNone/>
-            </a:pPr>
-            <a:r>
-              <a:rPr lang="en-US" sz="750" b="1" dirty="0">
+            <a:off x="530352" y="292608"/>
+            <a:ext cx="1600200" cy="201168"/>
+          </a:xfrm>
+          <a:prstGeom prst="rect">
+            <a:avLst/>
+          </a:prstGeom>
+          <a:noFill/>
+          <a:ln/>
+        </p:spPr>
+        <p:txBody>
+          <a:bodyPr wrap="square" lIns="0" tIns="0" rIns="0" bIns="0" rtlCol="0" anchor="ctr"/>
+          <a:lstStyle/>
+          <a:p>
+            <a:pPr indent="0" marL="0">
+              <a:buNone/>
+            </a:pPr>
+            <a:r>
+              <a:rPr lang="en-US" sz="840" b="1" dirty="0">
                 <a:solidFill>
                   <a:srgbClr val="8E2335"/>
                 </a:solidFill>
@@ -9699,7 +9699,7 @@
               </a:rPr>
               <a:t>1章 はじめに</a:t>
             </a:r>
-            <a:endParaRPr lang="en-US" sz="750" dirty="0"/>
+            <a:endParaRPr lang="en-US" sz="840" dirty="0"/>
           </a:p>
         </p:txBody>
       </p:sp>
@@ -9711,8 +9711,8 @@
         </p:nvSpPr>
         <p:spPr>
           <a:xfrm>
-            <a:off x="530352" y="566928"/>
-            <a:ext cx="7406640" cy="384048"/>
+            <a:off x="530352" y="557784"/>
+            <a:ext cx="7406640" cy="420624"/>
           </a:xfrm>
           <a:prstGeom prst="rect">
             <a:avLst/>
@@ -9790,7 +9790,7 @@
               <a:buNone/>
             </a:pPr>
             <a:r>
-              <a:rPr lang="en-US" sz="750" b="1" dirty="0">
+              <a:rPr lang="en-US" sz="850" b="1" dirty="0">
                 <a:solidFill>
                   <a:srgbClr val="776C64"/>
                 </a:solidFill>
@@ -9800,7 +9800,7 @@
               </a:rPr>
               <a:t>05</a:t>
             </a:r>
-            <a:endParaRPr lang="en-US" sz="750" dirty="0"/>
+            <a:endParaRPr lang="en-US" sz="850" dirty="0"/>
           </a:p>
         </p:txBody>
       </p:sp>
@@ -9902,7 +9902,7 @@
               <a:buNone/>
             </a:pPr>
             <a:r>
-              <a:rPr lang="en-US" sz="2000" b="1" dirty="0">
+              <a:rPr lang="en-US" sz="2200" b="1" dirty="0">
                 <a:solidFill>
                   <a:srgbClr val="1F1A17"/>
                 </a:solidFill>
@@ -9912,7 +9912,7 @@
               </a:rPr>
               <a:t>似ている見た目が、誤分類の原因になる</a:t>
             </a:r>
-            <a:endParaRPr lang="en-US" sz="2000" dirty="0"/>
+            <a:endParaRPr lang="en-US" sz="2200" dirty="0"/>
           </a:p>
         </p:txBody>
       </p:sp>
@@ -9924,21 +9924,21 @@
         </p:nvSpPr>
         <p:spPr>
           <a:xfrm>
-            <a:off x="7360920" y="1417320"/>
-            <a:ext cx="4160520" cy="2971800"/>
-          </a:xfrm>
-          <a:prstGeom prst="rect">
-            <a:avLst/>
-          </a:prstGeom>
-          <a:noFill/>
-          <a:ln/>
-        </p:spPr>
-        <p:txBody>
-          <a:bodyPr wrap="square" lIns="635" tIns="635" rIns="635" bIns="635" rtlCol="0" anchor="t"/>
-          <a:lstStyle/>
-          <a:p>
-            <a:r>
-              <a:rPr lang="en-US" sz="1400" dirty="0">
+            <a:off x="7178040" y="1389888"/>
+            <a:ext cx="4389120" cy="3154680"/>
+          </a:xfrm>
+          <a:prstGeom prst="rect">
+            <a:avLst/>
+          </a:prstGeom>
+          <a:noFill/>
+          <a:ln/>
+        </p:spPr>
+        <p:txBody>
+          <a:bodyPr wrap="square" lIns="1016" tIns="1016" rIns="1016" bIns="1016" rtlCol="0" anchor="t"/>
+          <a:lstStyle/>
+          <a:p>
+            <a:r>
+              <a:rPr lang="en-US" sz="1520" dirty="0">
                 <a:solidFill>
                   <a:srgbClr val="1F1A17"/>
                 </a:solidFill>
@@ -9948,11 +9948,11 @@
               </a:rPr>
               <a:t>色や脂身が似るクラスがある</a:t>
             </a:r>
-            <a:endParaRPr lang="en-US" sz="1400" dirty="0"/>
-          </a:p>
-          <a:p>
-            <a:r>
-              <a:rPr lang="en-US" sz="1400" dirty="0">
+            <a:endParaRPr lang="en-US" sz="1520" dirty="0"/>
+          </a:p>
+          <a:p>
+            <a:r>
+              <a:rPr lang="en-US" sz="1520" dirty="0">
                 <a:solidFill>
                   <a:srgbClr val="1F1A17"/>
                 </a:solidFill>
@@ -9962,11 +9962,11 @@
               </a:rPr>
               <a:t>同じクラスでも部位や切り方で変化する</a:t>
             </a:r>
-            <a:endParaRPr lang="en-US" sz="1400" dirty="0"/>
-          </a:p>
-          <a:p>
-            <a:r>
-              <a:rPr lang="en-US" sz="1400" dirty="0">
+            <a:endParaRPr lang="en-US" sz="1520" dirty="0"/>
+          </a:p>
+          <a:p>
+            <a:r>
+              <a:rPr lang="en-US" sz="1520" dirty="0">
                 <a:solidFill>
                   <a:srgbClr val="1F1A17"/>
                 </a:solidFill>
@@ -9976,11 +9976,11 @@
               </a:rPr>
               <a:t>背景、トレー、包装を手がかりにするリスクがある</a:t>
             </a:r>
-            <a:endParaRPr lang="en-US" sz="1400" dirty="0"/>
-          </a:p>
-          <a:p>
-            <a:r>
-              <a:rPr lang="en-US" sz="1400" dirty="0">
+            <a:endParaRPr lang="en-US" sz="1520" dirty="0"/>
+          </a:p>
+          <a:p>
+            <a:r>
+              <a:rPr lang="en-US" sz="1520" dirty="0">
                 <a:solidFill>
                   <a:srgbClr val="1F1A17"/>
                 </a:solidFill>
@@ -9990,7 +9990,7 @@
               </a:rPr>
               <a:t>画像枚数が少ないと撮影条件に過学習しやすい</a:t>
             </a:r>
-            <a:endParaRPr lang="en-US" sz="1400" dirty="0"/>
+            <a:endParaRPr lang="en-US" sz="1520" dirty="0"/>
           </a:p>
         </p:txBody>
       </p:sp>
@@ -10002,8 +10002,8 @@
         </p:nvSpPr>
         <p:spPr>
           <a:xfrm>
-            <a:off x="7360920" y="4782312"/>
-            <a:ext cx="1261872" cy="219456"/>
+            <a:off x="7178040" y="4782312"/>
+            <a:ext cx="1371600" cy="292608"/>
           </a:xfrm>
           <a:prstGeom prst="rect">
             <a:avLst/>
@@ -10029,8 +10029,8 @@
         </p:nvSpPr>
         <p:spPr>
           <a:xfrm>
-            <a:off x="7452360" y="4818888"/>
-            <a:ext cx="1078992" cy="109728"/>
+            <a:off x="7269480" y="4841748"/>
+            <a:ext cx="1188720" cy="128016"/>
           </a:xfrm>
           <a:prstGeom prst="rect">
             <a:avLst/>
@@ -10046,7 +10046,7 @@
               <a:buNone/>
             </a:pPr>
             <a:r>
-              <a:rPr lang="en-US" sz="660" b="1" dirty="0">
+              <a:rPr lang="en-US" sz="760" b="1" dirty="0">
                 <a:solidFill>
                   <a:srgbClr val="FFFFFF"/>
                 </a:solidFill>
@@ -10056,7 +10056,7 @@
               </a:rPr>
               <a:t>Key issue</a:t>
             </a:r>
-            <a:endParaRPr lang="en-US" sz="660" dirty="0"/>
+            <a:endParaRPr lang="en-US" sz="760" dirty="0"/>
           </a:p>
         </p:txBody>
       </p:sp>
@@ -10068,24 +10068,24 @@
         </p:nvSpPr>
         <p:spPr>
           <a:xfrm>
-            <a:off x="8778240" y="4809744"/>
-            <a:ext cx="2697480" cy="256032"/>
-          </a:xfrm>
-          <a:prstGeom prst="rect">
-            <a:avLst/>
-          </a:prstGeom>
-          <a:noFill/>
-          <a:ln/>
-        </p:spPr>
-        <p:txBody>
-          <a:bodyPr wrap="square" lIns="0" tIns="0" rIns="0" bIns="0" rtlCol="0" anchor="ctr"/>
-          <a:lstStyle/>
-          <a:p>
-            <a:pPr indent="0" marL="0">
-              <a:buNone/>
-            </a:pPr>
-            <a:r>
-              <a:rPr lang="en-US" sz="1100" b="1" dirty="0">
+            <a:off x="8759952" y="4791456"/>
+            <a:ext cx="2743200" cy="256032"/>
+          </a:xfrm>
+          <a:prstGeom prst="rect">
+            <a:avLst/>
+          </a:prstGeom>
+          <a:noFill/>
+          <a:ln/>
+        </p:spPr>
+        <p:txBody>
+          <a:bodyPr wrap="square" lIns="0" tIns="0" rIns="0" bIns="0" rtlCol="0" anchor="ctr"/>
+          <a:lstStyle/>
+          <a:p>
+            <a:pPr indent="0" marL="0">
+              <a:buNone/>
+            </a:pPr>
+            <a:r>
+              <a:rPr lang="en-US" sz="1220" b="1" dirty="0">
                 <a:solidFill>
                   <a:srgbClr val="1F1A17"/>
                 </a:solidFill>
@@ -10095,7 +10095,7 @@
               </a:rPr>
               <a:t>モデル性能だけでなく、データの作り方が精度を左右する</a:t>
             </a:r>
-            <a:endParaRPr lang="en-US" sz="1100" dirty="0"/>
+            <a:endParaRPr lang="en-US" sz="1220" dirty="0"/>
           </a:p>
         </p:txBody>
       </p:sp>
@@ -10204,24 +10204,24 @@
         </p:nvSpPr>
         <p:spPr>
           <a:xfrm>
-            <a:off x="530352" y="320040"/>
-            <a:ext cx="1325880" cy="182880"/>
-          </a:xfrm>
-          <a:prstGeom prst="rect">
-            <a:avLst/>
-          </a:prstGeom>
-          <a:noFill/>
-          <a:ln/>
-        </p:spPr>
-        <p:txBody>
-          <a:bodyPr wrap="square" lIns="0" tIns="0" rIns="0" bIns="0" rtlCol="0" anchor="ctr"/>
-          <a:lstStyle/>
-          <a:p>
-            <a:pPr indent="0" marL="0">
-              <a:buNone/>
-            </a:pPr>
-            <a:r>
-              <a:rPr lang="en-US" sz="750" b="1" dirty="0">
+            <a:off x="530352" y="292608"/>
+            <a:ext cx="1600200" cy="201168"/>
+          </a:xfrm>
+          <a:prstGeom prst="rect">
+            <a:avLst/>
+          </a:prstGeom>
+          <a:noFill/>
+          <a:ln/>
+        </p:spPr>
+        <p:txBody>
+          <a:bodyPr wrap="square" lIns="0" tIns="0" rIns="0" bIns="0" rtlCol="0" anchor="ctr"/>
+          <a:lstStyle/>
+          <a:p>
+            <a:pPr indent="0" marL="0">
+              <a:buNone/>
+            </a:pPr>
+            <a:r>
+              <a:rPr lang="en-US" sz="840" b="1" dirty="0">
                 <a:solidFill>
                   <a:srgbClr val="8E2335"/>
                 </a:solidFill>
@@ -10231,7 +10231,7 @@
               </a:rPr>
               <a:t>1章 はじめに</a:t>
             </a:r>
-            <a:endParaRPr lang="en-US" sz="750" dirty="0"/>
+            <a:endParaRPr lang="en-US" sz="840" dirty="0"/>
           </a:p>
         </p:txBody>
       </p:sp>
@@ -10243,8 +10243,8 @@
         </p:nvSpPr>
         <p:spPr>
           <a:xfrm>
-            <a:off x="530352" y="566928"/>
-            <a:ext cx="7406640" cy="384048"/>
+            <a:off x="530352" y="557784"/>
+            <a:ext cx="7406640" cy="420624"/>
           </a:xfrm>
           <a:prstGeom prst="rect">
             <a:avLst/>
@@ -10322,7 +10322,7 @@
               <a:buNone/>
             </a:pPr>
             <a:r>
-              <a:rPr lang="en-US" sz="750" b="1" dirty="0">
+              <a:rPr lang="en-US" sz="850" b="1" dirty="0">
                 <a:solidFill>
                   <a:srgbClr val="776C64"/>
                 </a:solidFill>
@@ -10332,7 +10332,7 @@
               </a:rPr>
               <a:t>06</a:t>
             </a:r>
-            <a:endParaRPr lang="en-US" sz="750" dirty="0"/>
+            <a:endParaRPr lang="en-US" sz="850" dirty="0"/>
           </a:p>
         </p:txBody>
       </p:sp>
@@ -10361,7 +10361,7 @@
               <a:buNone/>
             </a:pPr>
             <a:r>
-              <a:rPr lang="en-US" sz="2398" b="1" dirty="0">
+              <a:rPr lang="en-US" sz="2397" b="1" dirty="0">
                 <a:solidFill>
                   <a:srgbClr val="1F1A17"/>
                 </a:solidFill>
@@ -10371,7 +10371,7 @@
               </a:rPr>
               <a:t>YOLOとRoboflowを用いて、肉画像から肉の位置と種類を判定するモデルを構築し、認識性能と失敗要因を分析する。</a:t>
             </a:r>
-            <a:endParaRPr lang="en-US" sz="2398" dirty="0"/>
+            <a:endParaRPr lang="en-US" sz="2397" dirty="0"/>
           </a:p>
         </p:txBody>
       </p:sp>
@@ -10383,8 +10383,8 @@
         </p:nvSpPr>
         <p:spPr>
           <a:xfrm>
-            <a:off x="768096" y="3675888"/>
-            <a:ext cx="2971800" cy="1463040"/>
+            <a:off x="475488" y="3401568"/>
+            <a:ext cx="3383280" cy="2011680"/>
           </a:xfrm>
           <a:prstGeom prst="rect">
             <a:avLst/>
@@ -10408,24 +10408,24 @@
         </p:nvSpPr>
         <p:spPr>
           <a:xfrm>
-            <a:off x="987552" y="3950208"/>
-            <a:ext cx="1097280" cy="164592"/>
-          </a:xfrm>
-          <a:prstGeom prst="rect">
-            <a:avLst/>
-          </a:prstGeom>
-          <a:noFill/>
-          <a:ln/>
-        </p:spPr>
-        <p:txBody>
-          <a:bodyPr wrap="square" lIns="0" tIns="0" rIns="0" bIns="0" rtlCol="0" anchor="ctr"/>
-          <a:lstStyle/>
-          <a:p>
-            <a:pPr indent="0" marL="0">
-              <a:buNone/>
-            </a:pPr>
-            <a:r>
-              <a:rPr lang="en-US" sz="850" b="1" dirty="0">
+            <a:off x="786384" y="3703320"/>
+            <a:ext cx="1234440" cy="182880"/>
+          </a:xfrm>
+          <a:prstGeom prst="rect">
+            <a:avLst/>
+          </a:prstGeom>
+          <a:noFill/>
+          <a:ln/>
+        </p:spPr>
+        <p:txBody>
+          <a:bodyPr wrap="square" lIns="0" tIns="0" rIns="0" bIns="0" rtlCol="0" anchor="ctr"/>
+          <a:lstStyle/>
+          <a:p>
+            <a:pPr indent="0" marL="0">
+              <a:buNone/>
+            </a:pPr>
+            <a:r>
+              <a:rPr lang="en-US" sz="1100" b="1" dirty="0">
                 <a:solidFill>
                   <a:srgbClr val="8E2335"/>
                 </a:solidFill>
@@ -10435,7 +10435,7 @@
               </a:rPr>
               <a:t>Build</a:t>
             </a:r>
-            <a:endParaRPr lang="en-US" sz="850" dirty="0"/>
+            <a:endParaRPr lang="en-US" sz="1100" dirty="0"/>
           </a:p>
         </p:txBody>
       </p:sp>
@@ -10447,24 +10447,24 @@
         </p:nvSpPr>
         <p:spPr>
           <a:xfrm>
-            <a:off x="987552" y="4343400"/>
-            <a:ext cx="2423160" cy="384048"/>
-          </a:xfrm>
-          <a:prstGeom prst="rect">
-            <a:avLst/>
-          </a:prstGeom>
-          <a:noFill/>
-          <a:ln/>
-        </p:spPr>
-        <p:txBody>
-          <a:bodyPr wrap="square" lIns="0" tIns="0" rIns="0" bIns="0" rtlCol="0" anchor="ctr"/>
-          <a:lstStyle/>
-          <a:p>
-            <a:pPr indent="0" marL="0">
-              <a:buNone/>
-            </a:pPr>
-            <a:r>
-              <a:rPr lang="en-US" sz="1050" dirty="0">
+            <a:off x="786384" y="4224528"/>
+            <a:ext cx="2761488" cy="640080"/>
+          </a:xfrm>
+          <a:prstGeom prst="rect">
+            <a:avLst/>
+          </a:prstGeom>
+          <a:noFill/>
+          <a:ln/>
+        </p:spPr>
+        <p:txBody>
+          <a:bodyPr wrap="square" lIns="0" tIns="0" rIns="0" bIns="0" rtlCol="0" anchor="ctr"/>
+          <a:lstStyle/>
+          <a:p>
+            <a:pPr indent="0" marL="0">
+              <a:buNone/>
+            </a:pPr>
+            <a:r>
+              <a:rPr lang="en-US" sz="1360" dirty="0">
                 <a:solidFill>
                   <a:srgbClr val="1F1A17"/>
                 </a:solidFill>
@@ -10474,7 +10474,7 @@
               </a:rPr>
               <a:t>肉画像データセットを作成し、YOLO形式で扱えるようにする</a:t>
             </a:r>
-            <a:endParaRPr lang="en-US" sz="1050" dirty="0"/>
+            <a:endParaRPr lang="en-US" sz="1360" dirty="0"/>
           </a:p>
         </p:txBody>
       </p:sp>
@@ -10486,8 +10486,8 @@
         </p:nvSpPr>
         <p:spPr>
           <a:xfrm>
-            <a:off x="4517136" y="3675888"/>
-            <a:ext cx="2971800" cy="1463040"/>
+            <a:off x="4453128" y="3401568"/>
+            <a:ext cx="3383280" cy="2011680"/>
           </a:xfrm>
           <a:prstGeom prst="rect">
             <a:avLst/>
@@ -10511,24 +10511,24 @@
         </p:nvSpPr>
         <p:spPr>
           <a:xfrm>
-            <a:off x="4736592" y="3950208"/>
-            <a:ext cx="1097280" cy="164592"/>
-          </a:xfrm>
-          <a:prstGeom prst="rect">
-            <a:avLst/>
-          </a:prstGeom>
-          <a:noFill/>
-          <a:ln/>
-        </p:spPr>
-        <p:txBody>
-          <a:bodyPr wrap="square" lIns="0" tIns="0" rIns="0" bIns="0" rtlCol="0" anchor="ctr"/>
-          <a:lstStyle/>
-          <a:p>
-            <a:pPr indent="0" marL="0">
-              <a:buNone/>
-            </a:pPr>
-            <a:r>
-              <a:rPr lang="en-US" sz="850" b="1" dirty="0">
+            <a:off x="4764024" y="3703320"/>
+            <a:ext cx="1234440" cy="182880"/>
+          </a:xfrm>
+          <a:prstGeom prst="rect">
+            <a:avLst/>
+          </a:prstGeom>
+          <a:noFill/>
+          <a:ln/>
+        </p:spPr>
+        <p:txBody>
+          <a:bodyPr wrap="square" lIns="0" tIns="0" rIns="0" bIns="0" rtlCol="0" anchor="ctr"/>
+          <a:lstStyle/>
+          <a:p>
+            <a:pPr indent="0" marL="0">
+              <a:buNone/>
+            </a:pPr>
+            <a:r>
+              <a:rPr lang="en-US" sz="1100" b="1" dirty="0">
                 <a:solidFill>
                   <a:srgbClr val="1BAE9D"/>
                 </a:solidFill>
@@ -10538,7 +10538,7 @@
               </a:rPr>
               <a:t>Measure</a:t>
             </a:r>
-            <a:endParaRPr lang="en-US" sz="850" dirty="0"/>
+            <a:endParaRPr lang="en-US" sz="1100" dirty="0"/>
           </a:p>
         </p:txBody>
       </p:sp>
@@ -10550,24 +10550,24 @@
         </p:nvSpPr>
         <p:spPr>
           <a:xfrm>
-            <a:off x="4736592" y="4343400"/>
-            <a:ext cx="2423160" cy="384048"/>
-          </a:xfrm>
-          <a:prstGeom prst="rect">
-            <a:avLst/>
-          </a:prstGeom>
-          <a:noFill/>
-          <a:ln/>
-        </p:spPr>
-        <p:txBody>
-          <a:bodyPr wrap="square" lIns="0" tIns="0" rIns="0" bIns="0" rtlCol="0" anchor="ctr"/>
-          <a:lstStyle/>
-          <a:p>
-            <a:pPr indent="0" marL="0">
-              <a:buNone/>
-            </a:pPr>
-            <a:r>
-              <a:rPr lang="en-US" sz="1050" dirty="0">
+            <a:off x="4764024" y="4224528"/>
+            <a:ext cx="2761488" cy="640080"/>
+          </a:xfrm>
+          <a:prstGeom prst="rect">
+            <a:avLst/>
+          </a:prstGeom>
+          <a:noFill/>
+          <a:ln/>
+        </p:spPr>
+        <p:txBody>
+          <a:bodyPr wrap="square" lIns="0" tIns="0" rIns="0" bIns="0" rtlCol="0" anchor="ctr"/>
+          <a:lstStyle/>
+          <a:p>
+            <a:pPr indent="0" marL="0">
+              <a:buNone/>
+            </a:pPr>
+            <a:r>
+              <a:rPr lang="en-US" sz="1360" dirty="0">
                 <a:solidFill>
                   <a:srgbClr val="1F1A17"/>
                 </a:solidFill>
@@ -10577,7 +10577,7 @@
               </a:rPr>
               <a:t>Precision、Recall、mAPで検出性能を確認する</a:t>
             </a:r>
-            <a:endParaRPr lang="en-US" sz="1050" dirty="0"/>
+            <a:endParaRPr lang="en-US" sz="1360" dirty="0"/>
           </a:p>
         </p:txBody>
       </p:sp>
@@ -10589,8 +10589,8 @@
         </p:nvSpPr>
         <p:spPr>
           <a:xfrm>
-            <a:off x="8266176" y="3675888"/>
-            <a:ext cx="2971800" cy="1463040"/>
+            <a:off x="8430768" y="3401568"/>
+            <a:ext cx="3383280" cy="2011680"/>
           </a:xfrm>
           <a:prstGeom prst="rect">
             <a:avLst/>
@@ -10614,24 +10614,24 @@
         </p:nvSpPr>
         <p:spPr>
           <a:xfrm>
-            <a:off x="8485632" y="3950208"/>
-            <a:ext cx="1097280" cy="164592"/>
-          </a:xfrm>
-          <a:prstGeom prst="rect">
-            <a:avLst/>
-          </a:prstGeom>
-          <a:noFill/>
-          <a:ln/>
-        </p:spPr>
-        <p:txBody>
-          <a:bodyPr wrap="square" lIns="0" tIns="0" rIns="0" bIns="0" rtlCol="0" anchor="ctr"/>
-          <a:lstStyle/>
-          <a:p>
-            <a:pPr indent="0" marL="0">
-              <a:buNone/>
-            </a:pPr>
-            <a:r>
-              <a:rPr lang="en-US" sz="850" b="1" dirty="0">
+            <a:off x="8741664" y="3703320"/>
+            <a:ext cx="1234440" cy="182880"/>
+          </a:xfrm>
+          <a:prstGeom prst="rect">
+            <a:avLst/>
+          </a:prstGeom>
+          <a:noFill/>
+          <a:ln/>
+        </p:spPr>
+        <p:txBody>
+          <a:bodyPr wrap="square" lIns="0" tIns="0" rIns="0" bIns="0" rtlCol="0" anchor="ctr"/>
+          <a:lstStyle/>
+          <a:p>
+            <a:pPr indent="0" marL="0">
+              <a:buNone/>
+            </a:pPr>
+            <a:r>
+              <a:rPr lang="en-US" sz="1100" b="1" dirty="0">
                 <a:solidFill>
                   <a:srgbClr val="305C8A"/>
                 </a:solidFill>
@@ -10641,7 +10641,7 @@
               </a:rPr>
               <a:t>Explain</a:t>
             </a:r>
-            <a:endParaRPr lang="en-US" sz="850" dirty="0"/>
+            <a:endParaRPr lang="en-US" sz="1100" dirty="0"/>
           </a:p>
         </p:txBody>
       </p:sp>
@@ -10653,24 +10653,24 @@
         </p:nvSpPr>
         <p:spPr>
           <a:xfrm>
-            <a:off x="8485632" y="4343400"/>
-            <a:ext cx="2423160" cy="384048"/>
-          </a:xfrm>
-          <a:prstGeom prst="rect">
-            <a:avLst/>
-          </a:prstGeom>
-          <a:noFill/>
-          <a:ln/>
-        </p:spPr>
-        <p:txBody>
-          <a:bodyPr wrap="square" lIns="0" tIns="0" rIns="0" bIns="0" rtlCol="0" anchor="ctr"/>
-          <a:lstStyle/>
-          <a:p>
-            <a:pPr indent="0" marL="0">
-              <a:buNone/>
-            </a:pPr>
-            <a:r>
-              <a:rPr lang="en-US" sz="1050" dirty="0">
+            <a:off x="8741664" y="4224528"/>
+            <a:ext cx="2761488" cy="640080"/>
+          </a:xfrm>
+          <a:prstGeom prst="rect">
+            <a:avLst/>
+          </a:prstGeom>
+          <a:noFill/>
+          <a:ln/>
+        </p:spPr>
+        <p:txBody>
+          <a:bodyPr wrap="square" lIns="0" tIns="0" rIns="0" bIns="0" rtlCol="0" anchor="ctr"/>
+          <a:lstStyle/>
+          <a:p>
+            <a:pPr indent="0" marL="0">
+              <a:buNone/>
+            </a:pPr>
+            <a:r>
+              <a:rPr lang="en-US" sz="1360" dirty="0">
                 <a:solidFill>
                   <a:srgbClr val="1F1A17"/>
                 </a:solidFill>
@@ -10680,7 +10680,7 @@
               </a:rPr>
               <a:t>成功例と失敗例から、肉画像認識の課題を考察する</a:t>
             </a:r>
-            <a:endParaRPr lang="en-US" sz="1050" dirty="0"/>
+            <a:endParaRPr lang="en-US" sz="1360" dirty="0"/>
           </a:p>
         </p:txBody>
       </p:sp>
@@ -10789,24 +10789,24 @@
         </p:nvSpPr>
         <p:spPr>
           <a:xfrm>
-            <a:off x="530352" y="320040"/>
-            <a:ext cx="1325880" cy="182880"/>
-          </a:xfrm>
-          <a:prstGeom prst="rect">
-            <a:avLst/>
-          </a:prstGeom>
-          <a:noFill/>
-          <a:ln/>
-        </p:spPr>
-        <p:txBody>
-          <a:bodyPr wrap="square" lIns="0" tIns="0" rIns="0" bIns="0" rtlCol="0" anchor="ctr"/>
-          <a:lstStyle/>
-          <a:p>
-            <a:pPr indent="0" marL="0">
-              <a:buNone/>
-            </a:pPr>
-            <a:r>
-              <a:rPr lang="en-US" sz="750" b="1" dirty="0">
+            <a:off x="530352" y="292608"/>
+            <a:ext cx="1600200" cy="201168"/>
+          </a:xfrm>
+          <a:prstGeom prst="rect">
+            <a:avLst/>
+          </a:prstGeom>
+          <a:noFill/>
+          <a:ln/>
+        </p:spPr>
+        <p:txBody>
+          <a:bodyPr wrap="square" lIns="0" tIns="0" rIns="0" bIns="0" rtlCol="0" anchor="ctr"/>
+          <a:lstStyle/>
+          <a:p>
+            <a:pPr indent="0" marL="0">
+              <a:buNone/>
+            </a:pPr>
+            <a:r>
+              <a:rPr lang="en-US" sz="840" b="1" dirty="0">
                 <a:solidFill>
                   <a:srgbClr val="8E2335"/>
                 </a:solidFill>
@@ -10816,7 +10816,7 @@
               </a:rPr>
               <a:t>2章 手法</a:t>
             </a:r>
-            <a:endParaRPr lang="en-US" sz="750" dirty="0"/>
+            <a:endParaRPr lang="en-US" sz="840" dirty="0"/>
           </a:p>
         </p:txBody>
       </p:sp>
@@ -10828,8 +10828,8 @@
         </p:nvSpPr>
         <p:spPr>
           <a:xfrm>
-            <a:off x="530352" y="566928"/>
-            <a:ext cx="7406640" cy="384048"/>
+            <a:off x="530352" y="557784"/>
+            <a:ext cx="7406640" cy="420624"/>
           </a:xfrm>
           <a:prstGeom prst="rect">
             <a:avLst/>
@@ -10907,7 +10907,7 @@
               <a:buNone/>
             </a:pPr>
             <a:r>
-              <a:rPr lang="en-US" sz="750" b="1" dirty="0">
+              <a:rPr lang="en-US" sz="850" b="1" dirty="0">
                 <a:solidFill>
                   <a:srgbClr val="776C64"/>
                 </a:solidFill>
@@ -10917,7 +10917,7 @@
               </a:rPr>
               <a:t>07</a:t>
             </a:r>
-            <a:endParaRPr lang="en-US" sz="750" dirty="0"/>
+            <a:endParaRPr lang="en-US" sz="850" dirty="0"/>
           </a:p>
         </p:txBody>
       </p:sp>
@@ -10929,8 +10929,8 @@
         </p:nvSpPr>
         <p:spPr>
           <a:xfrm>
-            <a:off x="713232" y="1600200"/>
-            <a:ext cx="2331720" cy="932688"/>
+            <a:off x="493776" y="1417320"/>
+            <a:ext cx="2487168" cy="1298448"/>
           </a:xfrm>
           <a:prstGeom prst="rect">
             <a:avLst/>
@@ -10954,8 +10954,8 @@
         </p:nvSpPr>
         <p:spPr>
           <a:xfrm>
-            <a:off x="713232" y="1600200"/>
-            <a:ext cx="384048" cy="932688"/>
+            <a:off x="493776" y="1417320"/>
+            <a:ext cx="566928" cy="1298448"/>
           </a:xfrm>
           <a:prstGeom prst="rect">
             <a:avLst/>
@@ -10981,8 +10981,8 @@
         </p:nvSpPr>
         <p:spPr>
           <a:xfrm>
-            <a:off x="813816" y="1938528"/>
-            <a:ext cx="182880" cy="128016"/>
+            <a:off x="667512" y="1901952"/>
+            <a:ext cx="219456" cy="164592"/>
           </a:xfrm>
           <a:prstGeom prst="rect">
             <a:avLst/>
@@ -10998,7 +10998,7 @@
               <a:buNone/>
             </a:pPr>
             <a:r>
-              <a:rPr lang="en-US" sz="900" b="1" dirty="0">
+              <a:rPr lang="en-US" sz="1150" b="1" dirty="0">
                 <a:solidFill>
                   <a:srgbClr val="FFFFFF"/>
                 </a:solidFill>
@@ -11008,7 +11008,7 @@
               </a:rPr>
               <a:t>1</a:t>
             </a:r>
-            <a:endParaRPr lang="en-US" sz="900" dirty="0"/>
+            <a:endParaRPr lang="en-US" sz="1150" dirty="0"/>
           </a:p>
         </p:txBody>
       </p:sp>
@@ -11020,24 +11020,24 @@
         </p:nvSpPr>
         <p:spPr>
           <a:xfrm>
-            <a:off x="1216152" y="1764792"/>
-            <a:ext cx="1645920" cy="146304"/>
-          </a:xfrm>
-          <a:prstGeom prst="rect">
-            <a:avLst/>
-          </a:prstGeom>
-          <a:noFill/>
-          <a:ln/>
-        </p:spPr>
-        <p:txBody>
-          <a:bodyPr wrap="square" lIns="0" tIns="0" rIns="0" bIns="0" rtlCol="0" anchor="ctr"/>
-          <a:lstStyle/>
-          <a:p>
-            <a:pPr indent="0" marL="0">
-              <a:buNone/>
-            </a:pPr>
-            <a:r>
-              <a:rPr lang="en-US" sz="960" b="1" dirty="0">
+            <a:off x="1243584" y="1627632"/>
+            <a:ext cx="1554480" cy="201168"/>
+          </a:xfrm>
+          <a:prstGeom prst="rect">
+            <a:avLst/>
+          </a:prstGeom>
+          <a:noFill/>
+          <a:ln/>
+        </p:spPr>
+        <p:txBody>
+          <a:bodyPr wrap="square" lIns="0" tIns="0" rIns="0" bIns="0" rtlCol="0" anchor="ctr"/>
+          <a:lstStyle/>
+          <a:p>
+            <a:pPr indent="0" marL="0">
+              <a:buNone/>
+            </a:pPr>
+            <a:r>
+              <a:rPr lang="en-US" sz="1250" b="1" dirty="0">
                 <a:solidFill>
                   <a:srgbClr val="1F1A17"/>
                 </a:solidFill>
@@ -11047,7 +11047,7 @@
               </a:rPr>
               <a:t>画像収集</a:t>
             </a:r>
-            <a:endParaRPr lang="en-US" sz="960" dirty="0"/>
+            <a:endParaRPr lang="en-US" sz="1250" dirty="0"/>
           </a:p>
         </p:txBody>
       </p:sp>
@@ -11059,24 +11059,24 @@
         </p:nvSpPr>
         <p:spPr>
           <a:xfrm>
-            <a:off x="1216152" y="2020824"/>
-            <a:ext cx="1673352" cy="228600"/>
-          </a:xfrm>
-          <a:prstGeom prst="rect">
-            <a:avLst/>
-          </a:prstGeom>
-          <a:noFill/>
-          <a:ln/>
-        </p:spPr>
-        <p:txBody>
-          <a:bodyPr wrap="square" lIns="0" tIns="0" rIns="0" bIns="0" rtlCol="0" anchor="ctr"/>
-          <a:lstStyle/>
-          <a:p>
-            <a:pPr indent="0" marL="0">
-              <a:buNone/>
-            </a:pPr>
-            <a:r>
-              <a:rPr lang="en-US" sz="750" dirty="0">
+            <a:off x="1243584" y="2039112"/>
+            <a:ext cx="1554480" cy="310896"/>
+          </a:xfrm>
+          <a:prstGeom prst="rect">
+            <a:avLst/>
+          </a:prstGeom>
+          <a:noFill/>
+          <a:ln/>
+        </p:spPr>
+        <p:txBody>
+          <a:bodyPr wrap="square" lIns="0" tIns="0" rIns="0" bIns="0" rtlCol="0" anchor="ctr"/>
+          <a:lstStyle/>
+          <a:p>
+            <a:pPr indent="0" marL="0">
+              <a:buNone/>
+            </a:pPr>
+            <a:r>
+              <a:rPr lang="en-US" sz="1020" dirty="0">
                 <a:solidFill>
                   <a:srgbClr val="776C64"/>
                 </a:solidFill>
@@ -11086,7 +11086,7 @@
               </a:rPr>
               <a:t>肉画像を集める</a:t>
             </a:r>
-            <a:endParaRPr lang="en-US" sz="750" dirty="0"/>
+            <a:endParaRPr lang="en-US" sz="1020" dirty="0"/>
           </a:p>
         </p:txBody>
       </p:sp>
@@ -11098,8 +11098,8 @@
         </p:nvSpPr>
         <p:spPr>
           <a:xfrm>
-            <a:off x="3118104" y="2066544"/>
-            <a:ext cx="320040" cy="0"/>
+            <a:off x="3054096" y="2066544"/>
+            <a:ext cx="292608" cy="0"/>
           </a:xfrm>
           <a:prstGeom prst="line">
             <a:avLst/>
@@ -11122,8 +11122,8 @@
         </p:nvSpPr>
         <p:spPr>
           <a:xfrm>
-            <a:off x="3502152" y="1600200"/>
-            <a:ext cx="2331720" cy="932688"/>
+            <a:off x="3419856" y="1417320"/>
+            <a:ext cx="2487168" cy="1298448"/>
           </a:xfrm>
           <a:prstGeom prst="rect">
             <a:avLst/>
@@ -11147,8 +11147,8 @@
         </p:nvSpPr>
         <p:spPr>
           <a:xfrm>
-            <a:off x="3502152" y="1600200"/>
-            <a:ext cx="384048" cy="932688"/>
+            <a:off x="3419856" y="1417320"/>
+            <a:ext cx="566928" cy="1298448"/>
           </a:xfrm>
           <a:prstGeom prst="rect">
             <a:avLst/>
@@ -11174,8 +11174,8 @@
         </p:nvSpPr>
         <p:spPr>
           <a:xfrm>
-            <a:off x="3602736" y="1938528"/>
-            <a:ext cx="182880" cy="128016"/>
+            <a:off x="3593592" y="1901952"/>
+            <a:ext cx="219456" cy="164592"/>
           </a:xfrm>
           <a:prstGeom prst="rect">
             <a:avLst/>
@@ -11191,7 +11191,7 @@
               <a:buNone/>
             </a:pPr>
             <a:r>
-              <a:rPr lang="en-US" sz="900" b="1" dirty="0">
+              <a:rPr lang="en-US" sz="1150" b="1" dirty="0">
                 <a:solidFill>
                   <a:srgbClr val="FFFFFF"/>
                 </a:solidFill>
@@ -11201,7 +11201,7 @@
               </a:rPr>
               <a:t>2</a:t>
             </a:r>
-            <a:endParaRPr lang="en-US" sz="900" dirty="0"/>
+            <a:endParaRPr lang="en-US" sz="1150" dirty="0"/>
           </a:p>
         </p:txBody>
       </p:sp>
@@ -11213,24 +11213,24 @@
         </p:nvSpPr>
         <p:spPr>
           <a:xfrm>
-            <a:off x="4005072" y="1764792"/>
-            <a:ext cx="1645920" cy="146304"/>
-          </a:xfrm>
-          <a:prstGeom prst="rect">
-            <a:avLst/>
-          </a:prstGeom>
-          <a:noFill/>
-          <a:ln/>
-        </p:spPr>
-        <p:txBody>
-          <a:bodyPr wrap="square" lIns="0" tIns="0" rIns="0" bIns="0" rtlCol="0" anchor="ctr"/>
-          <a:lstStyle/>
-          <a:p>
-            <a:pPr indent="0" marL="0">
-              <a:buNone/>
-            </a:pPr>
-            <a:r>
-              <a:rPr lang="en-US" sz="960" b="1" dirty="0">
+            <a:off x="4169664" y="1627632"/>
+            <a:ext cx="1554480" cy="201168"/>
+          </a:xfrm>
+          <a:prstGeom prst="rect">
+            <a:avLst/>
+          </a:prstGeom>
+          <a:noFill/>
+          <a:ln/>
+        </p:spPr>
+        <p:txBody>
+          <a:bodyPr wrap="square" lIns="0" tIns="0" rIns="0" bIns="0" rtlCol="0" anchor="ctr"/>
+          <a:lstStyle/>
+          <a:p>
+            <a:pPr indent="0" marL="0">
+              <a:buNone/>
+            </a:pPr>
+            <a:r>
+              <a:rPr lang="en-US" sz="1250" b="1" dirty="0">
                 <a:solidFill>
                   <a:srgbClr val="1F1A17"/>
                 </a:solidFill>
@@ -11240,7 +11240,7 @@
               </a:rPr>
               <a:t>アノテーション</a:t>
             </a:r>
-            <a:endParaRPr lang="en-US" sz="960" dirty="0"/>
+            <a:endParaRPr lang="en-US" sz="1250" dirty="0"/>
           </a:p>
         </p:txBody>
       </p:sp>
@@ -11252,24 +11252,24 @@
         </p:nvSpPr>
         <p:spPr>
           <a:xfrm>
-            <a:off x="4005072" y="2020824"/>
-            <a:ext cx="1673352" cy="228600"/>
-          </a:xfrm>
-          <a:prstGeom prst="rect">
-            <a:avLst/>
-          </a:prstGeom>
-          <a:noFill/>
-          <a:ln/>
-        </p:spPr>
-        <p:txBody>
-          <a:bodyPr wrap="square" lIns="0" tIns="0" rIns="0" bIns="0" rtlCol="0" anchor="ctr"/>
-          <a:lstStyle/>
-          <a:p>
-            <a:pPr indent="0" marL="0">
-              <a:buNone/>
-            </a:pPr>
-            <a:r>
-              <a:rPr lang="en-US" sz="750" dirty="0">
+            <a:off x="4169664" y="2039112"/>
+            <a:ext cx="1554480" cy="310896"/>
+          </a:xfrm>
+          <a:prstGeom prst="rect">
+            <a:avLst/>
+          </a:prstGeom>
+          <a:noFill/>
+          <a:ln/>
+        </p:spPr>
+        <p:txBody>
+          <a:bodyPr wrap="square" lIns="0" tIns="0" rIns="0" bIns="0" rtlCol="0" anchor="ctr"/>
+          <a:lstStyle/>
+          <a:p>
+            <a:pPr indent="0" marL="0">
+              <a:buNone/>
+            </a:pPr>
+            <a:r>
+              <a:rPr lang="en-US" sz="1020" dirty="0">
                 <a:solidFill>
                   <a:srgbClr val="776C64"/>
                 </a:solidFill>
@@ -11279,7 +11279,7 @@
               </a:rPr>
               <a:t>肉領域をBBox化</a:t>
             </a:r>
-            <a:endParaRPr lang="en-US" sz="750" dirty="0"/>
+            <a:endParaRPr lang="en-US" sz="1020" dirty="0"/>
           </a:p>
         </p:txBody>
       </p:sp>
@@ -11291,8 +11291,8 @@
         </p:nvSpPr>
         <p:spPr>
           <a:xfrm>
-            <a:off x="5907024" y="2066544"/>
-            <a:ext cx="320040" cy="0"/>
+            <a:off x="5980176" y="2066544"/>
+            <a:ext cx="292608" cy="0"/>
           </a:xfrm>
           <a:prstGeom prst="line">
             <a:avLst/>
@@ -11315,8 +11315,8 @@
         </p:nvSpPr>
         <p:spPr>
           <a:xfrm>
-            <a:off x="6291072" y="1600200"/>
-            <a:ext cx="2331720" cy="932688"/>
+            <a:off x="6345936" y="1417320"/>
+            <a:ext cx="2487168" cy="1298448"/>
           </a:xfrm>
           <a:prstGeom prst="rect">
             <a:avLst/>
@@ -11340,8 +11340,8 @@
         </p:nvSpPr>
         <p:spPr>
           <a:xfrm>
-            <a:off x="6291072" y="1600200"/>
-            <a:ext cx="384048" cy="932688"/>
+            <a:off x="6345936" y="1417320"/>
+            <a:ext cx="566928" cy="1298448"/>
           </a:xfrm>
           <a:prstGeom prst="rect">
             <a:avLst/>
@@ -11367,8 +11367,8 @@
         </p:nvSpPr>
         <p:spPr>
           <a:xfrm>
-            <a:off x="6391656" y="1938528"/>
-            <a:ext cx="182880" cy="128016"/>
+            <a:off x="6519672" y="1901952"/>
+            <a:ext cx="219456" cy="164592"/>
           </a:xfrm>
           <a:prstGeom prst="rect">
             <a:avLst/>
@@ -11384,7 +11384,7 @@
               <a:buNone/>
             </a:pPr>
             <a:r>
-              <a:rPr lang="en-US" sz="900" b="1" dirty="0">
+              <a:rPr lang="en-US" sz="1150" b="1" dirty="0">
                 <a:solidFill>
                   <a:srgbClr val="FFFFFF"/>
                 </a:solidFill>
@@ -11394,7 +11394,7 @@
               </a:rPr>
               <a:t>3</a:t>
             </a:r>
-            <a:endParaRPr lang="en-US" sz="900" dirty="0"/>
+            <a:endParaRPr lang="en-US" sz="1150" dirty="0"/>
           </a:p>
         </p:txBody>
       </p:sp>
@@ -11406,24 +11406,24 @@
         </p:nvSpPr>
         <p:spPr>
           <a:xfrm>
-            <a:off x="6793992" y="1764792"/>
-            <a:ext cx="1645920" cy="146304"/>
-          </a:xfrm>
-          <a:prstGeom prst="rect">
-            <a:avLst/>
-          </a:prstGeom>
-          <a:noFill/>
-          <a:ln/>
-        </p:spPr>
-        <p:txBody>
-          <a:bodyPr wrap="square" lIns="0" tIns="0" rIns="0" bIns="0" rtlCol="0" anchor="ctr"/>
-          <a:lstStyle/>
-          <a:p>
-            <a:pPr indent="0" marL="0">
-              <a:buNone/>
-            </a:pPr>
-            <a:r>
-              <a:rPr lang="en-US" sz="960" b="1" dirty="0">
+            <a:off x="7095744" y="1627632"/>
+            <a:ext cx="1554480" cy="201168"/>
+          </a:xfrm>
+          <a:prstGeom prst="rect">
+            <a:avLst/>
+          </a:prstGeom>
+          <a:noFill/>
+          <a:ln/>
+        </p:spPr>
+        <p:txBody>
+          <a:bodyPr wrap="square" lIns="0" tIns="0" rIns="0" bIns="0" rtlCol="0" anchor="ctr"/>
+          <a:lstStyle/>
+          <a:p>
+            <a:pPr indent="0" marL="0">
+              <a:buNone/>
+            </a:pPr>
+            <a:r>
+              <a:rPr lang="en-US" sz="1250" b="1" dirty="0">
                 <a:solidFill>
                   <a:srgbClr val="1F1A17"/>
                 </a:solidFill>
@@ -11433,7 +11433,7 @@
               </a:rPr>
               <a:t>前処理</a:t>
             </a:r>
-            <a:endParaRPr lang="en-US" sz="960" dirty="0"/>
+            <a:endParaRPr lang="en-US" sz="1250" dirty="0"/>
           </a:p>
         </p:txBody>
       </p:sp>
@@ -11445,24 +11445,24 @@
         </p:nvSpPr>
         <p:spPr>
           <a:xfrm>
-            <a:off x="6793992" y="2020824"/>
-            <a:ext cx="1673352" cy="228600"/>
-          </a:xfrm>
-          <a:prstGeom prst="rect">
-            <a:avLst/>
-          </a:prstGeom>
-          <a:noFill/>
-          <a:ln/>
-        </p:spPr>
-        <p:txBody>
-          <a:bodyPr wrap="square" lIns="0" tIns="0" rIns="0" bIns="0" rtlCol="0" anchor="ctr"/>
-          <a:lstStyle/>
-          <a:p>
-            <a:pPr indent="0" marL="0">
-              <a:buNone/>
-            </a:pPr>
-            <a:r>
-              <a:rPr lang="en-US" sz="750" dirty="0">
+            <a:off x="7095744" y="2039112"/>
+            <a:ext cx="1554480" cy="310896"/>
+          </a:xfrm>
+          <a:prstGeom prst="rect">
+            <a:avLst/>
+          </a:prstGeom>
+          <a:noFill/>
+          <a:ln/>
+        </p:spPr>
+        <p:txBody>
+          <a:bodyPr wrap="square" lIns="0" tIns="0" rIns="0" bIns="0" rtlCol="0" anchor="ctr"/>
+          <a:lstStyle/>
+          <a:p>
+            <a:pPr indent="0" marL="0">
+              <a:buNone/>
+            </a:pPr>
+            <a:r>
+              <a:rPr lang="en-US" sz="1020" dirty="0">
                 <a:solidFill>
                   <a:srgbClr val="776C64"/>
                 </a:solidFill>
@@ -11472,7 +11472,7 @@
               </a:rPr>
               <a:t>サイズ統一と分割</a:t>
             </a:r>
-            <a:endParaRPr lang="en-US" sz="750" dirty="0"/>
+            <a:endParaRPr lang="en-US" sz="1020" dirty="0"/>
           </a:p>
         </p:txBody>
       </p:sp>
@@ -11484,8 +11484,8 @@
         </p:nvSpPr>
         <p:spPr>
           <a:xfrm>
-            <a:off x="8695944" y="2066544"/>
-            <a:ext cx="320040" cy="0"/>
+            <a:off x="8906256" y="2066544"/>
+            <a:ext cx="292608" cy="0"/>
           </a:xfrm>
           <a:prstGeom prst="line">
             <a:avLst/>
@@ -11508,8 +11508,8 @@
         </p:nvSpPr>
         <p:spPr>
           <a:xfrm>
-            <a:off x="9079992" y="1600200"/>
-            <a:ext cx="2331720" cy="932688"/>
+            <a:off x="9272016" y="1417320"/>
+            <a:ext cx="2487168" cy="1298448"/>
           </a:xfrm>
           <a:prstGeom prst="rect">
             <a:avLst/>
@@ -11533,8 +11533,8 @@
         </p:nvSpPr>
         <p:spPr>
           <a:xfrm>
-            <a:off x="9079992" y="1600200"/>
-            <a:ext cx="384048" cy="932688"/>
+            <a:off x="9272016" y="1417320"/>
+            <a:ext cx="566928" cy="1298448"/>
           </a:xfrm>
           <a:prstGeom prst="rect">
             <a:avLst/>
@@ -11560,8 +11560,8 @@
         </p:nvSpPr>
         <p:spPr>
           <a:xfrm>
-            <a:off x="9180576" y="1938528"/>
-            <a:ext cx="182880" cy="128016"/>
+            <a:off x="9445752" y="1901952"/>
+            <a:ext cx="219456" cy="164592"/>
           </a:xfrm>
           <a:prstGeom prst="rect">
             <a:avLst/>
@@ -11577,7 +11577,7 @@
               <a:buNone/>
             </a:pPr>
             <a:r>
-              <a:rPr lang="en-US" sz="900" b="1" dirty="0">
+              <a:rPr lang="en-US" sz="1150" b="1" dirty="0">
                 <a:solidFill>
                   <a:srgbClr val="FFFFFF"/>
                 </a:solidFill>
@@ -11587,7 +11587,7 @@
               </a:rPr>
               <a:t>4</a:t>
             </a:r>
-            <a:endParaRPr lang="en-US" sz="900" dirty="0"/>
+            <a:endParaRPr lang="en-US" sz="1150" dirty="0"/>
           </a:p>
         </p:txBody>
       </p:sp>
@@ -11599,24 +11599,24 @@
         </p:nvSpPr>
         <p:spPr>
           <a:xfrm>
-            <a:off x="9582912" y="1764792"/>
-            <a:ext cx="1645920" cy="146304"/>
-          </a:xfrm>
-          <a:prstGeom prst="rect">
-            <a:avLst/>
-          </a:prstGeom>
-          <a:noFill/>
-          <a:ln/>
-        </p:spPr>
-        <p:txBody>
-          <a:bodyPr wrap="square" lIns="0" tIns="0" rIns="0" bIns="0" rtlCol="0" anchor="ctr"/>
-          <a:lstStyle/>
-          <a:p>
-            <a:pPr indent="0" marL="0">
-              <a:buNone/>
-            </a:pPr>
-            <a:r>
-              <a:rPr lang="en-US" sz="960" b="1" dirty="0">
+            <a:off x="10021824" y="1627632"/>
+            <a:ext cx="1554480" cy="201168"/>
+          </a:xfrm>
+          <a:prstGeom prst="rect">
+            <a:avLst/>
+          </a:prstGeom>
+          <a:noFill/>
+          <a:ln/>
+        </p:spPr>
+        <p:txBody>
+          <a:bodyPr wrap="square" lIns="0" tIns="0" rIns="0" bIns="0" rtlCol="0" anchor="ctr"/>
+          <a:lstStyle/>
+          <a:p>
+            <a:pPr indent="0" marL="0">
+              <a:buNone/>
+            </a:pPr>
+            <a:r>
+              <a:rPr lang="en-US" sz="1250" b="1" dirty="0">
                 <a:solidFill>
                   <a:srgbClr val="1F1A17"/>
                 </a:solidFill>
@@ -11626,7 +11626,7 @@
               </a:rPr>
               <a:t>データ拡張</a:t>
             </a:r>
-            <a:endParaRPr lang="en-US" sz="960" dirty="0"/>
+            <a:endParaRPr lang="en-US" sz="1250" dirty="0"/>
           </a:p>
         </p:txBody>
       </p:sp>
@@ -11638,24 +11638,24 @@
         </p:nvSpPr>
         <p:spPr>
           <a:xfrm>
-            <a:off x="9582912" y="2020824"/>
-            <a:ext cx="1673352" cy="228600"/>
-          </a:xfrm>
-          <a:prstGeom prst="rect">
-            <a:avLst/>
-          </a:prstGeom>
-          <a:noFill/>
-          <a:ln/>
-        </p:spPr>
-        <p:txBody>
-          <a:bodyPr wrap="square" lIns="0" tIns="0" rIns="0" bIns="0" rtlCol="0" anchor="ctr"/>
-          <a:lstStyle/>
-          <a:p>
-            <a:pPr indent="0" marL="0">
-              <a:buNone/>
-            </a:pPr>
-            <a:r>
-              <a:rPr lang="en-US" sz="750" dirty="0">
+            <a:off x="10021824" y="2039112"/>
+            <a:ext cx="1554480" cy="310896"/>
+          </a:xfrm>
+          <a:prstGeom prst="rect">
+            <a:avLst/>
+          </a:prstGeom>
+          <a:noFill/>
+          <a:ln/>
+        </p:spPr>
+        <p:txBody>
+          <a:bodyPr wrap="square" lIns="0" tIns="0" rIns="0" bIns="0" rtlCol="0" anchor="ctr"/>
+          <a:lstStyle/>
+          <a:p>
+            <a:pPr indent="0" marL="0">
+              <a:buNone/>
+            </a:pPr>
+            <a:r>
+              <a:rPr lang="en-US" sz="1020" dirty="0">
                 <a:solidFill>
                   <a:srgbClr val="776C64"/>
                 </a:solidFill>
@@ -11665,7 +11665,7 @@
               </a:rPr>
               <a:t>見え方の揺れを補う</a:t>
             </a:r>
-            <a:endParaRPr lang="en-US" sz="750" dirty="0"/>
+            <a:endParaRPr lang="en-US" sz="1020" dirty="0"/>
           </a:p>
         </p:txBody>
       </p:sp>
@@ -11677,8 +11677,8 @@
         </p:nvSpPr>
         <p:spPr>
           <a:xfrm>
-            <a:off x="713232" y="3822192"/>
-            <a:ext cx="2331720" cy="932688"/>
+            <a:off x="493776" y="3657600"/>
+            <a:ext cx="2487168" cy="1298448"/>
           </a:xfrm>
           <a:prstGeom prst="rect">
             <a:avLst/>
@@ -11702,8 +11702,8 @@
         </p:nvSpPr>
         <p:spPr>
           <a:xfrm>
-            <a:off x="713232" y="3822192"/>
-            <a:ext cx="384048" cy="932688"/>
+            <a:off x="493776" y="3657600"/>
+            <a:ext cx="566928" cy="1298448"/>
           </a:xfrm>
           <a:prstGeom prst="rect">
             <a:avLst/>
@@ -11729,8 +11729,8 @@
         </p:nvSpPr>
         <p:spPr>
           <a:xfrm>
-            <a:off x="813816" y="4160520"/>
-            <a:ext cx="182880" cy="128016"/>
+            <a:off x="667512" y="4142232"/>
+            <a:ext cx="219456" cy="164592"/>
           </a:xfrm>
           <a:prstGeom prst="rect">
             <a:avLst/>
@@ -11746,7 +11746,7 @@
               <a:buNone/>
             </a:pPr>
             <a:r>
-              <a:rPr lang="en-US" sz="900" b="1" dirty="0">
+              <a:rPr lang="en-US" sz="1150" b="1" dirty="0">
                 <a:solidFill>
                   <a:srgbClr val="FFFFFF"/>
                 </a:solidFill>
@@ -11756,7 +11756,7 @@
               </a:rPr>
               <a:t>5</a:t>
             </a:r>
-            <a:endParaRPr lang="en-US" sz="900" dirty="0"/>
+            <a:endParaRPr lang="en-US" sz="1150" dirty="0"/>
           </a:p>
         </p:txBody>
       </p:sp>
@@ -11768,24 +11768,24 @@
         </p:nvSpPr>
         <p:spPr>
           <a:xfrm>
-            <a:off x="1216152" y="3986784"/>
-            <a:ext cx="1645920" cy="146304"/>
-          </a:xfrm>
-          <a:prstGeom prst="rect">
-            <a:avLst/>
-          </a:prstGeom>
-          <a:noFill/>
-          <a:ln/>
-        </p:spPr>
-        <p:txBody>
-          <a:bodyPr wrap="square" lIns="0" tIns="0" rIns="0" bIns="0" rtlCol="0" anchor="ctr"/>
-          <a:lstStyle/>
-          <a:p>
-            <a:pPr indent="0" marL="0">
-              <a:buNone/>
-            </a:pPr>
-            <a:r>
-              <a:rPr lang="en-US" sz="960" b="1" dirty="0">
+            <a:off x="1243584" y="3867912"/>
+            <a:ext cx="1554480" cy="201168"/>
+          </a:xfrm>
+          <a:prstGeom prst="rect">
+            <a:avLst/>
+          </a:prstGeom>
+          <a:noFill/>
+          <a:ln/>
+        </p:spPr>
+        <p:txBody>
+          <a:bodyPr wrap="square" lIns="0" tIns="0" rIns="0" bIns="0" rtlCol="0" anchor="ctr"/>
+          <a:lstStyle/>
+          <a:p>
+            <a:pPr indent="0" marL="0">
+              <a:buNone/>
+            </a:pPr>
+            <a:r>
+              <a:rPr lang="en-US" sz="1250" b="1" dirty="0">
                 <a:solidFill>
                   <a:srgbClr val="1F1A17"/>
                 </a:solidFill>
@@ -11795,7 +11795,7 @@
               </a:rPr>
               <a:t>YOLO学習</a:t>
             </a:r>
-            <a:endParaRPr lang="en-US" sz="960" dirty="0"/>
+            <a:endParaRPr lang="en-US" sz="1250" dirty="0"/>
           </a:p>
         </p:txBody>
       </p:sp>
@@ -11807,24 +11807,24 @@
         </p:nvSpPr>
         <p:spPr>
           <a:xfrm>
-            <a:off x="1216152" y="4242816"/>
-            <a:ext cx="1673352" cy="228600"/>
-          </a:xfrm>
-          <a:prstGeom prst="rect">
-            <a:avLst/>
-          </a:prstGeom>
-          <a:noFill/>
-          <a:ln/>
-        </p:spPr>
-        <p:txBody>
-          <a:bodyPr wrap="square" lIns="0" tIns="0" rIns="0" bIns="0" rtlCol="0" anchor="ctr"/>
-          <a:lstStyle/>
-          <a:p>
-            <a:pPr indent="0" marL="0">
-              <a:buNone/>
-            </a:pPr>
-            <a:r>
-              <a:rPr lang="en-US" sz="750" dirty="0">
+            <a:off x="1243584" y="4279392"/>
+            <a:ext cx="1554480" cy="310896"/>
+          </a:xfrm>
+          <a:prstGeom prst="rect">
+            <a:avLst/>
+          </a:prstGeom>
+          <a:noFill/>
+          <a:ln/>
+        </p:spPr>
+        <p:txBody>
+          <a:bodyPr wrap="square" lIns="0" tIns="0" rIns="0" bIns="0" rtlCol="0" anchor="ctr"/>
+          <a:lstStyle/>
+          <a:p>
+            <a:pPr indent="0" marL="0">
+              <a:buNone/>
+            </a:pPr>
+            <a:r>
+              <a:rPr lang="en-US" sz="1020" dirty="0">
                 <a:solidFill>
                   <a:srgbClr val="776C64"/>
                 </a:solidFill>
@@ -11834,7 +11834,7 @@
               </a:rPr>
               <a:t>位置とクラスを学習</a:t>
             </a:r>
-            <a:endParaRPr lang="en-US" sz="750" dirty="0"/>
+            <a:endParaRPr lang="en-US" sz="1020" dirty="0"/>
           </a:p>
         </p:txBody>
       </p:sp>
@@ -11846,8 +11846,8 @@
         </p:nvSpPr>
         <p:spPr>
           <a:xfrm>
-            <a:off x="3118104" y="4288536"/>
-            <a:ext cx="320040" cy="0"/>
+            <a:off x="3054096" y="4306824"/>
+            <a:ext cx="292608" cy="0"/>
           </a:xfrm>
           <a:prstGeom prst="line">
             <a:avLst/>
@@ -11870,8 +11870,8 @@
         </p:nvSpPr>
         <p:spPr>
           <a:xfrm>
-            <a:off x="3502152" y="3822192"/>
-            <a:ext cx="2331720" cy="932688"/>
+            <a:off x="3419856" y="3657600"/>
+            <a:ext cx="2487168" cy="1298448"/>
           </a:xfrm>
           <a:prstGeom prst="rect">
             <a:avLst/>
@@ -11895,8 +11895,8 @@
         </p:nvSpPr>
         <p:spPr>
           <a:xfrm>
-            <a:off x="3502152" y="3822192"/>
-            <a:ext cx="384048" cy="932688"/>
+            <a:off x="3419856" y="3657600"/>
+            <a:ext cx="566928" cy="1298448"/>
           </a:xfrm>
           <a:prstGeom prst="rect">
             <a:avLst/>
@@ -11922,8 +11922,8 @@
         </p:nvSpPr>
         <p:spPr>
           <a:xfrm>
-            <a:off x="3602736" y="4160520"/>
-            <a:ext cx="182880" cy="128016"/>
+            <a:off x="3593592" y="4142232"/>
+            <a:ext cx="219456" cy="164592"/>
           </a:xfrm>
           <a:prstGeom prst="rect">
             <a:avLst/>
@@ -11939,7 +11939,7 @@
               <a:buNone/>
             </a:pPr>
             <a:r>
-              <a:rPr lang="en-US" sz="900" b="1" dirty="0">
+              <a:rPr lang="en-US" sz="1150" b="1" dirty="0">
                 <a:solidFill>
                   <a:srgbClr val="FFFFFF"/>
                 </a:solidFill>
@@ -11949,7 +11949,7 @@
               </a:rPr>
               <a:t>6</a:t>
             </a:r>
-            <a:endParaRPr lang="en-US" sz="900" dirty="0"/>
+            <a:endParaRPr lang="en-US" sz="1150" dirty="0"/>
           </a:p>
         </p:txBody>
       </p:sp>
@@ -11961,24 +11961,24 @@
         </p:nvSpPr>
         <p:spPr>
           <a:xfrm>
-            <a:off x="4005072" y="3986784"/>
-            <a:ext cx="1645920" cy="146304"/>
-          </a:xfrm>
-          <a:prstGeom prst="rect">
-            <a:avLst/>
-          </a:prstGeom>
-          <a:noFill/>
-          <a:ln/>
-        </p:spPr>
-        <p:txBody>
-          <a:bodyPr wrap="square" lIns="0" tIns="0" rIns="0" bIns="0" rtlCol="0" anchor="ctr"/>
-          <a:lstStyle/>
-          <a:p>
-            <a:pPr indent="0" marL="0">
-              <a:buNone/>
-            </a:pPr>
-            <a:r>
-              <a:rPr lang="en-US" sz="960" b="1" dirty="0">
+            <a:off x="4169664" y="3867912"/>
+            <a:ext cx="1554480" cy="201168"/>
+          </a:xfrm>
+          <a:prstGeom prst="rect">
+            <a:avLst/>
+          </a:prstGeom>
+          <a:noFill/>
+          <a:ln/>
+        </p:spPr>
+        <p:txBody>
+          <a:bodyPr wrap="square" lIns="0" tIns="0" rIns="0" bIns="0" rtlCol="0" anchor="ctr"/>
+          <a:lstStyle/>
+          <a:p>
+            <a:pPr indent="0" marL="0">
+              <a:buNone/>
+            </a:pPr>
+            <a:r>
+              <a:rPr lang="en-US" sz="1250" b="1" dirty="0">
                 <a:solidFill>
                   <a:srgbClr val="1F1A17"/>
                 </a:solidFill>
@@ -11988,7 +11988,7 @@
               </a:rPr>
               <a:t>推論・評価</a:t>
             </a:r>
-            <a:endParaRPr lang="en-US" sz="960" dirty="0"/>
+            <a:endParaRPr lang="en-US" sz="1250" dirty="0"/>
           </a:p>
         </p:txBody>
       </p:sp>
@@ -12000,24 +12000,24 @@
         </p:nvSpPr>
         <p:spPr>
           <a:xfrm>
-            <a:off x="4005072" y="4242816"/>
-            <a:ext cx="1673352" cy="228600"/>
-          </a:xfrm>
-          <a:prstGeom prst="rect">
-            <a:avLst/>
-          </a:prstGeom>
-          <a:noFill/>
-          <a:ln/>
-        </p:spPr>
-        <p:txBody>
-          <a:bodyPr wrap="square" lIns="0" tIns="0" rIns="0" bIns="0" rtlCol="0" anchor="ctr"/>
-          <a:lstStyle/>
-          <a:p>
-            <a:pPr indent="0" marL="0">
-              <a:buNone/>
-            </a:pPr>
-            <a:r>
-              <a:rPr lang="en-US" sz="750" dirty="0">
+            <a:off x="4169664" y="4279392"/>
+            <a:ext cx="1554480" cy="310896"/>
+          </a:xfrm>
+          <a:prstGeom prst="rect">
+            <a:avLst/>
+          </a:prstGeom>
+          <a:noFill/>
+          <a:ln/>
+        </p:spPr>
+        <p:txBody>
+          <a:bodyPr wrap="square" lIns="0" tIns="0" rIns="0" bIns="0" rtlCol="0" anchor="ctr"/>
+          <a:lstStyle/>
+          <a:p>
+            <a:pPr indent="0" marL="0">
+              <a:buNone/>
+            </a:pPr>
+            <a:r>
+              <a:rPr lang="en-US" sz="1020" dirty="0">
                 <a:solidFill>
                   <a:srgbClr val="776C64"/>
                 </a:solidFill>
@@ -12027,7 +12027,7 @@
               </a:rPr>
               <a:t>指標と画像で確認</a:t>
             </a:r>
-            <a:endParaRPr lang="en-US" sz="750" dirty="0"/>
+            <a:endParaRPr lang="en-US" sz="1020" dirty="0"/>
           </a:p>
         </p:txBody>
       </p:sp>
@@ -12039,8 +12039,8 @@
         </p:nvSpPr>
         <p:spPr>
           <a:xfrm>
-            <a:off x="5907024" y="4288536"/>
-            <a:ext cx="320040" cy="0"/>
+            <a:off x="5980176" y="4306824"/>
+            <a:ext cx="292608" cy="0"/>
           </a:xfrm>
           <a:prstGeom prst="line">
             <a:avLst/>
@@ -12063,8 +12063,8 @@
         </p:nvSpPr>
         <p:spPr>
           <a:xfrm>
-            <a:off x="6291072" y="3822192"/>
-            <a:ext cx="2331720" cy="932688"/>
+            <a:off x="6345936" y="3657600"/>
+            <a:ext cx="2487168" cy="1298448"/>
           </a:xfrm>
           <a:prstGeom prst="rect">
             <a:avLst/>
@@ -12088,8 +12088,8 @@
         </p:nvSpPr>
         <p:spPr>
           <a:xfrm>
-            <a:off x="6291072" y="3822192"/>
-            <a:ext cx="384048" cy="932688"/>
+            <a:off x="6345936" y="3657600"/>
+            <a:ext cx="566928" cy="1298448"/>
           </a:xfrm>
           <a:prstGeom prst="rect">
             <a:avLst/>
@@ -12115,8 +12115,8 @@
         </p:nvSpPr>
         <p:spPr>
           <a:xfrm>
-            <a:off x="6391656" y="4160520"/>
-            <a:ext cx="182880" cy="128016"/>
+            <a:off x="6519672" y="4142232"/>
+            <a:ext cx="219456" cy="164592"/>
           </a:xfrm>
           <a:prstGeom prst="rect">
             <a:avLst/>
@@ -12132,7 +12132,7 @@
               <a:buNone/>
             </a:pPr>
             <a:r>
-              <a:rPr lang="en-US" sz="900" b="1" dirty="0">
+              <a:rPr lang="en-US" sz="1150" b="1" dirty="0">
                 <a:solidFill>
                   <a:srgbClr val="FFFFFF"/>
                 </a:solidFill>
@@ -12142,7 +12142,7 @@
               </a:rPr>
               <a:t>7</a:t>
             </a:r>
-            <a:endParaRPr lang="en-US" sz="900" dirty="0"/>
+            <a:endParaRPr lang="en-US" sz="1150" dirty="0"/>
           </a:p>
         </p:txBody>
       </p:sp>
@@ -12154,24 +12154,24 @@
         </p:nvSpPr>
         <p:spPr>
           <a:xfrm>
-            <a:off x="6793992" y="3986784"/>
-            <a:ext cx="1645920" cy="146304"/>
-          </a:xfrm>
-          <a:prstGeom prst="rect">
-            <a:avLst/>
-          </a:prstGeom>
-          <a:noFill/>
-          <a:ln/>
-        </p:spPr>
-        <p:txBody>
-          <a:bodyPr wrap="square" lIns="0" tIns="0" rIns="0" bIns="0" rtlCol="0" anchor="ctr"/>
-          <a:lstStyle/>
-          <a:p>
-            <a:pPr indent="0" marL="0">
-              <a:buNone/>
-            </a:pPr>
-            <a:r>
-              <a:rPr lang="en-US" sz="960" b="1" dirty="0">
+            <a:off x="7095744" y="3867912"/>
+            <a:ext cx="1554480" cy="201168"/>
+          </a:xfrm>
+          <a:prstGeom prst="rect">
+            <a:avLst/>
+          </a:prstGeom>
+          <a:noFill/>
+          <a:ln/>
+        </p:spPr>
+        <p:txBody>
+          <a:bodyPr wrap="square" lIns="0" tIns="0" rIns="0" bIns="0" rtlCol="0" anchor="ctr"/>
+          <a:lstStyle/>
+          <a:p>
+            <a:pPr indent="0" marL="0">
+              <a:buNone/>
+            </a:pPr>
+            <a:r>
+              <a:rPr lang="en-US" sz="1250" b="1" dirty="0">
                 <a:solidFill>
                   <a:srgbClr val="1F1A17"/>
                 </a:solidFill>
@@ -12181,7 +12181,7 @@
               </a:rPr>
               <a:t>考察</a:t>
             </a:r>
-            <a:endParaRPr lang="en-US" sz="960" dirty="0"/>
+            <a:endParaRPr lang="en-US" sz="1250" dirty="0"/>
           </a:p>
         </p:txBody>
       </p:sp>
@@ -12193,24 +12193,24 @@
         </p:nvSpPr>
         <p:spPr>
           <a:xfrm>
-            <a:off x="6793992" y="4242816"/>
-            <a:ext cx="1673352" cy="228600"/>
-          </a:xfrm>
-          <a:prstGeom prst="rect">
-            <a:avLst/>
-          </a:prstGeom>
-          <a:noFill/>
-          <a:ln/>
-        </p:spPr>
-        <p:txBody>
-          <a:bodyPr wrap="square" lIns="0" tIns="0" rIns="0" bIns="0" rtlCol="0" anchor="ctr"/>
-          <a:lstStyle/>
-          <a:p>
-            <a:pPr indent="0" marL="0">
-              <a:buNone/>
-            </a:pPr>
-            <a:r>
-              <a:rPr lang="en-US" sz="750" dirty="0">
+            <a:off x="7095744" y="4279392"/>
+            <a:ext cx="1554480" cy="310896"/>
+          </a:xfrm>
+          <a:prstGeom prst="rect">
+            <a:avLst/>
+          </a:prstGeom>
+          <a:noFill/>
+          <a:ln/>
+        </p:spPr>
+        <p:txBody>
+          <a:bodyPr wrap="square" lIns="0" tIns="0" rIns="0" bIns="0" rtlCol="0" anchor="ctr"/>
+          <a:lstStyle/>
+          <a:p>
+            <a:pPr indent="0" marL="0">
+              <a:buNone/>
+            </a:pPr>
+            <a:r>
+              <a:rPr lang="en-US" sz="1020" dirty="0">
                 <a:solidFill>
                   <a:srgbClr val="776C64"/>
                 </a:solidFill>
@@ -12220,7 +12220,7 @@
               </a:rPr>
               <a:t>失敗要因を整理</a:t>
             </a:r>
-            <a:endParaRPr lang="en-US" sz="750" dirty="0"/>
+            <a:endParaRPr lang="en-US" sz="1020" dirty="0"/>
           </a:p>
         </p:txBody>
       </p:sp>
@@ -12249,7 +12249,7 @@
               <a:buNone/>
             </a:pPr>
             <a:r>
-              <a:rPr lang="en-US" sz="1050" dirty="0">
+              <a:rPr lang="en-US" sz="1200" dirty="0">
                 <a:solidFill>
                   <a:srgbClr val="776C64"/>
                 </a:solidFill>
@@ -12259,7 +12259,7 @@
               </a:rPr>
               <a:t>Roboflowで作ったデータセットをYOLOに渡し、検出結果と誤り方を確認する</a:t>
             </a:r>
-            <a:endParaRPr lang="en-US" sz="1050" dirty="0"/>
+            <a:endParaRPr lang="en-US" sz="1200" dirty="0"/>
           </a:p>
         </p:txBody>
       </p:sp>
@@ -12368,24 +12368,24 @@
         </p:nvSpPr>
         <p:spPr>
           <a:xfrm>
-            <a:off x="530352" y="320040"/>
-            <a:ext cx="1325880" cy="182880"/>
-          </a:xfrm>
-          <a:prstGeom prst="rect">
-            <a:avLst/>
-          </a:prstGeom>
-          <a:noFill/>
-          <a:ln/>
-        </p:spPr>
-        <p:txBody>
-          <a:bodyPr wrap="square" lIns="0" tIns="0" rIns="0" bIns="0" rtlCol="0" anchor="ctr"/>
-          <a:lstStyle/>
-          <a:p>
-            <a:pPr indent="0" marL="0">
-              <a:buNone/>
-            </a:pPr>
-            <a:r>
-              <a:rPr lang="en-US" sz="750" b="1" dirty="0">
+            <a:off x="530352" y="292608"/>
+            <a:ext cx="1600200" cy="201168"/>
+          </a:xfrm>
+          <a:prstGeom prst="rect">
+            <a:avLst/>
+          </a:prstGeom>
+          <a:noFill/>
+          <a:ln/>
+        </p:spPr>
+        <p:txBody>
+          <a:bodyPr wrap="square" lIns="0" tIns="0" rIns="0" bIns="0" rtlCol="0" anchor="ctr"/>
+          <a:lstStyle/>
+          <a:p>
+            <a:pPr indent="0" marL="0">
+              <a:buNone/>
+            </a:pPr>
+            <a:r>
+              <a:rPr lang="en-US" sz="840" b="1" dirty="0">
                 <a:solidFill>
                   <a:srgbClr val="8E2335"/>
                 </a:solidFill>
@@ -12395,7 +12395,7 @@
               </a:rPr>
               <a:t>2章 手法</a:t>
             </a:r>
-            <a:endParaRPr lang="en-US" sz="750" dirty="0"/>
+            <a:endParaRPr lang="en-US" sz="840" dirty="0"/>
           </a:p>
         </p:txBody>
       </p:sp>
@@ -12407,8 +12407,8 @@
         </p:nvSpPr>
         <p:spPr>
           <a:xfrm>
-            <a:off x="530352" y="566928"/>
-            <a:ext cx="7406640" cy="384048"/>
+            <a:off x="530352" y="557784"/>
+            <a:ext cx="7406640" cy="420624"/>
           </a:xfrm>
           <a:prstGeom prst="rect">
             <a:avLst/>
@@ -12486,7 +12486,7 @@
               <a:buNone/>
             </a:pPr>
             <a:r>
-              <a:rPr lang="en-US" sz="750" b="1" dirty="0">
+              <a:rPr lang="en-US" sz="850" b="1" dirty="0">
                 <a:solidFill>
                   <a:srgbClr val="776C64"/>
                 </a:solidFill>
@@ -12496,13 +12496,52 @@
               </a:rPr>
               <a:t>08</a:t>
             </a:r>
-            <a:endParaRPr lang="en-US" sz="750" dirty="0"/>
+            <a:endParaRPr lang="en-US" sz="850" dirty="0"/>
+          </a:p>
+        </p:txBody>
+      </p:sp>
+      <p:sp>
+        <p:nvSpPr>
+          <p:cNvPr id="7" name="Text 5"/>
+          <p:cNvSpPr/>
+          <p:nvPr/>
+        </p:nvSpPr>
+        <p:spPr>
+          <a:xfrm>
+            <a:off x="713232" y="1316736"/>
+            <a:ext cx="1920240" cy="201168"/>
+          </a:xfrm>
+          <a:prstGeom prst="rect">
+            <a:avLst/>
+          </a:prstGeom>
+          <a:noFill/>
+          <a:ln/>
+        </p:spPr>
+        <p:txBody>
+          <a:bodyPr wrap="square" lIns="0" tIns="0" rIns="0" bIns="0" rtlCol="0" anchor="ctr"/>
+          <a:lstStyle/>
+          <a:p>
+            <a:pPr indent="0" marL="0">
+              <a:buNone/>
+            </a:pPr>
+            <a:r>
+              <a:rPr lang="en-US" sz="1450" b="1" dirty="0">
+                <a:solidFill>
+                  <a:srgbClr val="1F1A17"/>
+                </a:solidFill>
+                <a:latin typeface="Hiragino Sans" pitchFamily="34" charset="0"/>
+                <a:ea typeface="Hiragino Sans" pitchFamily="34" charset="-122"/>
+                <a:cs typeface="Hiragino Sans" pitchFamily="34" charset="-120"/>
+              </a:rPr>
+              <a:t>1. データ分布</a:t>
+            </a:r>
+            <a:endParaRPr lang="en-US" sz="1450" dirty="0"/>
           </a:p>
         </p:txBody>
       </p:sp>
       <p:pic>
         <p:nvPicPr>
-          <p:cNvPr id="7" name="Image 0" descr="/Users/abesouichirou/Documents/utokyo_lecture/programming1/detect_results/train/labels.jpg">    </p:cNvPr>
+          <p:cNvPr id="8" name="Image 0" descr="/Users/abesouichirou/Documents/utokyo_lecture/programming1/detect_results/train/labels.jpg">    </p:cNvPr>
           <p:cNvPicPr>
             <a:picLocks noChangeAspect="1"/>
           </p:cNvPicPr>
@@ -12510,13 +12549,14 @@
         </p:nvPicPr>
         <p:blipFill>
           <a:blip r:embed="rId1"/>
-          <a:srcRect l="0" r="0" t="0" b="0"/>
-          <a:stretch/>
+          <a:stretch>
+            <a:fillRect/>
+          </a:stretch>
         </p:blipFill>
         <p:spPr>
           <a:xfrm>
-            <a:off x="685800" y="1417320"/>
-            <a:ext cx="3108960" cy="3108960"/>
+            <a:off x="713232" y="1719072"/>
+            <a:ext cx="3063240" cy="3063240"/>
           </a:xfrm>
           <a:prstGeom prst="rect">
             <a:avLst/>
@@ -12525,30 +12565,69 @@
       </p:pic>
       <p:sp>
         <p:nvSpPr>
-          <p:cNvPr id="8" name="Text 5"/>
-          <p:cNvSpPr/>
-          <p:nvPr/>
-        </p:nvSpPr>
-        <p:spPr>
-          <a:xfrm>
-            <a:off x="4160520" y="1481328"/>
-            <a:ext cx="1828800" cy="219456"/>
-          </a:xfrm>
-          <a:prstGeom prst="rect">
-            <a:avLst/>
-          </a:prstGeom>
-          <a:noFill/>
-          <a:ln/>
-        </p:spPr>
-        <p:txBody>
-          <a:bodyPr wrap="square" lIns="0" tIns="0" rIns="0" bIns="0" rtlCol="0" anchor="ctr"/>
-          <a:lstStyle/>
-          <a:p>
-            <a:pPr indent="0" marL="0">
-              <a:buNone/>
-            </a:pPr>
-            <a:r>
-              <a:rPr lang="en-US" sz="1600" b="1" dirty="0">
+          <p:cNvPr id="9" name="Text 6"/>
+          <p:cNvSpPr/>
+          <p:nvPr/>
+        </p:nvSpPr>
+        <p:spPr>
+          <a:xfrm>
+            <a:off x="731520" y="5010912"/>
+            <a:ext cx="2880360" cy="201168"/>
+          </a:xfrm>
+          <a:prstGeom prst="rect">
+            <a:avLst/>
+          </a:prstGeom>
+          <a:noFill/>
+          <a:ln/>
+        </p:spPr>
+        <p:txBody>
+          <a:bodyPr wrap="square" lIns="0" tIns="0" rIns="0" bIns="0" rtlCol="0" anchor="ctr"/>
+          <a:lstStyle/>
+          <a:p>
+            <a:pPr indent="0" marL="0">
+              <a:buNone/>
+            </a:pPr>
+            <a:r>
+              <a:rPr lang="en-US" sz="1060" dirty="0">
+                <a:solidFill>
+                  <a:srgbClr val="776C64"/>
+                </a:solidFill>
+                <a:latin typeface="Hiragino Sans" pitchFamily="34" charset="0"/>
+                <a:ea typeface="Hiragino Sans" pitchFamily="34" charset="-122"/>
+                <a:cs typeface="Hiragino Sans" pitchFamily="34" charset="-120"/>
+              </a:rPr>
+              <a:t>クラス数とBBoxの位置・大きさを確認</a:t>
+            </a:r>
+            <a:endParaRPr lang="en-US" sz="1060" dirty="0"/>
+          </a:p>
+        </p:txBody>
+      </p:sp>
+      <p:sp>
+        <p:nvSpPr>
+          <p:cNvPr id="10" name="Text 7"/>
+          <p:cNvSpPr/>
+          <p:nvPr/>
+        </p:nvSpPr>
+        <p:spPr>
+          <a:xfrm>
+            <a:off x="4160520" y="1316736"/>
+            <a:ext cx="1920240" cy="201168"/>
+          </a:xfrm>
+          <a:prstGeom prst="rect">
+            <a:avLst/>
+          </a:prstGeom>
+          <a:noFill/>
+          <a:ln/>
+        </p:spPr>
+        <p:txBody>
+          <a:bodyPr wrap="square" lIns="0" tIns="0" rIns="0" bIns="0" rtlCol="0" anchor="ctr"/>
+          <a:lstStyle/>
+          <a:p>
+            <a:pPr indent="0" marL="0">
+              <a:buNone/>
+            </a:pPr>
+            <a:r>
+              <a:rPr lang="en-US" sz="1450" b="1" dirty="0">
                 <a:solidFill>
                   <a:srgbClr val="1F1A17"/>
                 </a:solidFill>
@@ -12556,22 +12635,22 @@
                 <a:ea typeface="Hiragino Sans" pitchFamily="34" charset="-122"/>
                 <a:cs typeface="Hiragino Sans" pitchFamily="34" charset="-120"/>
               </a:rPr>
-              <a:t>対象クラス</a:t>
-            </a:r>
-            <a:endParaRPr lang="en-US" sz="1600" dirty="0"/>
-          </a:p>
-        </p:txBody>
-      </p:sp>
-      <p:sp>
-        <p:nvSpPr>
-          <p:cNvPr id="9" name="Shape 6"/>
-          <p:cNvSpPr/>
-          <p:nvPr/>
-        </p:nvSpPr>
-        <p:spPr>
-          <a:xfrm>
-            <a:off x="4187952" y="1938528"/>
-            <a:ext cx="1234440" cy="292608"/>
+              <a:t>2. 対象クラス</a:t>
+            </a:r>
+            <a:endParaRPr lang="en-US" sz="1450" dirty="0"/>
+          </a:p>
+        </p:txBody>
+      </p:sp>
+      <p:sp>
+        <p:nvSpPr>
+          <p:cNvPr id="11" name="Shape 8"/>
+          <p:cNvSpPr/>
+          <p:nvPr/>
+        </p:nvSpPr>
+        <p:spPr>
+          <a:xfrm>
+            <a:off x="4160520" y="1810512"/>
+            <a:ext cx="1371600" cy="365760"/>
           </a:xfrm>
           <a:prstGeom prst="rect">
             <a:avLst/>
@@ -12591,14 +12670,14 @@
       </p:sp>
       <p:sp>
         <p:nvSpPr>
-          <p:cNvPr id="10" name="Text 7"/>
-          <p:cNvSpPr/>
-          <p:nvPr/>
-        </p:nvSpPr>
-        <p:spPr>
-          <a:xfrm>
-            <a:off x="4270248" y="2007108"/>
-            <a:ext cx="1069848" cy="73152"/>
+          <p:cNvPr id="12" name="Text 9"/>
+          <p:cNvSpPr/>
+          <p:nvPr/>
+        </p:nvSpPr>
+        <p:spPr>
+          <a:xfrm>
+            <a:off x="4242816" y="1906524"/>
+            <a:ext cx="1207008" cy="91440"/>
           </a:xfrm>
           <a:prstGeom prst="rect">
             <a:avLst/>
@@ -12614,7 +12693,7 @@
               <a:buNone/>
             </a:pPr>
             <a:r>
-              <a:rPr lang="en-US" sz="730" b="1" dirty="0">
+              <a:rPr lang="en-US" sz="820" b="1" dirty="0">
                 <a:solidFill>
                   <a:srgbClr val="FFFFFF"/>
                 </a:solidFill>
@@ -12624,20 +12703,20 @@
               </a:rPr>
               <a:t>beef</a:t>
             </a:r>
-            <a:endParaRPr lang="en-US" sz="730" dirty="0"/>
-          </a:p>
-        </p:txBody>
-      </p:sp>
-      <p:sp>
-        <p:nvSpPr>
-          <p:cNvPr id="11" name="Shape 8"/>
-          <p:cNvSpPr/>
-          <p:nvPr/>
-        </p:nvSpPr>
-        <p:spPr>
-          <a:xfrm>
-            <a:off x="5742432" y="1938528"/>
-            <a:ext cx="1234440" cy="292608"/>
+            <a:endParaRPr lang="en-US" sz="820" dirty="0"/>
+          </a:p>
+        </p:txBody>
+      </p:sp>
+      <p:sp>
+        <p:nvSpPr>
+          <p:cNvPr id="13" name="Shape 10"/>
+          <p:cNvSpPr/>
+          <p:nvPr/>
+        </p:nvSpPr>
+        <p:spPr>
+          <a:xfrm>
+            <a:off x="5824728" y="1810512"/>
+            <a:ext cx="1371600" cy="365760"/>
           </a:xfrm>
           <a:prstGeom prst="rect">
             <a:avLst/>
@@ -12657,14 +12736,14 @@
       </p:sp>
       <p:sp>
         <p:nvSpPr>
-          <p:cNvPr id="12" name="Text 9"/>
-          <p:cNvSpPr/>
-          <p:nvPr/>
-        </p:nvSpPr>
-        <p:spPr>
-          <a:xfrm>
-            <a:off x="5824728" y="2007108"/>
-            <a:ext cx="1069848" cy="73152"/>
+          <p:cNvPr id="14" name="Text 11"/>
+          <p:cNvSpPr/>
+          <p:nvPr/>
+        </p:nvSpPr>
+        <p:spPr>
+          <a:xfrm>
+            <a:off x="5907024" y="1906524"/>
+            <a:ext cx="1207008" cy="91440"/>
           </a:xfrm>
           <a:prstGeom prst="rect">
             <a:avLst/>
@@ -12680,7 +12759,7 @@
               <a:buNone/>
             </a:pPr>
             <a:r>
-              <a:rPr lang="en-US" sz="730" b="1" dirty="0">
+              <a:rPr lang="en-US" sz="820" b="1" dirty="0">
                 <a:solidFill>
                   <a:srgbClr val="FFFFFF"/>
                 </a:solidFill>
@@ -12690,20 +12769,20 @@
               </a:rPr>
               <a:t>chicken</a:t>
             </a:r>
-            <a:endParaRPr lang="en-US" sz="730" dirty="0"/>
-          </a:p>
-        </p:txBody>
-      </p:sp>
-      <p:sp>
-        <p:nvSpPr>
-          <p:cNvPr id="13" name="Shape 10"/>
-          <p:cNvSpPr/>
-          <p:nvPr/>
-        </p:nvSpPr>
-        <p:spPr>
-          <a:xfrm>
-            <a:off x="4187952" y="2505456"/>
-            <a:ext cx="1234440" cy="292608"/>
+            <a:endParaRPr lang="en-US" sz="820" dirty="0"/>
+          </a:p>
+        </p:txBody>
+      </p:sp>
+      <p:sp>
+        <p:nvSpPr>
+          <p:cNvPr id="15" name="Shape 12"/>
+          <p:cNvSpPr/>
+          <p:nvPr/>
+        </p:nvSpPr>
+        <p:spPr>
+          <a:xfrm>
+            <a:off x="4160520" y="2468880"/>
+            <a:ext cx="1371600" cy="365760"/>
           </a:xfrm>
           <a:prstGeom prst="rect">
             <a:avLst/>
@@ -12723,14 +12802,14 @@
       </p:sp>
       <p:sp>
         <p:nvSpPr>
-          <p:cNvPr id="14" name="Text 11"/>
-          <p:cNvSpPr/>
-          <p:nvPr/>
-        </p:nvSpPr>
-        <p:spPr>
-          <a:xfrm>
-            <a:off x="4270248" y="2574036"/>
-            <a:ext cx="1069848" cy="73152"/>
+          <p:cNvPr id="16" name="Text 13"/>
+          <p:cNvSpPr/>
+          <p:nvPr/>
+        </p:nvSpPr>
+        <p:spPr>
+          <a:xfrm>
+            <a:off x="4242816" y="2564892"/>
+            <a:ext cx="1207008" cy="91440"/>
           </a:xfrm>
           <a:prstGeom prst="rect">
             <a:avLst/>
@@ -12746,7 +12825,7 @@
               <a:buNone/>
             </a:pPr>
             <a:r>
-              <a:rPr lang="en-US" sz="730" b="1" dirty="0">
+              <a:rPr lang="en-US" sz="820" b="1" dirty="0">
                 <a:solidFill>
                   <a:srgbClr val="FFFFFF"/>
                 </a:solidFill>
@@ -12756,20 +12835,20 @@
               </a:rPr>
               <a:t>lamb</a:t>
             </a:r>
-            <a:endParaRPr lang="en-US" sz="730" dirty="0"/>
-          </a:p>
-        </p:txBody>
-      </p:sp>
-      <p:sp>
-        <p:nvSpPr>
-          <p:cNvPr id="15" name="Shape 12"/>
-          <p:cNvSpPr/>
-          <p:nvPr/>
-        </p:nvSpPr>
-        <p:spPr>
-          <a:xfrm>
-            <a:off x="5742432" y="2505456"/>
-            <a:ext cx="1234440" cy="292608"/>
+            <a:endParaRPr lang="en-US" sz="820" dirty="0"/>
+          </a:p>
+        </p:txBody>
+      </p:sp>
+      <p:sp>
+        <p:nvSpPr>
+          <p:cNvPr id="17" name="Shape 14"/>
+          <p:cNvSpPr/>
+          <p:nvPr/>
+        </p:nvSpPr>
+        <p:spPr>
+          <a:xfrm>
+            <a:off x="5824728" y="2468880"/>
+            <a:ext cx="1371600" cy="365760"/>
           </a:xfrm>
           <a:prstGeom prst="rect">
             <a:avLst/>
@@ -12789,14 +12868,14 @@
       </p:sp>
       <p:sp>
         <p:nvSpPr>
-          <p:cNvPr id="16" name="Text 13"/>
-          <p:cNvSpPr/>
-          <p:nvPr/>
-        </p:nvSpPr>
-        <p:spPr>
-          <a:xfrm>
-            <a:off x="5824728" y="2574036"/>
-            <a:ext cx="1069848" cy="73152"/>
+          <p:cNvPr id="18" name="Text 15"/>
+          <p:cNvSpPr/>
+          <p:nvPr/>
+        </p:nvSpPr>
+        <p:spPr>
+          <a:xfrm>
+            <a:off x="5907024" y="2564892"/>
+            <a:ext cx="1207008" cy="91440"/>
           </a:xfrm>
           <a:prstGeom prst="rect">
             <a:avLst/>
@@ -12812,7 +12891,7 @@
               <a:buNone/>
             </a:pPr>
             <a:r>
-              <a:rPr lang="en-US" sz="730" b="1" dirty="0">
+              <a:rPr lang="en-US" sz="820" b="1" dirty="0">
                 <a:solidFill>
                   <a:srgbClr val="FFFFFF"/>
                 </a:solidFill>
@@ -12822,33 +12901,38 @@
               </a:rPr>
               <a:t>pork</a:t>
             </a:r>
-            <a:endParaRPr lang="en-US" sz="730" dirty="0"/>
-          </a:p>
-        </p:txBody>
-      </p:sp>
-      <p:sp>
-        <p:nvSpPr>
-          <p:cNvPr id="17" name="Text 14"/>
-          <p:cNvSpPr/>
-          <p:nvPr/>
-        </p:nvSpPr>
-        <p:spPr>
-          <a:xfrm>
-            <a:off x="4224528" y="3182112"/>
-            <a:ext cx="3337560" cy="2011680"/>
-          </a:xfrm>
-          <a:prstGeom prst="rect">
-            <a:avLst/>
-          </a:prstGeom>
-          <a:noFill/>
-          <a:ln/>
-        </p:spPr>
-        <p:txBody>
-          <a:bodyPr wrap="square" lIns="635" tIns="635" rIns="635" bIns="635" rtlCol="0" anchor="t"/>
-          <a:lstStyle/>
-          <a:p>
-            <a:r>
-              <a:rPr lang="en-US" sz="1150" dirty="0">
+            <a:endParaRPr lang="en-US" sz="820" dirty="0"/>
+          </a:p>
+        </p:txBody>
+      </p:sp>
+      <p:sp>
+        <p:nvSpPr>
+          <p:cNvPr id="19" name="Text 16"/>
+          <p:cNvSpPr/>
+          <p:nvPr/>
+        </p:nvSpPr>
+        <p:spPr>
+          <a:xfrm>
+            <a:off x="4224528" y="3246120"/>
+            <a:ext cx="3337560" cy="1097280"/>
+          </a:xfrm>
+          <a:prstGeom prst="rect">
+            <a:avLst/>
+          </a:prstGeom>
+          <a:noFill/>
+          <a:ln/>
+        </p:spPr>
+        <p:txBody>
+          <a:bodyPr wrap="square" lIns="0" tIns="0" rIns="0" bIns="0" rtlCol="0" anchor="ctr">
+            <a:normAutofit/>
+          </a:bodyPr>
+          <a:lstStyle/>
+          <a:p>
+            <a:pPr indent="0" marL="0">
+              <a:buNone/>
+            </a:pPr>
+            <a:r>
+              <a:rPr lang="en-US" sz="1250" dirty="0">
                 <a:solidFill>
                   <a:srgbClr val="1F1A17"/>
                 </a:solidFill>
@@ -12858,11 +12942,14 @@
               </a:rPr>
               <a:t>画像中の肉だけをバウンディングボックスで指定</a:t>
             </a:r>
-            <a:endParaRPr lang="en-US" sz="1150" dirty="0"/>
-          </a:p>
-          <a:p>
-            <a:r>
-              <a:rPr lang="en-US" sz="1150" dirty="0">
+            <a:endParaRPr lang="en-US" sz="1250" dirty="0"/>
+          </a:p>
+          <a:p>
+            <a:pPr indent="0" marL="0">
+              <a:buNone/>
+            </a:pPr>
+            <a:r>
+              <a:rPr lang="en-US" sz="1250" dirty="0">
                 <a:solidFill>
                   <a:srgbClr val="1F1A17"/>
                 </a:solidFill>
@@ -12872,11 +12959,14 @@
               </a:rPr>
               <a:t>画像全体ではなく、位置と種類を同時に学習</a:t>
             </a:r>
-            <a:endParaRPr lang="en-US" sz="1150" dirty="0"/>
-          </a:p>
-          <a:p>
-            <a:r>
-              <a:rPr lang="en-US" sz="1150" dirty="0">
+            <a:endParaRPr lang="en-US" sz="1250" dirty="0"/>
+          </a:p>
+          <a:p>
+            <a:pPr indent="0" marL="0">
+              <a:buNone/>
+            </a:pPr>
+            <a:r>
+              <a:rPr lang="en-US" sz="1250" dirty="0">
                 <a:solidFill>
                   <a:srgbClr val="1F1A17"/>
                 </a:solidFill>
@@ -12886,11 +12976,14 @@
               </a:rPr>
               <a:t>train / validation / test に分割して評価</a:t>
             </a:r>
-            <a:endParaRPr lang="en-US" sz="1150" dirty="0"/>
-          </a:p>
-          <a:p>
-            <a:r>
-              <a:rPr lang="en-US" sz="1150" dirty="0">
+            <a:endParaRPr lang="en-US" sz="1250" dirty="0"/>
+          </a:p>
+          <a:p>
+            <a:pPr indent="0" marL="0">
+              <a:buNone/>
+            </a:pPr>
+            <a:r>
+              <a:rPr lang="en-US" sz="1250" dirty="0">
                 <a:solidFill>
                   <a:srgbClr val="1F1A17"/>
                 </a:solidFill>
@@ -12900,13 +12993,114 @@
               </a:rPr>
               <a:t>Roboflowでデータセットのバージョンを管理</a:t>
             </a:r>
-            <a:endParaRPr lang="en-US" sz="1150" dirty="0"/>
+            <a:endParaRPr lang="en-US" sz="1250" dirty="0"/>
+          </a:p>
+        </p:txBody>
+      </p:sp>
+      <p:sp>
+        <p:nvSpPr>
+          <p:cNvPr id="20" name="Shape 17"/>
+          <p:cNvSpPr/>
+          <p:nvPr/>
+        </p:nvSpPr>
+        <p:spPr>
+          <a:xfrm>
+            <a:off x="4160520" y="4782312"/>
+            <a:ext cx="3154680" cy="0"/>
+          </a:xfrm>
+          <a:prstGeom prst="line">
+            <a:avLst/>
+          </a:prstGeom>
+          <a:noFill/>
+          <a:ln w="10160">
+            <a:solidFill>
+              <a:srgbClr val="E4DAD2"/>
+            </a:solidFill>
+            <a:prstDash val="solid"/>
+          </a:ln>
+        </p:spPr>
+      </p:sp>
+      <p:sp>
+        <p:nvSpPr>
+          <p:cNvPr id="21" name="Text 18"/>
+          <p:cNvSpPr/>
+          <p:nvPr/>
+        </p:nvSpPr>
+        <p:spPr>
+          <a:xfrm>
+            <a:off x="4187952" y="5010912"/>
+            <a:ext cx="3246120" cy="201168"/>
+          </a:xfrm>
+          <a:prstGeom prst="rect">
+            <a:avLst/>
+          </a:prstGeom>
+          <a:noFill/>
+          <a:ln/>
+        </p:spPr>
+        <p:txBody>
+          <a:bodyPr wrap="square" lIns="0" tIns="0" rIns="0" bIns="0" rtlCol="0" anchor="ctr"/>
+          <a:lstStyle/>
+          <a:p>
+            <a:pPr indent="0" marL="0">
+              <a:buNone/>
+            </a:pPr>
+            <a:r>
+              <a:rPr lang="en-US" sz="1060" dirty="0">
+                <a:solidFill>
+                  <a:srgbClr val="776C64"/>
+                </a:solidFill>
+                <a:latin typeface="Hiragino Sans" pitchFamily="34" charset="0"/>
+                <a:ea typeface="Hiragino Sans" pitchFamily="34" charset="-122"/>
+                <a:cs typeface="Hiragino Sans" pitchFamily="34" charset="-120"/>
+              </a:rPr>
+              <a:t>位置と種類を同時に学習できる形へ変換する</a:t>
+            </a:r>
+            <a:endParaRPr lang="en-US" sz="1060" dirty="0"/>
+          </a:p>
+        </p:txBody>
+      </p:sp>
+      <p:sp>
+        <p:nvSpPr>
+          <p:cNvPr id="22" name="Text 19"/>
+          <p:cNvSpPr/>
+          <p:nvPr/>
+        </p:nvSpPr>
+        <p:spPr>
+          <a:xfrm>
+            <a:off x="8065008" y="1316736"/>
+            <a:ext cx="2011680" cy="201168"/>
+          </a:xfrm>
+          <a:prstGeom prst="rect">
+            <a:avLst/>
+          </a:prstGeom>
+          <a:noFill/>
+          <a:ln/>
+        </p:spPr>
+        <p:txBody>
+          <a:bodyPr wrap="square" lIns="0" tIns="0" rIns="0" bIns="0" rtlCol="0" anchor="ctr"/>
+          <a:lstStyle/>
+          <a:p>
+            <a:pPr indent="0" marL="0">
+              <a:buNone/>
+            </a:pPr>
+            <a:r>
+              <a:rPr lang="en-US" sz="1450" b="1" dirty="0">
+                <a:solidFill>
+                  <a:srgbClr val="1F1A17"/>
+                </a:solidFill>
+                <a:latin typeface="Hiragino Sans" pitchFamily="34" charset="0"/>
+                <a:ea typeface="Hiragino Sans" pitchFamily="34" charset="-122"/>
+                <a:cs typeface="Hiragino Sans" pitchFamily="34" charset="-120"/>
+              </a:rPr>
+              <a:t>3. Annotation</a:t>
+            </a:r>
+            <a:endParaRPr lang="en-US" sz="1450" dirty="0"/>
           </a:p>
         </p:txBody>
       </p:sp>
       <p:pic>
         <p:nvPicPr>
-          <p:cNvPr id="18" name="Image 1" descr="/Users/abesouichirou/Documents/utokyo_lecture/programming1/detect_results/train/val_batch0_pred.jpg">    </p:cNvPr>
+          <p:cNvPr id="23" name="Image 1" descr="/Users/abesouichirou/Documents/utokyo_lecture/programming1/detect_results/train/val_batch0_pred.jpg">    </p:cNvPr>
           <p:cNvPicPr>
             <a:picLocks noChangeAspect="1"/>
           </p:cNvPicPr>
@@ -12914,13 +13108,13 @@
         </p:nvPicPr>
         <p:blipFill>
           <a:blip r:embed="rId2"/>
-          <a:srcRect l="32000" r="22000" t="20000" b="34000"/>
+          <a:srcRect l="32000" r="16096" t="20000" b="34000"/>
           <a:stretch/>
         </p:blipFill>
         <p:spPr>
           <a:xfrm>
-            <a:off x="8092440" y="1417320"/>
-            <a:ext cx="3401568" cy="3401568"/>
+            <a:off x="8065008" y="1719072"/>
+            <a:ext cx="3456432" cy="3063240"/>
           </a:xfrm>
           <a:prstGeom prst="rect">
             <a:avLst/>
@@ -12929,14 +13123,14 @@
       </p:pic>
       <p:sp>
         <p:nvSpPr>
-          <p:cNvPr id="19" name="Shape 15"/>
-          <p:cNvSpPr/>
-          <p:nvPr/>
-        </p:nvSpPr>
-        <p:spPr>
-          <a:xfrm>
-            <a:off x="8092440" y="5166360"/>
-            <a:ext cx="1417320" cy="219456"/>
+          <p:cNvPr id="24" name="Shape 20"/>
+          <p:cNvSpPr/>
+          <p:nvPr/>
+        </p:nvSpPr>
+        <p:spPr>
+          <a:xfrm>
+            <a:off x="8065008" y="5001768"/>
+            <a:ext cx="1280160" cy="347472"/>
           </a:xfrm>
           <a:prstGeom prst="rect">
             <a:avLst/>
@@ -12956,14 +13150,14 @@
       </p:sp>
       <p:sp>
         <p:nvSpPr>
-          <p:cNvPr id="20" name="Text 16"/>
-          <p:cNvSpPr/>
-          <p:nvPr/>
-        </p:nvSpPr>
-        <p:spPr>
-          <a:xfrm>
-            <a:off x="8183880" y="5202936"/>
-            <a:ext cx="1234440" cy="109728"/>
+          <p:cNvPr id="25" name="Text 21"/>
+          <p:cNvSpPr/>
+          <p:nvPr/>
+        </p:nvSpPr>
+        <p:spPr>
+          <a:xfrm>
+            <a:off x="8339328" y="5093208"/>
+            <a:ext cx="731520" cy="100584"/>
           </a:xfrm>
           <a:prstGeom prst="rect">
             <a:avLst/>
@@ -12979,7 +13173,7 @@
               <a:buNone/>
             </a:pPr>
             <a:r>
-              <a:rPr lang="en-US" sz="660" b="1" dirty="0">
+              <a:rPr lang="en-US" sz="860" b="1" dirty="0">
                 <a:solidFill>
                   <a:srgbClr val="FFFFFF"/>
                 </a:solidFill>
@@ -12987,38 +13181,38 @@
                 <a:ea typeface="Hiragino Sans" pitchFamily="34" charset="-122"/>
                 <a:cs typeface="Hiragino Sans" pitchFamily="34" charset="-120"/>
               </a:rPr>
-              <a:t>Annotation</a:t>
-            </a:r>
-            <a:endParaRPr lang="en-US" sz="660" dirty="0"/>
-          </a:p>
-        </p:txBody>
-      </p:sp>
-      <p:sp>
-        <p:nvSpPr>
-          <p:cNvPr id="21" name="Text 17"/>
-          <p:cNvSpPr/>
-          <p:nvPr/>
-        </p:nvSpPr>
-        <p:spPr>
-          <a:xfrm>
-            <a:off x="9692640" y="5202936"/>
-            <a:ext cx="1737360" cy="137160"/>
-          </a:xfrm>
-          <a:prstGeom prst="rect">
-            <a:avLst/>
-          </a:prstGeom>
-          <a:noFill/>
-          <a:ln/>
-        </p:spPr>
-        <p:txBody>
-          <a:bodyPr wrap="square" lIns="0" tIns="0" rIns="0" bIns="0" rtlCol="0" anchor="ctr"/>
-          <a:lstStyle/>
-          <a:p>
-            <a:pPr indent="0" marL="0">
-              <a:buNone/>
-            </a:pPr>
-            <a:r>
-              <a:rPr lang="en-US" sz="880" dirty="0">
+              <a:t>BBox</a:t>
+            </a:r>
+            <a:endParaRPr lang="en-US" sz="860" dirty="0"/>
+          </a:p>
+        </p:txBody>
+      </p:sp>
+      <p:sp>
+        <p:nvSpPr>
+          <p:cNvPr id="26" name="Text 22"/>
+          <p:cNvSpPr/>
+          <p:nvPr/>
+        </p:nvSpPr>
+        <p:spPr>
+          <a:xfrm>
+            <a:off x="9528048" y="5047488"/>
+            <a:ext cx="1828800" cy="201168"/>
+          </a:xfrm>
+          <a:prstGeom prst="rect">
+            <a:avLst/>
+          </a:prstGeom>
+          <a:noFill/>
+          <a:ln/>
+        </p:spPr>
+        <p:txBody>
+          <a:bodyPr wrap="square" lIns="0" tIns="0" rIns="0" bIns="0" rtlCol="0" anchor="ctr"/>
+          <a:lstStyle/>
+          <a:p>
+            <a:pPr indent="0" marL="0">
+              <a:buNone/>
+            </a:pPr>
+            <a:r>
+              <a:rPr lang="en-US" sz="1060" dirty="0">
                 <a:solidFill>
                   <a:srgbClr val="776C64"/>
                 </a:solidFill>
@@ -13026,9 +13220,9 @@
                 <a:ea typeface="Hiragino Sans" pitchFamily="34" charset="-122"/>
                 <a:cs typeface="Hiragino Sans" pitchFamily="34" charset="-120"/>
               </a:rPr>
-              <a:t>BBoxがYOLOの教師信号になる</a:t>
-            </a:r>
-            <a:endParaRPr lang="en-US" sz="880" dirty="0"/>
+              <a:t>YOLOの教師信号として使う</a:t>
+            </a:r>
+            <a:endParaRPr lang="en-US" sz="1060" dirty="0"/>
           </a:p>
         </p:txBody>
       </p:sp>
@@ -13137,24 +13331,24 @@
         </p:nvSpPr>
         <p:spPr>
           <a:xfrm>
-            <a:off x="530352" y="320040"/>
-            <a:ext cx="1325880" cy="182880"/>
-          </a:xfrm>
-          <a:prstGeom prst="rect">
-            <a:avLst/>
-          </a:prstGeom>
-          <a:noFill/>
-          <a:ln/>
-        </p:spPr>
-        <p:txBody>
-          <a:bodyPr wrap="square" lIns="0" tIns="0" rIns="0" bIns="0" rtlCol="0" anchor="ctr"/>
-          <a:lstStyle/>
-          <a:p>
-            <a:pPr indent="0" marL="0">
-              <a:buNone/>
-            </a:pPr>
-            <a:r>
-              <a:rPr lang="en-US" sz="750" b="1" dirty="0">
+            <a:off x="530352" y="292608"/>
+            <a:ext cx="1600200" cy="201168"/>
+          </a:xfrm>
+          <a:prstGeom prst="rect">
+            <a:avLst/>
+          </a:prstGeom>
+          <a:noFill/>
+          <a:ln/>
+        </p:spPr>
+        <p:txBody>
+          <a:bodyPr wrap="square" lIns="0" tIns="0" rIns="0" bIns="0" rtlCol="0" anchor="ctr"/>
+          <a:lstStyle/>
+          <a:p>
+            <a:pPr indent="0" marL="0">
+              <a:buNone/>
+            </a:pPr>
+            <a:r>
+              <a:rPr lang="en-US" sz="840" b="1" dirty="0">
                 <a:solidFill>
                   <a:srgbClr val="8E2335"/>
                 </a:solidFill>
@@ -13164,7 +13358,7 @@
               </a:rPr>
               <a:t>2章 手法</a:t>
             </a:r>
-            <a:endParaRPr lang="en-US" sz="750" dirty="0"/>
+            <a:endParaRPr lang="en-US" sz="840" dirty="0"/>
           </a:p>
         </p:txBody>
       </p:sp>
@@ -13176,8 +13370,8 @@
         </p:nvSpPr>
         <p:spPr>
           <a:xfrm>
-            <a:off x="530352" y="566928"/>
-            <a:ext cx="7406640" cy="384048"/>
+            <a:off x="530352" y="557784"/>
+            <a:ext cx="7406640" cy="420624"/>
           </a:xfrm>
           <a:prstGeom prst="rect">
             <a:avLst/>
@@ -13255,7 +13449,7 @@
               <a:buNone/>
             </a:pPr>
             <a:r>
-              <a:rPr lang="en-US" sz="750" b="1" dirty="0">
+              <a:rPr lang="en-US" sz="850" b="1" dirty="0">
                 <a:solidFill>
                   <a:srgbClr val="776C64"/>
                 </a:solidFill>
@@ -13265,7 +13459,7 @@
               </a:rPr>
               <a:t>09</a:t>
             </a:r>
-            <a:endParaRPr lang="en-US" sz="750" dirty="0"/>
+            <a:endParaRPr lang="en-US" sz="850" dirty="0"/>
           </a:p>
         </p:txBody>
       </p:sp>
@@ -13278,23 +13472,23 @@
         <p:spPr>
           <a:xfrm>
             <a:off x="713232" y="1353312"/>
-            <a:ext cx="8138160" cy="292608"/>
-          </a:xfrm>
-          <a:prstGeom prst="rect">
-            <a:avLst/>
-          </a:prstGeom>
-          <a:noFill/>
-          <a:ln/>
-        </p:spPr>
-        <p:txBody>
-          <a:bodyPr wrap="square" lIns="0" tIns="0" rIns="0" bIns="0" rtlCol="0" anchor="ctr"/>
-          <a:lstStyle/>
-          <a:p>
-            <a:pPr indent="0" marL="0">
-              <a:buNone/>
-            </a:pPr>
-            <a:r>
-              <a:rPr lang="en-US" sz="2000" b="1" dirty="0">
+            <a:ext cx="5715000" cy="292608"/>
+          </a:xfrm>
+          <a:prstGeom prst="rect">
+            <a:avLst/>
+          </a:prstGeom>
+          <a:noFill/>
+          <a:ln/>
+        </p:spPr>
+        <p:txBody>
+          <a:bodyPr wrap="square" lIns="0" tIns="0" rIns="0" bIns="0" rtlCol="0" anchor="ctr"/>
+          <a:lstStyle/>
+          <a:p>
+            <a:pPr indent="0" marL="0">
+              <a:buNone/>
+            </a:pPr>
+            <a:r>
+              <a:rPr lang="en-US" sz="2200" b="1" dirty="0">
                 <a:solidFill>
                   <a:srgbClr val="1F1A17"/>
                 </a:solidFill>
@@ -13304,7 +13498,7 @@
               </a:rPr>
               <a:t>肉画像は撮影条件に左右されるため、データ側で揺れを持たせる</a:t>
             </a:r>
-            <a:endParaRPr lang="en-US" sz="2000" dirty="0"/>
+            <a:endParaRPr lang="en-US" sz="2200" dirty="0"/>
           </a:p>
         </p:txBody>
       </p:sp>
@@ -13360,7 +13554,7 @@
               <a:buNone/>
             </a:pPr>
             <a:r>
-              <a:rPr lang="en-US" sz="850" b="1" dirty="0">
+              <a:rPr lang="en-US" sz="950" b="1" dirty="0">
                 <a:solidFill>
                   <a:srgbClr val="305C8A"/>
                 </a:solidFill>
@@ -13370,7 +13564,7 @@
               </a:rPr>
               <a:t>Resize</a:t>
             </a:r>
-            <a:endParaRPr lang="en-US" sz="850" dirty="0"/>
+            <a:endParaRPr lang="en-US" sz="950" dirty="0"/>
           </a:p>
         </p:txBody>
       </p:sp>
@@ -13399,7 +13593,7 @@
               <a:buNone/>
             </a:pPr>
             <a:r>
-              <a:rPr lang="en-US" sz="1200" dirty="0">
+              <a:rPr lang="en-US" sz="1340" dirty="0">
                 <a:solidFill>
                   <a:srgbClr val="1F1A17"/>
                 </a:solidFill>
@@ -13409,7 +13603,7 @@
               </a:rPr>
               <a:t>画像サイズを640pxに統一</a:t>
             </a:r>
-            <a:endParaRPr lang="en-US" sz="1200" dirty="0"/>
+            <a:endParaRPr lang="en-US" sz="1340" dirty="0"/>
           </a:p>
         </p:txBody>
       </p:sp>
@@ -13488,7 +13682,7 @@
               <a:buNone/>
             </a:pPr>
             <a:r>
-              <a:rPr lang="en-US" sz="850" b="1" dirty="0">
+              <a:rPr lang="en-US" sz="950" b="1" dirty="0">
                 <a:solidFill>
                   <a:srgbClr val="1BAE9D"/>
                 </a:solidFill>
@@ -13498,7 +13692,7 @@
               </a:rPr>
               <a:t>Split</a:t>
             </a:r>
-            <a:endParaRPr lang="en-US" sz="850" dirty="0"/>
+            <a:endParaRPr lang="en-US" sz="950" dirty="0"/>
           </a:p>
         </p:txBody>
       </p:sp>
@@ -13527,7 +13721,7 @@
               <a:buNone/>
             </a:pPr>
             <a:r>
-              <a:rPr lang="en-US" sz="1200" dirty="0">
+              <a:rPr lang="en-US" sz="1340" dirty="0">
                 <a:solidFill>
                   <a:srgbClr val="1F1A17"/>
                 </a:solidFill>
@@ -13537,7 +13731,7 @@
               </a:rPr>
               <a:t>学習、検証、テストに分割</a:t>
             </a:r>
-            <a:endParaRPr lang="en-US" sz="1200" dirty="0"/>
+            <a:endParaRPr lang="en-US" sz="1340" dirty="0"/>
           </a:p>
         </p:txBody>
       </p:sp>
@@ -13616,7 +13810,7 @@
               <a:buNone/>
             </a:pPr>
             <a:r>
-              <a:rPr lang="en-US" sz="850" b="1" dirty="0">
+              <a:rPr lang="en-US" sz="950" b="1" dirty="0">
                 <a:solidFill>
                   <a:srgbClr val="8E2335"/>
                 </a:solidFill>
@@ -13626,7 +13820,7 @@
               </a:rPr>
               <a:t>Augment</a:t>
             </a:r>
-            <a:endParaRPr lang="en-US" sz="850" dirty="0"/>
+            <a:endParaRPr lang="en-US" sz="950" dirty="0"/>
           </a:p>
         </p:txBody>
       </p:sp>
@@ -13655,7 +13849,7 @@
               <a:buNone/>
             </a:pPr>
             <a:r>
-              <a:rPr lang="en-US" sz="1200" dirty="0">
+              <a:rPr lang="en-US" sz="1340" dirty="0">
                 <a:solidFill>
                   <a:srgbClr val="1F1A17"/>
                 </a:solidFill>
@@ -13665,7 +13859,7 @@
               </a:rPr>
               <a:t>反転、拡大縮小、色変化など</a:t>
             </a:r>
-            <a:endParaRPr lang="en-US" sz="1200" dirty="0"/>
+            <a:endParaRPr lang="en-US" sz="1340" dirty="0"/>
           </a:p>
         </p:txBody>
       </p:sp>
@@ -13744,7 +13938,7 @@
               <a:buNone/>
             </a:pPr>
             <a:r>
-              <a:rPr lang="en-US" sz="850" b="1" dirty="0">
+              <a:rPr lang="en-US" sz="950" b="1" dirty="0">
                 <a:solidFill>
                   <a:srgbClr val="D79B38"/>
                 </a:solidFill>
@@ -13754,7 +13948,7 @@
               </a:rPr>
               <a:t>Export</a:t>
             </a:r>
-            <a:endParaRPr lang="en-US" sz="850" dirty="0"/>
+            <a:endParaRPr lang="en-US" sz="950" dirty="0"/>
           </a:p>
         </p:txBody>
       </p:sp>
@@ -13783,7 +13977,7 @@
               <a:buNone/>
             </a:pPr>
             <a:r>
-              <a:rPr lang="en-US" sz="1200" dirty="0">
+              <a:rPr lang="en-US" sz="1340" dirty="0">
                 <a:solidFill>
                   <a:srgbClr val="1F1A17"/>
                 </a:solidFill>
@@ -13793,7 +13987,7 @@
               </a:rPr>
               <a:t>YOLO形式で出力</a:t>
             </a:r>
-            <a:endParaRPr lang="en-US" sz="1200" dirty="0"/>
+            <a:endParaRPr lang="en-US" sz="1340" dirty="0"/>
           </a:p>
         </p:txBody>
       </p:sp>
@@ -13828,8 +14022,8 @@
         </p:nvSpPr>
         <p:spPr>
           <a:xfrm>
-            <a:off x="6812280" y="1691640"/>
-            <a:ext cx="4297680" cy="3383280"/>
+            <a:off x="6720840" y="1627632"/>
+            <a:ext cx="4498848" cy="3611880"/>
           </a:xfrm>
           <a:prstGeom prst="rect">
             <a:avLst/>
@@ -13853,7 +14047,7 @@
         </p:nvSpPr>
         <p:spPr>
           <a:xfrm>
-            <a:off x="7150608" y="2084832"/>
+            <a:off x="7086600" y="2011680"/>
             <a:ext cx="1737360" cy="164592"/>
           </a:xfrm>
           <a:prstGeom prst="rect">
@@ -13870,7 +14064,7 @@
               <a:buNone/>
             </a:pPr>
             <a:r>
-              <a:rPr lang="en-US" sz="850" b="1" dirty="0">
+              <a:rPr lang="en-US" sz="950" b="1" dirty="0">
                 <a:solidFill>
                   <a:srgbClr val="8E2335"/>
                 </a:solidFill>
@@ -13880,7 +14074,7 @@
               </a:rPr>
               <a:t>オリジナリティ</a:t>
             </a:r>
-            <a:endParaRPr lang="en-US" sz="850" dirty="0"/>
+            <a:endParaRPr lang="en-US" sz="950" dirty="0"/>
           </a:p>
         </p:txBody>
       </p:sp>
@@ -13892,24 +14086,24 @@
         </p:nvSpPr>
         <p:spPr>
           <a:xfrm>
-            <a:off x="7150608" y="2542032"/>
-            <a:ext cx="3429000" cy="914400"/>
-          </a:xfrm>
-          <a:prstGeom prst="rect">
-            <a:avLst/>
-          </a:prstGeom>
-          <a:noFill/>
-          <a:ln/>
-        </p:spPr>
-        <p:txBody>
-          <a:bodyPr wrap="square" lIns="0" tIns="0" rIns="0" bIns="0" rtlCol="0" anchor="ctr"/>
-          <a:lstStyle/>
-          <a:p>
-            <a:pPr indent="0" marL="0">
-              <a:buNone/>
-            </a:pPr>
-            <a:r>
-              <a:rPr lang="en-US" sz="1659" b="1" dirty="0">
+            <a:off x="7086600" y="2450592"/>
+            <a:ext cx="3703320" cy="1024128"/>
+          </a:xfrm>
+          <a:prstGeom prst="rect">
+            <a:avLst/>
+          </a:prstGeom>
+          <a:noFill/>
+          <a:ln/>
+        </p:spPr>
+        <p:txBody>
+          <a:bodyPr wrap="square" lIns="0" tIns="0" rIns="0" bIns="0" rtlCol="0" anchor="ctr"/>
+          <a:lstStyle/>
+          <a:p>
+            <a:pPr indent="0" marL="0">
+              <a:buNone/>
+            </a:pPr>
+            <a:r>
+              <a:rPr lang="en-US" sz="1795" b="1" dirty="0">
                 <a:solidFill>
                   <a:srgbClr val="1F1A17"/>
                 </a:solidFill>
@@ -13919,7 +14113,7 @@
               </a:rPr>
               <a:t>肉の見え方が変わる前提で、データセット設計と失敗例分析を重視した</a:t>
             </a:r>
-            <a:endParaRPr lang="en-US" sz="1659" dirty="0"/>
+            <a:endParaRPr lang="en-US" sz="1795" dirty="0"/>
           </a:p>
         </p:txBody>
       </p:sp>
@@ -13931,24 +14125,24 @@
         </p:nvSpPr>
         <p:spPr>
           <a:xfrm>
-            <a:off x="7178040" y="3977640"/>
-            <a:ext cx="3383280" cy="310896"/>
-          </a:xfrm>
-          <a:prstGeom prst="rect">
-            <a:avLst/>
-          </a:prstGeom>
-          <a:noFill/>
-          <a:ln/>
-        </p:spPr>
-        <p:txBody>
-          <a:bodyPr wrap="square" lIns="0" tIns="0" rIns="0" bIns="0" rtlCol="0" anchor="ctr"/>
-          <a:lstStyle/>
-          <a:p>
-            <a:pPr indent="0" marL="0">
-              <a:buNone/>
-            </a:pPr>
-            <a:r>
-              <a:rPr lang="en-US" sz="920" dirty="0">
+            <a:off x="7114032" y="4005072"/>
+            <a:ext cx="3611880" cy="310896"/>
+          </a:xfrm>
+          <a:prstGeom prst="rect">
+            <a:avLst/>
+          </a:prstGeom>
+          <a:noFill/>
+          <a:ln/>
+        </p:spPr>
+        <p:txBody>
+          <a:bodyPr wrap="square" lIns="0" tIns="0" rIns="0" bIns="0" rtlCol="0" anchor="ctr"/>
+          <a:lstStyle/>
+          <a:p>
+            <a:pPr indent="0" marL="0">
+              <a:buNone/>
+            </a:pPr>
+            <a:r>
+              <a:rPr lang="en-US" sz="1030" dirty="0">
                 <a:solidFill>
                   <a:srgbClr val="776C64"/>
                 </a:solidFill>
@@ -13958,7 +14152,7 @@
               </a:rPr>
               <a:t>モデルを新規提案するのではなく、対象に合わせたデータ作成を検証対象にした。</a:t>
             </a:r>
-            <a:endParaRPr lang="en-US" sz="920" dirty="0"/>
+            <a:endParaRPr lang="en-US" sz="1030" dirty="0"/>
           </a:p>
         </p:txBody>
       </p:sp>

--- a/slides_meat_yolo/meat_yolo_roboflow_presentation.pptx
+++ b/slides_meat_yolo/meat_yolo_roboflow_presentation.pptx
@@ -2596,8 +2596,8 @@
         </p:nvSpPr>
         <p:spPr>
           <a:xfrm>
-            <a:off x="603504" y="6144768"/>
-            <a:ext cx="2194560" cy="164592"/>
+            <a:off x="603504" y="5961888"/>
+            <a:ext cx="2148840" cy="164592"/>
           </a:xfrm>
           <a:prstGeom prst="rect">
             <a:avLst/>
@@ -2621,7 +2621,7 @@
                 <a:ea typeface="Hiragino Sans" pitchFamily="34" charset="-122"/>
                 <a:cs typeface="Hiragino Sans" pitchFamily="34" charset="-120"/>
               </a:rPr>
-              <a:t>Programming 1 Project</a:t>
+              <a:t>応用プログラミング</a:t>
             </a:r>
             <a:endParaRPr lang="en-US" sz="920" dirty="0"/>
           </a:p>
@@ -2630,6 +2630,84 @@
       <p:sp>
         <p:nvSpPr>
           <p:cNvPr id="16" name="Text 13"/>
+          <p:cNvSpPr/>
+          <p:nvPr/>
+        </p:nvSpPr>
+        <p:spPr>
+          <a:xfrm>
+            <a:off x="603504" y="6199632"/>
+            <a:ext cx="2148840" cy="164592"/>
+          </a:xfrm>
+          <a:prstGeom prst="rect">
+            <a:avLst/>
+          </a:prstGeom>
+          <a:noFill/>
+          <a:ln/>
+        </p:spPr>
+        <p:txBody>
+          <a:bodyPr wrap="square" lIns="0" tIns="0" rIns="0" bIns="0" rtlCol="0" anchor="ctr"/>
+          <a:lstStyle/>
+          <a:p>
+            <a:pPr indent="0" marL="0">
+              <a:buNone/>
+            </a:pPr>
+            <a:r>
+              <a:rPr lang="en-US" sz="880" dirty="0">
+                <a:solidFill>
+                  <a:srgbClr val="BFB3AA"/>
+                </a:solidFill>
+                <a:latin typeface="Hiragino Sans" pitchFamily="34" charset="0"/>
+                <a:ea typeface="Hiragino Sans" pitchFamily="34" charset="-122"/>
+                <a:cs typeface="Hiragino Sans" pitchFamily="34" charset="-120"/>
+              </a:rPr>
+              <a:t>2026年6月1日 13:11</a:t>
+            </a:r>
+            <a:endParaRPr lang="en-US" sz="880" dirty="0"/>
+          </a:p>
+        </p:txBody>
+      </p:sp>
+      <p:sp>
+        <p:nvSpPr>
+          <p:cNvPr id="17" name="Text 14"/>
+          <p:cNvSpPr/>
+          <p:nvPr/>
+        </p:nvSpPr>
+        <p:spPr>
+          <a:xfrm>
+            <a:off x="3218688" y="6080760"/>
+            <a:ext cx="1709928" cy="164592"/>
+          </a:xfrm>
+          <a:prstGeom prst="rect">
+            <a:avLst/>
+          </a:prstGeom>
+          <a:noFill/>
+          <a:ln/>
+        </p:spPr>
+        <p:txBody>
+          <a:bodyPr wrap="square" lIns="0" tIns="0" rIns="0" bIns="0" rtlCol="0" anchor="ctr"/>
+          <a:lstStyle/>
+          <a:p>
+            <a:pPr algn="r" indent="0" marL="0">
+              <a:buNone/>
+            </a:pPr>
+            <a:r>
+              <a:rPr lang="en-US" sz="880" dirty="0">
+                <a:solidFill>
+                  <a:srgbClr val="BFB3AA"/>
+                </a:solidFill>
+                <a:latin typeface="Hiragino Sans" pitchFamily="34" charset="0"/>
+                <a:ea typeface="Hiragino Sans" pitchFamily="34" charset="-122"/>
+                <a:cs typeface="Hiragino Sans" pitchFamily="34" charset="-120"/>
+              </a:rPr>
+              <a:t>03250910阿部壮一郎</a:t>
+            </a:r>
+            <a:endParaRPr lang="en-US" sz="880" dirty="0"/>
+          </a:p>
+        </p:txBody>
+      </p:sp>
+      <p:sp>
+        <p:nvSpPr>
+          <p:cNvPr id="18" name="Text 15"/>
           <p:cNvSpPr/>
           <p:nvPr/>
         </p:nvSpPr>
@@ -3117,7 +3195,7 @@
                 <a:ea typeface="Hiragino Sans" pitchFamily="34" charset="-122"/>
                 <a:cs typeface="Hiragino Sans" pitchFamily="34" charset="-120"/>
               </a:rPr>
-              <a:t>10</a:t>
+              <a:t>100</a:t>
             </a:r>
             <a:endParaRPr lang="en-US" sz="1180" dirty="0"/>
           </a:p>
@@ -4916,7 +4994,7 @@
               <a:buNone/>
             </a:pPr>
             <a:r>
-              <a:rPr lang="en-US" sz="2100" b="1" dirty="0">
+              <a:rPr lang="en-US" sz="1400" b="1" dirty="0">
                 <a:solidFill>
                   <a:srgbClr val="1F1A17"/>
                 </a:solidFill>
@@ -4924,9 +5002,9 @@
                 <a:ea typeface="Hiragino Sans" pitchFamily="34" charset="-122"/>
                 <a:cs typeface="Hiragino Sans" pitchFamily="34" charset="-120"/>
               </a:rPr>
-              <a:t>confidenceが付いた検出枠として出力される</a:t>
-            </a:r>
-            <a:endParaRPr lang="en-US" sz="2100" dirty="0"/>
+              <a:t>単体では判定できても、重なりでは pork に寄る誤判定が出る</a:t>
+            </a:r>
+            <a:endParaRPr lang="en-US" sz="1400" dirty="0"/>
           </a:p>
         </p:txBody>
       </p:sp>
@@ -5040,7 +5118,7 @@
                 <a:ea typeface="Hiragino Sans" pitchFamily="34" charset="-122"/>
                 <a:cs typeface="Hiragino Sans" pitchFamily="34" charset="-120"/>
               </a:rPr>
-              <a:t>lamb 0.81</a:t>
+              <a:t>単体: lamb 0.81</a:t>
             </a:r>
             <a:endParaRPr lang="en-US" sz="830" dirty="0"/>
           </a:p>
@@ -5156,7 +5234,7 @@
                 <a:ea typeface="Hiragino Sans" pitchFamily="34" charset="-122"/>
                 <a:cs typeface="Hiragino Sans" pitchFamily="34" charset="-120"/>
               </a:rPr>
-              <a:t>pork 0.58</a:t>
+              <a:t>単体: pork 0.58</a:t>
             </a:r>
             <a:endParaRPr lang="en-US" sz="830" dirty="0"/>
           </a:p>
@@ -5164,7 +5242,7 @@
       </p:sp>
       <p:pic>
         <p:nvPicPr>
-          <p:cNvPr id="16" name="Image 2" descr="/Users/abesouichirou/Documents/utokyo_lecture/programming1/detect_results/predict/istockphoto-1300699678-612x612_jpg.rf.40f23d801c52831b734920aeb4ea53c2.jpg">    </p:cNvPr>
+          <p:cNvPr id="16" name="Image 2" descr="/Users/abesouichirou/Documents/utokyo_lecture/programming1/detect_results/predict/Screenshot-2025-04-02-234238_png.rf.f6aab08a21fe6901ec6b99459aaae9c8.jpg">    </p:cNvPr>
           <p:cNvPicPr>
             <a:picLocks noChangeAspect="1"/>
           </p:cNvPicPr>
@@ -5194,6 +5272,122 @@
         <p:spPr>
           <a:xfrm>
             <a:off x="5943600" y="1792224"/>
+            <a:ext cx="2487168" cy="2487168"/>
+          </a:xfrm>
+          <a:prstGeom prst="rect">
+            <a:avLst/>
+          </a:prstGeom>
+          <a:solidFill>
+            <a:srgbClr val="FFFFFF">
+              <a:alpha val="0"/>
+            </a:srgbClr>
+          </a:solidFill>
+          <a:ln w="13970">
+            <a:solidFill>
+              <a:srgbClr val="8E2335"/>
+            </a:solidFill>
+            <a:prstDash val="solid"/>
+          </a:ln>
+        </p:spPr>
+      </p:sp>
+      <p:sp>
+        <p:nvSpPr>
+          <p:cNvPr id="18" name="Shape 13"/>
+          <p:cNvSpPr/>
+          <p:nvPr/>
+        </p:nvSpPr>
+        <p:spPr>
+          <a:xfrm>
+            <a:off x="5943600" y="1792224"/>
+            <a:ext cx="2487168" cy="310896"/>
+          </a:xfrm>
+          <a:prstGeom prst="rect">
+            <a:avLst/>
+          </a:prstGeom>
+          <a:solidFill>
+            <a:srgbClr val="8E2335"/>
+          </a:solidFill>
+          <a:ln w="12700">
+            <a:solidFill>
+              <a:srgbClr val="8E2335">
+                <a:alpha val="0"/>
+              </a:srgbClr>
+            </a:solidFill>
+            <a:prstDash val="solid"/>
+          </a:ln>
+        </p:spPr>
+      </p:sp>
+      <p:sp>
+        <p:nvSpPr>
+          <p:cNvPr id="19" name="Text 14"/>
+          <p:cNvSpPr/>
+          <p:nvPr/>
+        </p:nvSpPr>
+        <p:spPr>
+          <a:xfrm>
+            <a:off x="6035040" y="1856232"/>
+            <a:ext cx="2304288" cy="128016"/>
+          </a:xfrm>
+          <a:prstGeom prst="rect">
+            <a:avLst/>
+          </a:prstGeom>
+          <a:noFill/>
+          <a:ln/>
+        </p:spPr>
+        <p:txBody>
+          <a:bodyPr wrap="square" lIns="0" tIns="0" rIns="0" bIns="0" rtlCol="0" anchor="ctr"/>
+          <a:lstStyle/>
+          <a:p>
+            <a:pPr algn="ctr" indent="0" marL="0">
+              <a:buNone/>
+            </a:pPr>
+            <a:r>
+              <a:rPr lang="en-US" sz="830" b="1" dirty="0">
+                <a:solidFill>
+                  <a:srgbClr val="FFFFFF"/>
+                </a:solidFill>
+                <a:latin typeface="Hiragino Sans" pitchFamily="34" charset="0"/>
+                <a:ea typeface="Hiragino Sans" pitchFamily="34" charset="-122"/>
+                <a:cs typeface="Hiragino Sans" pitchFamily="34" charset="-120"/>
+              </a:rPr>
+              <a:t>重なり: pork 0.36 / 0.46</a:t>
+            </a:r>
+            <a:endParaRPr lang="en-US" sz="830" dirty="0"/>
+          </a:p>
+        </p:txBody>
+      </p:sp>
+      <p:pic>
+        <p:nvPicPr>
+          <p:cNvPr id="20" name="Image 3" descr="/Users/abesouichirou/Documents/utokyo_lecture/programming1/detect_results/predict/IMG_2531_jpg.rf.f79a1b88fc9ef9a5564c42be115c7bb8.jpg">    </p:cNvPr>
+          <p:cNvPicPr>
+            <a:picLocks noChangeAspect="1"/>
+          </p:cNvPicPr>
+          <p:nvPr/>
+        </p:nvPicPr>
+        <p:blipFill>
+          <a:blip r:embed="rId4"/>
+          <a:srcRect l="0" r="0" t="0" b="0"/>
+          <a:stretch/>
+        </p:blipFill>
+        <p:spPr>
+          <a:xfrm>
+            <a:off x="8577072" y="1792224"/>
+            <a:ext cx="2487168" cy="2487168"/>
+          </a:xfrm>
+          <a:prstGeom prst="rect">
+            <a:avLst/>
+          </a:prstGeom>
+        </p:spPr>
+      </p:pic>
+      <p:sp>
+        <p:nvSpPr>
+          <p:cNvPr id="21" name="Shape 15"/>
+          <p:cNvSpPr/>
+          <p:nvPr/>
+        </p:nvSpPr>
+        <p:spPr>
+          <a:xfrm>
+            <a:off x="8577072" y="1792224"/>
             <a:ext cx="2487168" cy="2487168"/>
           </a:xfrm>
           <a:prstGeom prst="rect">
@@ -5214,13 +5408,13 @@
       </p:sp>
       <p:sp>
         <p:nvSpPr>
-          <p:cNvPr id="18" name="Shape 13"/>
-          <p:cNvSpPr/>
-          <p:nvPr/>
-        </p:nvSpPr>
-        <p:spPr>
-          <a:xfrm>
-            <a:off x="5943600" y="1792224"/>
+          <p:cNvPr id="22" name="Shape 16"/>
+          <p:cNvSpPr/>
+          <p:nvPr/>
+        </p:nvSpPr>
+        <p:spPr>
+          <a:xfrm>
+            <a:off x="8577072" y="1792224"/>
             <a:ext cx="2487168" cy="310896"/>
           </a:xfrm>
           <a:prstGeom prst="rect">
@@ -5241,122 +5435,6 @@
       </p:sp>
       <p:sp>
         <p:nvSpPr>
-          <p:cNvPr id="19" name="Text 14"/>
-          <p:cNvSpPr/>
-          <p:nvPr/>
-        </p:nvSpPr>
-        <p:spPr>
-          <a:xfrm>
-            <a:off x="6035040" y="1856232"/>
-            <a:ext cx="2304288" cy="128016"/>
-          </a:xfrm>
-          <a:prstGeom prst="rect">
-            <a:avLst/>
-          </a:prstGeom>
-          <a:noFill/>
-          <a:ln/>
-        </p:spPr>
-        <p:txBody>
-          <a:bodyPr wrap="square" lIns="0" tIns="0" rIns="0" bIns="0" rtlCol="0" anchor="ctr"/>
-          <a:lstStyle/>
-          <a:p>
-            <a:pPr algn="ctr" indent="0" marL="0">
-              <a:buNone/>
-            </a:pPr>
-            <a:r>
-              <a:rPr lang="en-US" sz="830" b="1" dirty="0">
-                <a:solidFill>
-                  <a:srgbClr val="FFFFFF"/>
-                </a:solidFill>
-                <a:latin typeface="Hiragino Sans" pitchFamily="34" charset="0"/>
-                <a:ea typeface="Hiragino Sans" pitchFamily="34" charset="-122"/>
-                <a:cs typeface="Hiragino Sans" pitchFamily="34" charset="-120"/>
-              </a:rPr>
-              <a:t>lamb 0.55</a:t>
-            </a:r>
-            <a:endParaRPr lang="en-US" sz="830" dirty="0"/>
-          </a:p>
-        </p:txBody>
-      </p:sp>
-      <p:pic>
-        <p:nvPicPr>
-          <p:cNvPr id="20" name="Image 3" descr="/Users/abesouichirou/Documents/utokyo_lecture/programming1/detect_results/predict/pngtree-red-meat-on-a-white-cut-out-picture-image_13276259_png.rf.b5d2f746cfb72290f0109194277ae8b2.jpg">    </p:cNvPr>
-          <p:cNvPicPr>
-            <a:picLocks noChangeAspect="1"/>
-          </p:cNvPicPr>
-          <p:nvPr/>
-        </p:nvPicPr>
-        <p:blipFill>
-          <a:blip r:embed="rId4"/>
-          <a:srcRect l="0" r="0" t="0" b="0"/>
-          <a:stretch/>
-        </p:blipFill>
-        <p:spPr>
-          <a:xfrm>
-            <a:off x="8577072" y="1792224"/>
-            <a:ext cx="2487168" cy="2487168"/>
-          </a:xfrm>
-          <a:prstGeom prst="rect">
-            <a:avLst/>
-          </a:prstGeom>
-        </p:spPr>
-      </p:pic>
-      <p:sp>
-        <p:nvSpPr>
-          <p:cNvPr id="21" name="Shape 15"/>
-          <p:cNvSpPr/>
-          <p:nvPr/>
-        </p:nvSpPr>
-        <p:spPr>
-          <a:xfrm>
-            <a:off x="8577072" y="1792224"/>
-            <a:ext cx="2487168" cy="2487168"/>
-          </a:xfrm>
-          <a:prstGeom prst="rect">
-            <a:avLst/>
-          </a:prstGeom>
-          <a:solidFill>
-            <a:srgbClr val="FFFFFF">
-              <a:alpha val="0"/>
-            </a:srgbClr>
-          </a:solidFill>
-          <a:ln w="13970">
-            <a:solidFill>
-              <a:srgbClr val="D79B38"/>
-            </a:solidFill>
-            <a:prstDash val="solid"/>
-          </a:ln>
-        </p:spPr>
-      </p:sp>
-      <p:sp>
-        <p:nvSpPr>
-          <p:cNvPr id="22" name="Shape 16"/>
-          <p:cNvSpPr/>
-          <p:nvPr/>
-        </p:nvSpPr>
-        <p:spPr>
-          <a:xfrm>
-            <a:off x="8577072" y="1792224"/>
-            <a:ext cx="2487168" cy="310896"/>
-          </a:xfrm>
-          <a:prstGeom prst="rect">
-            <a:avLst/>
-          </a:prstGeom>
-          <a:solidFill>
-            <a:srgbClr val="D79B38"/>
-          </a:solidFill>
-          <a:ln w="12700">
-            <a:solidFill>
-              <a:srgbClr val="D79B38">
-                <a:alpha val="0"/>
-              </a:srgbClr>
-            </a:solidFill>
-            <a:prstDash val="solid"/>
-          </a:ln>
-        </p:spPr>
-      </p:sp>
-      <p:sp>
-        <p:nvSpPr>
           <p:cNvPr id="23" name="Text 17"/>
           <p:cNvSpPr/>
           <p:nvPr/>
@@ -5388,7 +5466,7 @@
                 <a:ea typeface="Hiragino Sans" pitchFamily="34" charset="-122"/>
                 <a:cs typeface="Hiragino Sans" pitchFamily="34" charset="-120"/>
               </a:rPr>
-              <a:t>例: 判断が難しい画像</a:t>
+              <a:t>重なり: BBoxが不安定</a:t>
             </a:r>
             <a:endParaRPr lang="en-US" sz="830" dirty="0"/>
           </a:p>
@@ -5452,7 +5530,7 @@
                 <a:ea typeface="Hiragino Sans" pitchFamily="34" charset="-122"/>
                 <a:cs typeface="Hiragino Sans" pitchFamily="34" charset="-120"/>
               </a:rPr>
-              <a:t>成功しやすい条件</a:t>
+              <a:t>追加した検証</a:t>
             </a:r>
             <a:endParaRPr lang="en-US" sz="940" dirty="0"/>
           </a:p>
@@ -5491,7 +5569,7 @@
                 <a:ea typeface="Hiragino Sans" pitchFamily="34" charset="-122"/>
                 <a:cs typeface="Hiragino Sans" pitchFamily="34" charset="-120"/>
               </a:rPr>
-              <a:t>肉が大きく、背景が単純で、脂身や色の特徴が見える</a:t>
+              <a:t>複数種類の肉が重なっている画像を推論し、BBoxとラベルの出方を確認した</a:t>
             </a:r>
             <a:endParaRPr lang="en-US" sz="950" dirty="0"/>
           </a:p>
@@ -5555,7 +5633,7 @@
                 <a:ea typeface="Hiragino Sans" pitchFamily="34" charset="-122"/>
                 <a:cs typeface="Hiragino Sans" pitchFamily="34" charset="-120"/>
               </a:rPr>
-              <a:t>難しい条件</a:t>
+              <a:t>見えた課題</a:t>
             </a:r>
             <a:endParaRPr lang="en-US" sz="940" dirty="0"/>
           </a:p>
@@ -5594,7 +5672,7 @@
                 <a:ea typeface="Hiragino Sans" pitchFamily="34" charset="-122"/>
                 <a:cs typeface="Hiragino Sans" pitchFamily="34" charset="-120"/>
               </a:rPr>
-              <a:t>透かし、背景、暗さ、肉同士の類似でconfidenceが下がる</a:t>
+              <a:t>重なり部分では境界が曖昧になり、pork として誤って検出されやすい</a:t>
             </a:r>
             <a:endParaRPr lang="en-US" sz="950" dirty="0"/>
           </a:p>
@@ -5908,7 +5986,7 @@
         </p:nvSpPr>
         <p:spPr>
           <a:xfrm>
-            <a:off x="6446520" y="1965960"/>
+            <a:off x="6446520" y="1883664"/>
             <a:ext cx="128016" cy="128016"/>
           </a:xfrm>
           <a:prstGeom prst="rect">
@@ -5935,7 +6013,7 @@
         </p:nvSpPr>
         <p:spPr>
           <a:xfrm>
-            <a:off x="6812280" y="1920240"/>
+            <a:off x="6812280" y="1837944"/>
             <a:ext cx="1554480" cy="146304"/>
           </a:xfrm>
           <a:prstGeom prst="rect">
@@ -5974,24 +6052,24 @@
         </p:nvSpPr>
         <p:spPr>
           <a:xfrm>
-            <a:off x="8577072" y="1929384"/>
-            <a:ext cx="2606040" cy="402336"/>
-          </a:xfrm>
-          <a:prstGeom prst="rect">
-            <a:avLst/>
-          </a:prstGeom>
-          <a:noFill/>
-          <a:ln/>
-        </p:spPr>
-        <p:txBody>
-          <a:bodyPr wrap="square" lIns="0" tIns="0" rIns="0" bIns="0" rtlCol="0" anchor="ctr"/>
-          <a:lstStyle/>
-          <a:p>
-            <a:pPr indent="0" marL="0">
-              <a:buNone/>
-            </a:pPr>
-            <a:r>
-              <a:rPr lang="en-US" sz="1030" dirty="0">
+            <a:off x="8577072" y="1847088"/>
+            <a:ext cx="2606040" cy="329184"/>
+          </a:xfrm>
+          <a:prstGeom prst="rect">
+            <a:avLst/>
+          </a:prstGeom>
+          <a:noFill/>
+          <a:ln/>
+        </p:spPr>
+        <p:txBody>
+          <a:bodyPr wrap="square" lIns="0" tIns="0" rIns="0" bIns="0" rtlCol="0" anchor="ctr"/>
+          <a:lstStyle/>
+          <a:p>
+            <a:pPr indent="0" marL="0">
+              <a:buNone/>
+            </a:pPr>
+            <a:r>
+              <a:rPr lang="en-US" sz="970" dirty="0">
                 <a:solidFill>
                   <a:srgbClr val="776C64"/>
                 </a:solidFill>
@@ -5999,9 +6077,9 @@
                 <a:ea typeface="Hiragino Sans" pitchFamily="34" charset="-122"/>
                 <a:cs typeface="Hiragino Sans" pitchFamily="34" charset="-120"/>
               </a:rPr>
-              <a:t>lambなど特徴が強い画像では正解数が多い</a:t>
-            </a:r>
-            <a:endParaRPr lang="en-US" sz="1030" dirty="0"/>
+              <a:t>単体で写る肉や特徴が強い画像では正解数が多い</a:t>
+            </a:r>
+            <a:endParaRPr lang="en-US" sz="970" dirty="0"/>
           </a:p>
         </p:txBody>
       </p:sp>
@@ -6013,7 +6091,7 @@
         </p:nvSpPr>
         <p:spPr>
           <a:xfrm>
-            <a:off x="6446520" y="2478024"/>
+            <a:off x="6446520" y="2286000"/>
             <a:ext cx="4663440" cy="0"/>
           </a:xfrm>
           <a:prstGeom prst="line">
@@ -6036,7 +6114,263 @@
         </p:nvSpPr>
         <p:spPr>
           <a:xfrm>
-            <a:off x="6446520" y="2926080"/>
+            <a:off x="6446520" y="2633472"/>
+            <a:ext cx="128016" cy="128016"/>
+          </a:xfrm>
+          <a:prstGeom prst="rect">
+            <a:avLst/>
+          </a:prstGeom>
+          <a:solidFill>
+            <a:srgbClr val="D79B38"/>
+          </a:solidFill>
+          <a:ln w="12700">
+            <a:solidFill>
+              <a:srgbClr val="D79B38">
+                <a:alpha val="0"/>
+              </a:srgbClr>
+            </a:solidFill>
+            <a:prstDash val="solid"/>
+          </a:ln>
+        </p:spPr>
+      </p:sp>
+      <p:sp>
+        <p:nvSpPr>
+          <p:cNvPr id="14" name="Text 11"/>
+          <p:cNvSpPr/>
+          <p:nvPr/>
+        </p:nvSpPr>
+        <p:spPr>
+          <a:xfrm>
+            <a:off x="6812280" y="2587752"/>
+            <a:ext cx="1554480" cy="146304"/>
+          </a:xfrm>
+          <a:prstGeom prst="rect">
+            <a:avLst/>
+          </a:prstGeom>
+          <a:noFill/>
+          <a:ln/>
+        </p:spPr>
+        <p:txBody>
+          <a:bodyPr wrap="square" lIns="0" tIns="0" rIns="0" bIns="0" rtlCol="0" anchor="ctr"/>
+          <a:lstStyle/>
+          <a:p>
+            <a:pPr indent="0" marL="0">
+              <a:buNone/>
+            </a:pPr>
+            <a:r>
+              <a:rPr lang="en-US" sz="1040" b="1" dirty="0">
+                <a:solidFill>
+                  <a:srgbClr val="1F1A17"/>
+                </a:solidFill>
+                <a:latin typeface="Hiragino Sans" pitchFamily="34" charset="0"/>
+                <a:ea typeface="Hiragino Sans" pitchFamily="34" charset="-122"/>
+                <a:cs typeface="Hiragino Sans" pitchFamily="34" charset="-120"/>
+              </a:rPr>
+              <a:t>工夫</a:t>
+            </a:r>
+            <a:endParaRPr lang="en-US" sz="1040" dirty="0"/>
+          </a:p>
+        </p:txBody>
+      </p:sp>
+      <p:sp>
+        <p:nvSpPr>
+          <p:cNvPr id="15" name="Text 12"/>
+          <p:cNvSpPr/>
+          <p:nvPr/>
+        </p:nvSpPr>
+        <p:spPr>
+          <a:xfrm>
+            <a:off x="8577072" y="2596896"/>
+            <a:ext cx="2606040" cy="329184"/>
+          </a:xfrm>
+          <a:prstGeom prst="rect">
+            <a:avLst/>
+          </a:prstGeom>
+          <a:noFill/>
+          <a:ln/>
+        </p:spPr>
+        <p:txBody>
+          <a:bodyPr wrap="square" lIns="0" tIns="0" rIns="0" bIns="0" rtlCol="0" anchor="ctr"/>
+          <a:lstStyle/>
+          <a:p>
+            <a:pPr indent="0" marL="0">
+              <a:buNone/>
+            </a:pPr>
+            <a:r>
+              <a:rPr lang="en-US" sz="970" dirty="0">
+                <a:solidFill>
+                  <a:srgbClr val="776C64"/>
+                </a:solidFill>
+                <a:latin typeface="Hiragino Sans" pitchFamily="34" charset="0"/>
+                <a:ea typeface="Hiragino Sans" pitchFamily="34" charset="-122"/>
+                <a:cs typeface="Hiragino Sans" pitchFamily="34" charset="-120"/>
+              </a:rPr>
+              <a:t>重なった肉がうまく判定されなかったため、重なり画像を学習データに追加</a:t>
+            </a:r>
+            <a:endParaRPr lang="en-US" sz="970" dirty="0"/>
+          </a:p>
+        </p:txBody>
+      </p:sp>
+      <p:sp>
+        <p:nvSpPr>
+          <p:cNvPr id="16" name="Shape 13"/>
+          <p:cNvSpPr/>
+          <p:nvPr/>
+        </p:nvSpPr>
+        <p:spPr>
+          <a:xfrm>
+            <a:off x="6446520" y="3035808"/>
+            <a:ext cx="4663440" cy="0"/>
+          </a:xfrm>
+          <a:prstGeom prst="line">
+            <a:avLst/>
+          </a:prstGeom>
+          <a:noFill/>
+          <a:ln w="8890">
+            <a:solidFill>
+              <a:srgbClr val="E4DAD2"/>
+            </a:solidFill>
+            <a:prstDash val="solid"/>
+          </a:ln>
+        </p:spPr>
+      </p:sp>
+      <p:sp>
+        <p:nvSpPr>
+          <p:cNvPr id="17" name="Shape 14"/>
+          <p:cNvSpPr/>
+          <p:nvPr/>
+        </p:nvSpPr>
+        <p:spPr>
+          <a:xfrm>
+            <a:off x="6446520" y="3383280"/>
+            <a:ext cx="128016" cy="128016"/>
+          </a:xfrm>
+          <a:prstGeom prst="rect">
+            <a:avLst/>
+          </a:prstGeom>
+          <a:solidFill>
+            <a:srgbClr val="305C8A"/>
+          </a:solidFill>
+          <a:ln w="12700">
+            <a:solidFill>
+              <a:srgbClr val="305C8A">
+                <a:alpha val="0"/>
+              </a:srgbClr>
+            </a:solidFill>
+            <a:prstDash val="solid"/>
+          </a:ln>
+        </p:spPr>
+      </p:sp>
+      <p:sp>
+        <p:nvSpPr>
+          <p:cNvPr id="18" name="Text 15"/>
+          <p:cNvSpPr/>
+          <p:nvPr/>
+        </p:nvSpPr>
+        <p:spPr>
+          <a:xfrm>
+            <a:off x="6812280" y="3337560"/>
+            <a:ext cx="1554480" cy="146304"/>
+          </a:xfrm>
+          <a:prstGeom prst="rect">
+            <a:avLst/>
+          </a:prstGeom>
+          <a:noFill/>
+          <a:ln/>
+        </p:spPr>
+        <p:txBody>
+          <a:bodyPr wrap="square" lIns="0" tIns="0" rIns="0" bIns="0" rtlCol="0" anchor="ctr"/>
+          <a:lstStyle/>
+          <a:p>
+            <a:pPr indent="0" marL="0">
+              <a:buNone/>
+            </a:pPr>
+            <a:r>
+              <a:rPr lang="en-US" sz="1040" b="1" dirty="0">
+                <a:solidFill>
+                  <a:srgbClr val="1F1A17"/>
+                </a:solidFill>
+                <a:latin typeface="Hiragino Sans" pitchFamily="34" charset="0"/>
+                <a:ea typeface="Hiragino Sans" pitchFamily="34" charset="-122"/>
+                <a:cs typeface="Hiragino Sans" pitchFamily="34" charset="-120"/>
+              </a:rPr>
+              <a:t>検証</a:t>
+            </a:r>
+            <a:endParaRPr lang="en-US" sz="1040" dirty="0"/>
+          </a:p>
+        </p:txBody>
+      </p:sp>
+      <p:sp>
+        <p:nvSpPr>
+          <p:cNvPr id="19" name="Text 16"/>
+          <p:cNvSpPr/>
+          <p:nvPr/>
+        </p:nvSpPr>
+        <p:spPr>
+          <a:xfrm>
+            <a:off x="8577072" y="3346704"/>
+            <a:ext cx="2606040" cy="329184"/>
+          </a:xfrm>
+          <a:prstGeom prst="rect">
+            <a:avLst/>
+          </a:prstGeom>
+          <a:noFill/>
+          <a:ln/>
+        </p:spPr>
+        <p:txBody>
+          <a:bodyPr wrap="square" lIns="0" tIns="0" rIns="0" bIns="0" rtlCol="0" anchor="ctr"/>
+          <a:lstStyle/>
+          <a:p>
+            <a:pPr indent="0" marL="0">
+              <a:buNone/>
+            </a:pPr>
+            <a:r>
+              <a:rPr lang="en-US" sz="970" dirty="0">
+                <a:solidFill>
+                  <a:srgbClr val="776C64"/>
+                </a:solidFill>
+                <a:latin typeface="Hiragino Sans" pitchFamily="34" charset="0"/>
+                <a:ea typeface="Hiragino Sans" pitchFamily="34" charset="-122"/>
+                <a:cs typeface="Hiragino Sans" pitchFamily="34" charset="-120"/>
+              </a:rPr>
+              <a:t>複数種類の肉が重なる画像を判定させ、BBoxとラベルの出方を確認</a:t>
+            </a:r>
+            <a:endParaRPr lang="en-US" sz="970" dirty="0"/>
+          </a:p>
+        </p:txBody>
+      </p:sp>
+      <p:sp>
+        <p:nvSpPr>
+          <p:cNvPr id="20" name="Shape 17"/>
+          <p:cNvSpPr/>
+          <p:nvPr/>
+        </p:nvSpPr>
+        <p:spPr>
+          <a:xfrm>
+            <a:off x="6446520" y="3785616"/>
+            <a:ext cx="4663440" cy="0"/>
+          </a:xfrm>
+          <a:prstGeom prst="line">
+            <a:avLst/>
+          </a:prstGeom>
+          <a:noFill/>
+          <a:ln w="8890">
+            <a:solidFill>
+              <a:srgbClr val="E4DAD2"/>
+            </a:solidFill>
+            <a:prstDash val="solid"/>
+          </a:ln>
+        </p:spPr>
+      </p:sp>
+      <p:sp>
+        <p:nvSpPr>
+          <p:cNvPr id="21" name="Shape 18"/>
+          <p:cNvSpPr/>
+          <p:nvPr/>
+        </p:nvSpPr>
+        <p:spPr>
+          <a:xfrm>
+            <a:off x="6446520" y="4133088"/>
             <a:ext cx="128016" cy="128016"/>
           </a:xfrm>
           <a:prstGeom prst="rect">
@@ -6057,13 +6391,13 @@
       </p:sp>
       <p:sp>
         <p:nvSpPr>
-          <p:cNvPr id="14" name="Text 11"/>
-          <p:cNvSpPr/>
-          <p:nvPr/>
-        </p:nvSpPr>
-        <p:spPr>
-          <a:xfrm>
-            <a:off x="6812280" y="2880360"/>
+          <p:cNvPr id="22" name="Text 19"/>
+          <p:cNvSpPr/>
+          <p:nvPr/>
+        </p:nvSpPr>
+        <p:spPr>
+          <a:xfrm>
+            <a:off x="6812280" y="4087368"/>
             <a:ext cx="1554480" cy="146304"/>
           </a:xfrm>
           <a:prstGeom prst="rect">
@@ -6088,7 +6422,7 @@
                 <a:ea typeface="Hiragino Sans" pitchFamily="34" charset="-122"/>
                 <a:cs typeface="Hiragino Sans" pitchFamily="34" charset="-120"/>
               </a:rPr>
-              <a:t>誤りやすい点</a:t>
+              <a:t>残る課題</a:t>
             </a:r>
             <a:endParaRPr lang="en-US" sz="1040" dirty="0"/>
           </a:p>
@@ -6096,30 +6430,30 @@
       </p:sp>
       <p:sp>
         <p:nvSpPr>
-          <p:cNvPr id="15" name="Text 12"/>
-          <p:cNvSpPr/>
-          <p:nvPr/>
-        </p:nvSpPr>
-        <p:spPr>
-          <a:xfrm>
-            <a:off x="8577072" y="2889504"/>
-            <a:ext cx="2606040" cy="402336"/>
-          </a:xfrm>
-          <a:prstGeom prst="rect">
-            <a:avLst/>
-          </a:prstGeom>
-          <a:noFill/>
-          <a:ln/>
-        </p:spPr>
-        <p:txBody>
-          <a:bodyPr wrap="square" lIns="0" tIns="0" rIns="0" bIns="0" rtlCol="0" anchor="ctr"/>
-          <a:lstStyle/>
-          <a:p>
-            <a:pPr indent="0" marL="0">
-              <a:buNone/>
-            </a:pPr>
-            <a:r>
-              <a:rPr lang="en-US" sz="1030" dirty="0">
+          <p:cNvPr id="23" name="Text 20"/>
+          <p:cNvSpPr/>
+          <p:nvPr/>
+        </p:nvSpPr>
+        <p:spPr>
+          <a:xfrm>
+            <a:off x="8577072" y="4096512"/>
+            <a:ext cx="2606040" cy="329184"/>
+          </a:xfrm>
+          <a:prstGeom prst="rect">
+            <a:avLst/>
+          </a:prstGeom>
+          <a:noFill/>
+          <a:ln/>
+        </p:spPr>
+        <p:txBody>
+          <a:bodyPr wrap="square" lIns="0" tIns="0" rIns="0" bIns="0" rtlCol="0" anchor="ctr"/>
+          <a:lstStyle/>
+          <a:p>
+            <a:pPr indent="0" marL="0">
+              <a:buNone/>
+            </a:pPr>
+            <a:r>
+              <a:rPr lang="en-US" sz="970" dirty="0">
                 <a:solidFill>
                   <a:srgbClr val="776C64"/>
                 </a:solidFill>
@@ -6127,21 +6461,21 @@
                 <a:ea typeface="Hiragino Sans" pitchFamily="34" charset="-122"/>
                 <a:cs typeface="Hiragino Sans" pitchFamily="34" charset="-120"/>
               </a:rPr>
-              <a:t>background扱い、pork周辺の混同、検出漏れが発生</a:t>
-            </a:r>
-            <a:endParaRPr lang="en-US" sz="1030" dirty="0"/>
-          </a:p>
-        </p:txBody>
-      </p:sp>
-      <p:sp>
-        <p:nvSpPr>
-          <p:cNvPr id="16" name="Shape 13"/>
-          <p:cNvSpPr/>
-          <p:nvPr/>
-        </p:nvSpPr>
-        <p:spPr>
-          <a:xfrm>
-            <a:off x="6446520" y="3438144"/>
+              <a:t>重なりケースでは、別の肉も pork と誤って認定されることが多い</a:t>
+            </a:r>
+            <a:endParaRPr lang="en-US" sz="970" dirty="0"/>
+          </a:p>
+        </p:txBody>
+      </p:sp>
+      <p:sp>
+        <p:nvSpPr>
+          <p:cNvPr id="24" name="Shape 21"/>
+          <p:cNvSpPr/>
+          <p:nvPr/>
+        </p:nvSpPr>
+        <p:spPr>
+          <a:xfrm>
+            <a:off x="6446520" y="4535424"/>
             <a:ext cx="4663440" cy="0"/>
           </a:xfrm>
           <a:prstGeom prst="line">
@@ -6158,135 +6492,7 @@
       </p:sp>
       <p:sp>
         <p:nvSpPr>
-          <p:cNvPr id="17" name="Shape 14"/>
-          <p:cNvSpPr/>
-          <p:nvPr/>
-        </p:nvSpPr>
-        <p:spPr>
-          <a:xfrm>
-            <a:off x="6446520" y="3886200"/>
-            <a:ext cx="128016" cy="128016"/>
-          </a:xfrm>
-          <a:prstGeom prst="rect">
-            <a:avLst/>
-          </a:prstGeom>
-          <a:solidFill>
-            <a:srgbClr val="305C8A"/>
-          </a:solidFill>
-          <a:ln w="12700">
-            <a:solidFill>
-              <a:srgbClr val="305C8A">
-                <a:alpha val="0"/>
-              </a:srgbClr>
-            </a:solidFill>
-            <a:prstDash val="solid"/>
-          </a:ln>
-        </p:spPr>
-      </p:sp>
-      <p:sp>
-        <p:nvSpPr>
-          <p:cNvPr id="18" name="Text 15"/>
-          <p:cNvSpPr/>
-          <p:nvPr/>
-        </p:nvSpPr>
-        <p:spPr>
-          <a:xfrm>
-            <a:off x="6812280" y="3840480"/>
-            <a:ext cx="1554480" cy="146304"/>
-          </a:xfrm>
-          <a:prstGeom prst="rect">
-            <a:avLst/>
-          </a:prstGeom>
-          <a:noFill/>
-          <a:ln/>
-        </p:spPr>
-        <p:txBody>
-          <a:bodyPr wrap="square" lIns="0" tIns="0" rIns="0" bIns="0" rtlCol="0" anchor="ctr"/>
-          <a:lstStyle/>
-          <a:p>
-            <a:pPr indent="0" marL="0">
-              <a:buNone/>
-            </a:pPr>
-            <a:r>
-              <a:rPr lang="en-US" sz="1040" b="1" dirty="0">
-                <a:solidFill>
-                  <a:srgbClr val="1F1A17"/>
-                </a:solidFill>
-                <a:latin typeface="Hiragino Sans" pitchFamily="34" charset="0"/>
-                <a:ea typeface="Hiragino Sans" pitchFamily="34" charset="-122"/>
-                <a:cs typeface="Hiragino Sans" pitchFamily="34" charset="-120"/>
-              </a:rPr>
-              <a:t>新たな発見</a:t>
-            </a:r>
-            <a:endParaRPr lang="en-US" sz="1040" dirty="0"/>
-          </a:p>
-        </p:txBody>
-      </p:sp>
-      <p:sp>
-        <p:nvSpPr>
-          <p:cNvPr id="19" name="Text 16"/>
-          <p:cNvSpPr/>
-          <p:nvPr/>
-        </p:nvSpPr>
-        <p:spPr>
-          <a:xfrm>
-            <a:off x="8577072" y="3849624"/>
-            <a:ext cx="2606040" cy="402336"/>
-          </a:xfrm>
-          <a:prstGeom prst="rect">
-            <a:avLst/>
-          </a:prstGeom>
-          <a:noFill/>
-          <a:ln/>
-        </p:spPr>
-        <p:txBody>
-          <a:bodyPr wrap="square" lIns="0" tIns="0" rIns="0" bIns="0" rtlCol="0" anchor="ctr"/>
-          <a:lstStyle/>
-          <a:p>
-            <a:pPr indent="0" marL="0">
-              <a:buNone/>
-            </a:pPr>
-            <a:r>
-              <a:rPr lang="en-US" sz="1030" dirty="0">
-                <a:solidFill>
-                  <a:srgbClr val="776C64"/>
-                </a:solidFill>
-                <a:latin typeface="Hiragino Sans" pitchFamily="34" charset="0"/>
-                <a:ea typeface="Hiragino Sans" pitchFamily="34" charset="-122"/>
-                <a:cs typeface="Hiragino Sans" pitchFamily="34" charset="-120"/>
-              </a:rPr>
-              <a:t>肉そのものだけでなく、背景や撮影条件が結果に影響する</a:t>
-            </a:r>
-            <a:endParaRPr lang="en-US" sz="1030" dirty="0"/>
-          </a:p>
-        </p:txBody>
-      </p:sp>
-      <p:sp>
-        <p:nvSpPr>
-          <p:cNvPr id="20" name="Shape 17"/>
-          <p:cNvSpPr/>
-          <p:nvPr/>
-        </p:nvSpPr>
-        <p:spPr>
-          <a:xfrm>
-            <a:off x="6446520" y="4398264"/>
-            <a:ext cx="4663440" cy="0"/>
-          </a:xfrm>
-          <a:prstGeom prst="line">
-            <a:avLst/>
-          </a:prstGeom>
-          <a:noFill/>
-          <a:ln w="8890">
-            <a:solidFill>
-              <a:srgbClr val="E4DAD2"/>
-            </a:solidFill>
-            <a:prstDash val="solid"/>
-          </a:ln>
-        </p:spPr>
-      </p:sp>
-      <p:sp>
-        <p:nvSpPr>
-          <p:cNvPr id="21" name="Shape 18"/>
+          <p:cNvPr id="25" name="Shape 22"/>
           <p:cNvSpPr/>
           <p:nvPr/>
         </p:nvSpPr>
@@ -6313,7 +6519,7 @@
       </p:sp>
       <p:sp>
         <p:nvSpPr>
-          <p:cNvPr id="22" name="Text 19"/>
+          <p:cNvPr id="26" name="Text 23"/>
           <p:cNvSpPr/>
           <p:nvPr/>
         </p:nvSpPr>
@@ -6352,7 +6558,7 @@
       </p:sp>
       <p:sp>
         <p:nvSpPr>
-          <p:cNvPr id="23" name="Text 20"/>
+          <p:cNvPr id="27" name="Text 24"/>
           <p:cNvSpPr/>
           <p:nvPr/>
         </p:nvSpPr>
@@ -6383,7 +6589,7 @@
                 <a:ea typeface="Hiragino Sans" pitchFamily="34" charset="-122"/>
                 <a:cs typeface="Hiragino Sans" pitchFamily="34" charset="-120"/>
               </a:rPr>
-              <a:t>実用化には、モデル改善より先にデータ多様性の確保が重要</a:t>
+              <a:t>背景差だけでなく、肉同士の重なりを含むデータ多様性が重要</a:t>
             </a:r>
             <a:endParaRPr lang="en-US" sz="1260" dirty="0"/>
           </a:p>
@@ -6727,7 +6933,7 @@
                 <a:ea typeface="Hiragino Sans" pitchFamily="34" charset="-122"/>
                 <a:cs typeface="Hiragino Sans" pitchFamily="34" charset="-120"/>
               </a:rPr>
-              <a:t>残った課題</a:t>
+              <a:t>課題1</a:t>
             </a:r>
             <a:endParaRPr lang="en-US" sz="920" dirty="0"/>
           </a:p>
@@ -6766,7 +6972,7 @@
                 <a:ea typeface="Hiragino Sans" pitchFamily="34" charset="-122"/>
                 <a:cs typeface="Hiragino Sans" pitchFamily="34" charset="-120"/>
               </a:rPr>
-              <a:t>照明、部位、背景が誤分類や検出漏れにつながった</a:t>
+              <a:t>照明、部位、背景差が誤分類や検出漏れにつながった</a:t>
             </a:r>
             <a:endParaRPr lang="en-US" sz="1100" dirty="0"/>
           </a:p>
@@ -6805,7 +7011,7 @@
                 <a:ea typeface="Hiragino Sans" pitchFamily="34" charset="-122"/>
                 <a:cs typeface="Hiragino Sans" pitchFamily="34" charset="-120"/>
               </a:rPr>
-              <a:t>今後</a:t>
+              <a:t>課題2</a:t>
             </a:r>
             <a:endParaRPr lang="en-US" sz="920" dirty="0"/>
           </a:p>
@@ -6844,7 +7050,7 @@
                 <a:ea typeface="Hiragino Sans" pitchFamily="34" charset="-122"/>
                 <a:cs typeface="Hiragino Sans" pitchFamily="34" charset="-120"/>
               </a:rPr>
-              <a:t>多様な画像追加、背景条件の比較、他モデルとの比較を行う</a:t>
+              <a:t>肉同士が重なるケースの判別に向けて追加学習を進めている</a:t>
             </a:r>
             <a:endParaRPr lang="en-US" sz="1100" dirty="0"/>
           </a:p>
@@ -6883,7 +7089,7 @@
                 <a:ea typeface="Hiragino Sans" pitchFamily="34" charset="-122"/>
                 <a:cs typeface="Hiragino Sans" pitchFamily="34" charset="-120"/>
               </a:rPr>
-              <a:t>今後は、実際の利用環境でも安定して判定できるモデルを目指す。</a:t>
+              <a:t>今後は、背景が違っても、肉同士が重なっても安定して判定できるモデルを目指す。</a:t>
             </a:r>
             <a:endParaRPr lang="en-US" sz="1180" dirty="0"/>
           </a:p>
@@ -8106,7 +8312,7 @@
               <a:buNone/>
             </a:pPr>
             <a:r>
-              <a:rPr lang="en-US" sz="1721" b="1" dirty="0">
+              <a:rPr lang="en-US" sz="1788" b="1" dirty="0">
                 <a:solidFill>
                   <a:srgbClr val="1F1A17"/>
                 </a:solidFill>
@@ -8114,9 +8320,9 @@
                 <a:ea typeface="Hiragino Sans" pitchFamily="34" charset="-122"/>
                 <a:cs typeface="Hiragino Sans" pitchFamily="34" charset="-120"/>
               </a:rPr>
-              <a:t>肉の種類は目視で判断されるが、画像上の見え方は安定しない</a:t>
-            </a:r>
-            <a:endParaRPr lang="en-US" sz="1721" dirty="0"/>
+              <a:t>自動調理では、食材を見分けて調理条件を変える必要がある</a:t>
+            </a:r>
+            <a:endParaRPr lang="en-US" sz="1788" dirty="0"/>
           </a:p>
         </p:txBody>
       </p:sp>
@@ -8153,7 +8359,7 @@
                 <a:ea typeface="Hiragino Sans" pitchFamily="34" charset="-122"/>
                 <a:cs typeface="Hiragino Sans" pitchFamily="34" charset="-120"/>
               </a:rPr>
-              <a:t>食品管理、食材分類、料理記録では、画像から肉種を自動判定できると有用である。</a:t>
+              <a:t>肉の種類を画像から判定できれば、加熱時間や火力、調理手順を機械が選ぶための入力として使える。</a:t>
             </a:r>
             <a:endParaRPr lang="en-US" sz="1440" dirty="0"/>
           </a:p>
@@ -8219,7 +8425,7 @@
                 <a:ea typeface="Hiragino Sans" pitchFamily="34" charset="-122"/>
                 <a:cs typeface="Hiragino Sans" pitchFamily="34" charset="-120"/>
               </a:rPr>
-              <a:t>色</a:t>
+              <a:t>肉種</a:t>
             </a:r>
             <a:endParaRPr lang="en-US" sz="1650" dirty="0"/>
           </a:p>
@@ -8258,7 +8464,7 @@
                 <a:ea typeface="Hiragino Sans" pitchFamily="34" charset="-122"/>
                 <a:cs typeface="Hiragino Sans" pitchFamily="34" charset="-120"/>
               </a:rPr>
-              <a:t>照明で赤みや白さが変わる</a:t>
+              <a:t>牛・豚・鶏・羊で適した加熱条件が異なる</a:t>
             </a:r>
             <a:endParaRPr lang="en-US" sz="1000" dirty="0"/>
           </a:p>
@@ -8324,7 +8530,7 @@
                 <a:ea typeface="Hiragino Sans" pitchFamily="34" charset="-122"/>
                 <a:cs typeface="Hiragino Sans" pitchFamily="34" charset="-120"/>
               </a:rPr>
-              <a:t>脂身</a:t>
+              <a:t>状態</a:t>
             </a:r>
             <a:endParaRPr lang="en-US" sz="1650" dirty="0"/>
           </a:p>
@@ -8363,7 +8569,7 @@
                 <a:ea typeface="Hiragino Sans" pitchFamily="34" charset="-122"/>
                 <a:cs typeface="Hiragino Sans" pitchFamily="34" charset="-120"/>
               </a:rPr>
-              <a:t>部位や切り方で分布が変わる</a:t>
+              <a:t>部位や切り方で火の通り方が変わる</a:t>
             </a:r>
             <a:endParaRPr lang="en-US" sz="1000" dirty="0"/>
           </a:p>
@@ -8429,7 +8635,7 @@
                 <a:ea typeface="Hiragino Sans" pitchFamily="34" charset="-122"/>
                 <a:cs typeface="Hiragino Sans" pitchFamily="34" charset="-120"/>
               </a:rPr>
-              <a:t>形状</a:t>
+              <a:t>見え方</a:t>
             </a:r>
             <a:endParaRPr lang="en-US" sz="1650" dirty="0"/>
           </a:p>
@@ -8468,7 +8674,7 @@
                 <a:ea typeface="Hiragino Sans" pitchFamily="34" charset="-122"/>
                 <a:cs typeface="Hiragino Sans" pitchFamily="34" charset="-120"/>
               </a:rPr>
-              <a:t>一部だけ写ると特徴が減る</a:t>
+              <a:t>照明や重なりで画像特徴が揺れる</a:t>
             </a:r>
             <a:endParaRPr lang="en-US" sz="1000" dirty="0"/>
           </a:p>
@@ -8596,7 +8802,7 @@
                 <a:ea typeface="Hiragino Sans" pitchFamily="34" charset="-122"/>
                 <a:cs typeface="Hiragino Sans" pitchFamily="34" charset="-120"/>
               </a:rPr>
-              <a:t>人の判断が揺れる条件は、モデルの判断も揺らす</a:t>
+              <a:t>調理判断の前段として、肉種を安定して検出する必要がある</a:t>
             </a:r>
             <a:endParaRPr lang="en-US" sz="1020" dirty="0"/>
           </a:p>
@@ -9804,9 +10010,73 @@
           </a:p>
         </p:txBody>
       </p:sp>
+      <p:sp>
+        <p:nvSpPr>
+          <p:cNvPr id="7" name="Text 5"/>
+          <p:cNvSpPr/>
+          <p:nvPr/>
+        </p:nvSpPr>
+        <p:spPr>
+          <a:xfrm>
+            <a:off x="694944" y="1325880"/>
+            <a:ext cx="8046720" cy="274320"/>
+          </a:xfrm>
+          <a:prstGeom prst="rect">
+            <a:avLst/>
+          </a:prstGeom>
+          <a:noFill/>
+          <a:ln/>
+        </p:spPr>
+        <p:txBody>
+          <a:bodyPr wrap="square" lIns="0" tIns="0" rIns="0" bIns="0" rtlCol="0" anchor="ctr"/>
+          <a:lstStyle/>
+          <a:p>
+            <a:pPr indent="0" marL="0">
+              <a:buNone/>
+            </a:pPr>
+            <a:r>
+              <a:rPr lang="en-US" sz="2100" b="1" dirty="0">
+                <a:solidFill>
+                  <a:srgbClr val="1F1A17"/>
+                </a:solidFill>
+                <a:latin typeface="Hiragino Sans" pitchFamily="34" charset="0"/>
+                <a:ea typeface="Hiragino Sans" pitchFamily="34" charset="-122"/>
+                <a:cs typeface="Hiragino Sans" pitchFamily="34" charset="-120"/>
+              </a:rPr>
+              <a:t>現在は2つの難所を分けて扱うため、追加データで学習を進めている</a:t>
+            </a:r>
+            <a:endParaRPr lang="en-US" sz="2100" dirty="0"/>
+          </a:p>
+        </p:txBody>
+      </p:sp>
+      <p:sp>
+        <p:nvSpPr>
+          <p:cNvPr id="8" name="Shape 6"/>
+          <p:cNvSpPr/>
+          <p:nvPr/>
+        </p:nvSpPr>
+        <p:spPr>
+          <a:xfrm>
+            <a:off x="713232" y="1874520"/>
+            <a:ext cx="4992624" cy="3246120"/>
+          </a:xfrm>
+          <a:prstGeom prst="rect">
+            <a:avLst/>
+          </a:prstGeom>
+          <a:solidFill>
+            <a:srgbClr val="FFFDF9"/>
+          </a:solidFill>
+          <a:ln w="12700">
+            <a:solidFill>
+              <a:srgbClr val="E4DAD2"/>
+            </a:solidFill>
+            <a:prstDash val="solid"/>
+          </a:ln>
+        </p:spPr>
+      </p:sp>
       <p:pic>
         <p:nvPicPr>
-          <p:cNvPr id="7" name="Image 0" descr="/Users/abesouichirou/Documents/utokyo_lecture/programming1/detect_results/predict/istockphoto-1300699678-612x612_jpg.rf.40f23d801c52831b734920aeb4ea53c2.jpg">    </p:cNvPr>
+          <p:cNvPr id="9" name="Image 0" descr="/Users/abesouichirou/Documents/utokyo_lecture/programming1/detect_results/predict/pngtree-red-meat-on-a-white-cut-out-picture-image_13276259_png.rf.b5d2f746cfb72290f0109194277ae8b2.jpg">    </p:cNvPr>
           <p:cNvPicPr>
             <a:picLocks noChangeAspect="1"/>
           </p:cNvPicPr>
@@ -9819,47 +10089,51 @@
         </p:blipFill>
         <p:spPr>
           <a:xfrm>
-            <a:off x="676656" y="1325880"/>
-            <a:ext cx="2880360" cy="2880360"/>
+            <a:off x="950976" y="2139696"/>
+            <a:ext cx="2057400" cy="2057400"/>
           </a:xfrm>
           <a:prstGeom prst="rect">
             <a:avLst/>
           </a:prstGeom>
         </p:spPr>
       </p:pic>
-      <p:pic>
-        <p:nvPicPr>
-          <p:cNvPr id="8" name="Image 1" descr="/Users/abesouichirou/Documents/utokyo_lecture/programming1/detect_results/predict/category-pork-1024x768_png.rf.572d8e91e0194c0c525ee4144dfe7ca4.jpg">    </p:cNvPr>
-          <p:cNvPicPr>
-            <a:picLocks noChangeAspect="1"/>
-          </p:cNvPicPr>
-          <p:nvPr/>
-        </p:nvPicPr>
-        <p:blipFill>
-          <a:blip r:embed="rId2"/>
-          <a:srcRect l="0" r="0" t="0" b="0"/>
-          <a:stretch/>
-        </p:blipFill>
-        <p:spPr>
-          <a:xfrm>
-            <a:off x="3749040" y="1325880"/>
-            <a:ext cx="2880360" cy="2880360"/>
-          </a:xfrm>
-          <a:prstGeom prst="rect">
-            <a:avLst/>
-          </a:prstGeom>
-        </p:spPr>
-      </p:pic>
-      <p:sp>
-        <p:nvSpPr>
-          <p:cNvPr id="9" name="Shape 5"/>
-          <p:cNvSpPr/>
-          <p:nvPr/>
-        </p:nvSpPr>
-        <p:spPr>
-          <a:xfrm>
-            <a:off x="676656" y="4462272"/>
-            <a:ext cx="5943600" cy="64008"/>
+      <p:sp>
+        <p:nvSpPr>
+          <p:cNvPr id="10" name="Shape 7"/>
+          <p:cNvSpPr/>
+          <p:nvPr/>
+        </p:nvSpPr>
+        <p:spPr>
+          <a:xfrm>
+            <a:off x="950976" y="2139696"/>
+            <a:ext cx="2057400" cy="2057400"/>
+          </a:xfrm>
+          <a:prstGeom prst="rect">
+            <a:avLst/>
+          </a:prstGeom>
+          <a:solidFill>
+            <a:srgbClr val="FFFFFF">
+              <a:alpha val="0"/>
+            </a:srgbClr>
+          </a:solidFill>
+          <a:ln w="15240">
+            <a:solidFill>
+              <a:srgbClr val="8E2335"/>
+            </a:solidFill>
+            <a:prstDash val="solid"/>
+          </a:ln>
+        </p:spPr>
+      </p:sp>
+      <p:sp>
+        <p:nvSpPr>
+          <p:cNvPr id="11" name="Shape 8"/>
+          <p:cNvSpPr/>
+          <p:nvPr/>
+        </p:nvSpPr>
+        <p:spPr>
+          <a:xfrm>
+            <a:off x="3319272" y="2148840"/>
+            <a:ext cx="960120" cy="292608"/>
           </a:xfrm>
           <a:prstGeom prst="rect">
             <a:avLst/>
@@ -9879,30 +10153,69 @@
       </p:sp>
       <p:sp>
         <p:nvSpPr>
-          <p:cNvPr id="10" name="Text 6"/>
-          <p:cNvSpPr/>
-          <p:nvPr/>
-        </p:nvSpPr>
-        <p:spPr>
-          <a:xfrm>
-            <a:off x="713232" y="4773168"/>
-            <a:ext cx="5349240" cy="274320"/>
-          </a:xfrm>
-          <a:prstGeom prst="rect">
-            <a:avLst/>
-          </a:prstGeom>
-          <a:noFill/>
-          <a:ln/>
-        </p:spPr>
-        <p:txBody>
-          <a:bodyPr wrap="square" lIns="0" tIns="0" rIns="0" bIns="0" rtlCol="0" anchor="ctr"/>
-          <a:lstStyle/>
-          <a:p>
-            <a:pPr indent="0" marL="0">
-              <a:buNone/>
-            </a:pPr>
-            <a:r>
-              <a:rPr lang="en-US" sz="2200" b="1" dirty="0">
+          <p:cNvPr id="12" name="Text 9"/>
+          <p:cNvSpPr/>
+          <p:nvPr/>
+        </p:nvSpPr>
+        <p:spPr>
+          <a:xfrm>
+            <a:off x="3410712" y="2208276"/>
+            <a:ext cx="777240" cy="128016"/>
+          </a:xfrm>
+          <a:prstGeom prst="rect">
+            <a:avLst/>
+          </a:prstGeom>
+          <a:noFill/>
+          <a:ln/>
+        </p:spPr>
+        <p:txBody>
+          <a:bodyPr wrap="square" lIns="0" tIns="0" rIns="0" bIns="0" rtlCol="0" anchor="ctr"/>
+          <a:lstStyle/>
+          <a:p>
+            <a:pPr algn="ctr" indent="0" marL="0">
+              <a:buNone/>
+            </a:pPr>
+            <a:r>
+              <a:rPr lang="en-US" sz="760" b="1" dirty="0">
+                <a:solidFill>
+                  <a:srgbClr val="FFFFFF"/>
+                </a:solidFill>
+                <a:latin typeface="Hiragino Sans" pitchFamily="34" charset="0"/>
+                <a:ea typeface="Hiragino Sans" pitchFamily="34" charset="-122"/>
+                <a:cs typeface="Hiragino Sans" pitchFamily="34" charset="-120"/>
+              </a:rPr>
+              <a:t>課題1</a:t>
+            </a:r>
+            <a:endParaRPr lang="en-US" sz="760" dirty="0"/>
+          </a:p>
+        </p:txBody>
+      </p:sp>
+      <p:sp>
+        <p:nvSpPr>
+          <p:cNvPr id="13" name="Text 10"/>
+          <p:cNvSpPr/>
+          <p:nvPr/>
+        </p:nvSpPr>
+        <p:spPr>
+          <a:xfrm>
+            <a:off x="3319272" y="2670048"/>
+            <a:ext cx="1828800" cy="219456"/>
+          </a:xfrm>
+          <a:prstGeom prst="rect">
+            <a:avLst/>
+          </a:prstGeom>
+          <a:noFill/>
+          <a:ln/>
+        </p:spPr>
+        <p:txBody>
+          <a:bodyPr wrap="square" lIns="0" tIns="0" rIns="0" bIns="0" rtlCol="0" anchor="ctr"/>
+          <a:lstStyle/>
+          <a:p>
+            <a:pPr indent="0" marL="0">
+              <a:buNone/>
+            </a:pPr>
+            <a:r>
+              <a:rPr lang="en-US" sz="1800" b="1" dirty="0">
                 <a:solidFill>
                   <a:srgbClr val="1F1A17"/>
                 </a:solidFill>
@@ -9910,100 +10223,200 @@
                 <a:ea typeface="Hiragino Sans" pitchFamily="34" charset="-122"/>
                 <a:cs typeface="Hiragino Sans" pitchFamily="34" charset="-120"/>
               </a:rPr>
-              <a:t>似ている見た目が、誤分類の原因になる</a:t>
-            </a:r>
-            <a:endParaRPr lang="en-US" sz="2200" dirty="0"/>
-          </a:p>
-        </p:txBody>
-      </p:sp>
-      <p:sp>
-        <p:nvSpPr>
-          <p:cNvPr id="11" name="Text 7"/>
-          <p:cNvSpPr/>
-          <p:nvPr/>
-        </p:nvSpPr>
-        <p:spPr>
-          <a:xfrm>
-            <a:off x="7178040" y="1389888"/>
-            <a:ext cx="4389120" cy="3154680"/>
-          </a:xfrm>
-          <a:prstGeom prst="rect">
-            <a:avLst/>
-          </a:prstGeom>
-          <a:noFill/>
-          <a:ln/>
-        </p:spPr>
-        <p:txBody>
-          <a:bodyPr wrap="square" lIns="1016" tIns="1016" rIns="1016" bIns="1016" rtlCol="0" anchor="t"/>
-          <a:lstStyle/>
-          <a:p>
-            <a:r>
-              <a:rPr lang="en-US" sz="1520" dirty="0">
-                <a:solidFill>
-                  <a:srgbClr val="1F1A17"/>
-                </a:solidFill>
-                <a:latin typeface="Hiragino Sans" pitchFamily="34" charset="0"/>
-                <a:ea typeface="Hiragino Sans" pitchFamily="34" charset="-122"/>
-                <a:cs typeface="Hiragino Sans" pitchFamily="34" charset="-120"/>
-              </a:rPr>
-              <a:t>色や脂身が似るクラスがある</a:t>
-            </a:r>
-            <a:endParaRPr lang="en-US" sz="1520" dirty="0"/>
-          </a:p>
-          <a:p>
-            <a:r>
-              <a:rPr lang="en-US" sz="1520" dirty="0">
-                <a:solidFill>
-                  <a:srgbClr val="1F1A17"/>
-                </a:solidFill>
-                <a:latin typeface="Hiragino Sans" pitchFamily="34" charset="0"/>
-                <a:ea typeface="Hiragino Sans" pitchFamily="34" charset="-122"/>
-                <a:cs typeface="Hiragino Sans" pitchFamily="34" charset="-120"/>
-              </a:rPr>
-              <a:t>同じクラスでも部位や切り方で変化する</a:t>
-            </a:r>
-            <a:endParaRPr lang="en-US" sz="1520" dirty="0"/>
-          </a:p>
-          <a:p>
-            <a:r>
-              <a:rPr lang="en-US" sz="1520" dirty="0">
-                <a:solidFill>
-                  <a:srgbClr val="1F1A17"/>
-                </a:solidFill>
-                <a:latin typeface="Hiragino Sans" pitchFamily="34" charset="0"/>
-                <a:ea typeface="Hiragino Sans" pitchFamily="34" charset="-122"/>
-                <a:cs typeface="Hiragino Sans" pitchFamily="34" charset="-120"/>
-              </a:rPr>
-              <a:t>背景、トレー、包装を手がかりにするリスクがある</a:t>
-            </a:r>
-            <a:endParaRPr lang="en-US" sz="1520" dirty="0"/>
-          </a:p>
-          <a:p>
-            <a:r>
-              <a:rPr lang="en-US" sz="1520" dirty="0">
-                <a:solidFill>
-                  <a:srgbClr val="1F1A17"/>
-                </a:solidFill>
-                <a:latin typeface="Hiragino Sans" pitchFamily="34" charset="0"/>
-                <a:ea typeface="Hiragino Sans" pitchFamily="34" charset="-122"/>
-                <a:cs typeface="Hiragino Sans" pitchFamily="34" charset="-120"/>
-              </a:rPr>
-              <a:t>画像枚数が少ないと撮影条件に過学習しやすい</a:t>
-            </a:r>
-            <a:endParaRPr lang="en-US" sz="1520" dirty="0"/>
-          </a:p>
-        </p:txBody>
-      </p:sp>
-      <p:sp>
-        <p:nvSpPr>
-          <p:cNvPr id="12" name="Shape 8"/>
-          <p:cNvSpPr/>
-          <p:nvPr/>
-        </p:nvSpPr>
-        <p:spPr>
-          <a:xfrm>
-            <a:off x="7178040" y="4782312"/>
-            <a:ext cx="1371600" cy="292608"/>
+              <a:t>背景の差</a:t>
+            </a:r>
+            <a:endParaRPr lang="en-US" sz="1800" dirty="0"/>
+          </a:p>
+        </p:txBody>
+      </p:sp>
+      <p:sp>
+        <p:nvSpPr>
+          <p:cNvPr id="14" name="Text 11"/>
+          <p:cNvSpPr/>
+          <p:nvPr/>
+        </p:nvSpPr>
+        <p:spPr>
+          <a:xfrm>
+            <a:off x="3319272" y="3127248"/>
+            <a:ext cx="1965960" cy="713232"/>
+          </a:xfrm>
+          <a:prstGeom prst="rect">
+            <a:avLst/>
+          </a:prstGeom>
+          <a:noFill/>
+          <a:ln/>
+        </p:spPr>
+        <p:txBody>
+          <a:bodyPr wrap="square" lIns="0" tIns="0" rIns="0" bIns="0" rtlCol="0" anchor="ctr">
+            <a:normAutofit/>
+          </a:bodyPr>
+          <a:lstStyle/>
+          <a:p>
+            <a:pPr indent="0" marL="0">
+              <a:buNone/>
+            </a:pPr>
+            <a:r>
+              <a:rPr lang="en-US" sz="1080" dirty="0">
+                <a:solidFill>
+                  <a:srgbClr val="776C64"/>
+                </a:solidFill>
+                <a:latin typeface="Hiragino Sans" pitchFamily="34" charset="0"/>
+                <a:ea typeface="Hiragino Sans" pitchFamily="34" charset="-122"/>
+                <a:cs typeface="Hiragino Sans" pitchFamily="34" charset="-120"/>
+              </a:rPr>
+              <a:t>皿、まな板、白背景などの撮影条件に引っ張られず、肉そのものの特徴で判定する。</a:t>
+            </a:r>
+            <a:endParaRPr lang="en-US" sz="1080" dirty="0"/>
+          </a:p>
+        </p:txBody>
+      </p:sp>
+      <p:sp>
+        <p:nvSpPr>
+          <p:cNvPr id="15" name="Shape 12"/>
+          <p:cNvSpPr/>
+          <p:nvPr/>
+        </p:nvSpPr>
+        <p:spPr>
+          <a:xfrm>
+            <a:off x="950976" y="4480560"/>
+            <a:ext cx="4480560" cy="0"/>
+          </a:xfrm>
+          <a:prstGeom prst="line">
+            <a:avLst/>
+          </a:prstGeom>
+          <a:noFill/>
+          <a:ln w="15240">
+            <a:solidFill>
+              <a:srgbClr val="8E2335"/>
+            </a:solidFill>
+            <a:prstDash val="solid"/>
+          </a:ln>
+        </p:spPr>
+      </p:sp>
+      <p:sp>
+        <p:nvSpPr>
+          <p:cNvPr id="16" name="Text 13"/>
+          <p:cNvSpPr/>
+          <p:nvPr/>
+        </p:nvSpPr>
+        <p:spPr>
+          <a:xfrm>
+            <a:off x="969264" y="4681728"/>
+            <a:ext cx="4297680" cy="146304"/>
+          </a:xfrm>
+          <a:prstGeom prst="rect">
+            <a:avLst/>
+          </a:prstGeom>
+          <a:noFill/>
+          <a:ln/>
+        </p:spPr>
+        <p:txBody>
+          <a:bodyPr wrap="square" lIns="0" tIns="0" rIns="0" bIns="0" rtlCol="0" anchor="ctr"/>
+          <a:lstStyle/>
+          <a:p>
+            <a:pPr indent="0" marL="0">
+              <a:buNone/>
+            </a:pPr>
+            <a:r>
+              <a:rPr lang="en-US" sz="920" dirty="0">
+                <a:solidFill>
+                  <a:srgbClr val="776C64"/>
+                </a:solidFill>
+                <a:latin typeface="Hiragino Sans" pitchFamily="34" charset="0"/>
+                <a:ea typeface="Hiragino Sans" pitchFamily="34" charset="-122"/>
+                <a:cs typeface="Hiragino Sans" pitchFamily="34" charset="-120"/>
+              </a:rPr>
+              <a:t>背景・切り抜き条件が異なる例</a:t>
+            </a:r>
+            <a:endParaRPr lang="en-US" sz="920" dirty="0"/>
+          </a:p>
+        </p:txBody>
+      </p:sp>
+      <p:sp>
+        <p:nvSpPr>
+          <p:cNvPr id="17" name="Shape 14"/>
+          <p:cNvSpPr/>
+          <p:nvPr/>
+        </p:nvSpPr>
+        <p:spPr>
+          <a:xfrm>
+            <a:off x="6309360" y="1874520"/>
+            <a:ext cx="4992624" cy="3246120"/>
+          </a:xfrm>
+          <a:prstGeom prst="rect">
+            <a:avLst/>
+          </a:prstGeom>
+          <a:solidFill>
+            <a:srgbClr val="FFFDF9"/>
+          </a:solidFill>
+          <a:ln w="12700">
+            <a:solidFill>
+              <a:srgbClr val="E4DAD2"/>
+            </a:solidFill>
+            <a:prstDash val="solid"/>
+          </a:ln>
+        </p:spPr>
+      </p:sp>
+      <p:pic>
+        <p:nvPicPr>
+          <p:cNvPr id="18" name="Image 1" descr="/Users/abesouichirou/Documents/utokyo_lecture/programming1/detect_results/predict/IMG_2531_jpg.rf.f79a1b88fc9ef9a5564c42be115c7bb8.jpg">    </p:cNvPr>
+          <p:cNvPicPr>
+            <a:picLocks noChangeAspect="1"/>
+          </p:cNvPicPr>
+          <p:nvPr/>
+        </p:nvPicPr>
+        <p:blipFill>
+          <a:blip r:embed="rId2"/>
+          <a:srcRect l="0" r="0" t="0" b="0"/>
+          <a:stretch/>
+        </p:blipFill>
+        <p:spPr>
+          <a:xfrm>
+            <a:off x="6547104" y="2139696"/>
+            <a:ext cx="2057400" cy="2057400"/>
+          </a:xfrm>
+          <a:prstGeom prst="rect">
+            <a:avLst/>
+          </a:prstGeom>
+        </p:spPr>
+      </p:pic>
+      <p:sp>
+        <p:nvSpPr>
+          <p:cNvPr id="19" name="Shape 15"/>
+          <p:cNvSpPr/>
+          <p:nvPr/>
+        </p:nvSpPr>
+        <p:spPr>
+          <a:xfrm>
+            <a:off x="6547104" y="2139696"/>
+            <a:ext cx="2057400" cy="2057400"/>
+          </a:xfrm>
+          <a:prstGeom prst="rect">
+            <a:avLst/>
+          </a:prstGeom>
+          <a:solidFill>
+            <a:srgbClr val="FFFFFF">
+              <a:alpha val="0"/>
+            </a:srgbClr>
+          </a:solidFill>
+          <a:ln w="15240">
+            <a:solidFill>
+              <a:srgbClr val="1BAE9D"/>
+            </a:solidFill>
+            <a:prstDash val="solid"/>
+          </a:ln>
+        </p:spPr>
+      </p:sp>
+      <p:sp>
+        <p:nvSpPr>
+          <p:cNvPr id="20" name="Shape 16"/>
+          <p:cNvSpPr/>
+          <p:nvPr/>
+        </p:nvSpPr>
+        <p:spPr>
+          <a:xfrm>
+            <a:off x="8915400" y="2148840"/>
+            <a:ext cx="960120" cy="292608"/>
           </a:xfrm>
           <a:prstGeom prst="rect">
             <a:avLst/>
@@ -10023,13 +10436,221 @@
       </p:sp>
       <p:sp>
         <p:nvSpPr>
-          <p:cNvPr id="13" name="Text 9"/>
-          <p:cNvSpPr/>
-          <p:nvPr/>
-        </p:nvSpPr>
-        <p:spPr>
-          <a:xfrm>
-            <a:off x="7269480" y="4841748"/>
+          <p:cNvPr id="21" name="Text 17"/>
+          <p:cNvSpPr/>
+          <p:nvPr/>
+        </p:nvSpPr>
+        <p:spPr>
+          <a:xfrm>
+            <a:off x="9006840" y="2208276"/>
+            <a:ext cx="777240" cy="128016"/>
+          </a:xfrm>
+          <a:prstGeom prst="rect">
+            <a:avLst/>
+          </a:prstGeom>
+          <a:noFill/>
+          <a:ln/>
+        </p:spPr>
+        <p:txBody>
+          <a:bodyPr wrap="square" lIns="0" tIns="0" rIns="0" bIns="0" rtlCol="0" anchor="ctr"/>
+          <a:lstStyle/>
+          <a:p>
+            <a:pPr algn="ctr" indent="0" marL="0">
+              <a:buNone/>
+            </a:pPr>
+            <a:r>
+              <a:rPr lang="en-US" sz="760" b="1" dirty="0">
+                <a:solidFill>
+                  <a:srgbClr val="FFFFFF"/>
+                </a:solidFill>
+                <a:latin typeface="Hiragino Sans" pitchFamily="34" charset="0"/>
+                <a:ea typeface="Hiragino Sans" pitchFamily="34" charset="-122"/>
+                <a:cs typeface="Hiragino Sans" pitchFamily="34" charset="-120"/>
+              </a:rPr>
+              <a:t>課題2</a:t>
+            </a:r>
+            <a:endParaRPr lang="en-US" sz="760" dirty="0"/>
+          </a:p>
+        </p:txBody>
+      </p:sp>
+      <p:sp>
+        <p:nvSpPr>
+          <p:cNvPr id="22" name="Text 18"/>
+          <p:cNvSpPr/>
+          <p:nvPr/>
+        </p:nvSpPr>
+        <p:spPr>
+          <a:xfrm>
+            <a:off x="8915400" y="2670048"/>
+            <a:ext cx="1828800" cy="219456"/>
+          </a:xfrm>
+          <a:prstGeom prst="rect">
+            <a:avLst/>
+          </a:prstGeom>
+          <a:noFill/>
+          <a:ln/>
+        </p:spPr>
+        <p:txBody>
+          <a:bodyPr wrap="square" lIns="0" tIns="0" rIns="0" bIns="0" rtlCol="0" anchor="ctr"/>
+          <a:lstStyle/>
+          <a:p>
+            <a:pPr indent="0" marL="0">
+              <a:buNone/>
+            </a:pPr>
+            <a:r>
+              <a:rPr lang="en-US" sz="1800" b="1" dirty="0">
+                <a:solidFill>
+                  <a:srgbClr val="1F1A17"/>
+                </a:solidFill>
+                <a:latin typeface="Hiragino Sans" pitchFamily="34" charset="0"/>
+                <a:ea typeface="Hiragino Sans" pitchFamily="34" charset="-122"/>
+                <a:cs typeface="Hiragino Sans" pitchFamily="34" charset="-120"/>
+              </a:rPr>
+              <a:t>肉同士の重なり</a:t>
+            </a:r>
+            <a:endParaRPr lang="en-US" sz="1800" dirty="0"/>
+          </a:p>
+        </p:txBody>
+      </p:sp>
+      <p:sp>
+        <p:nvSpPr>
+          <p:cNvPr id="23" name="Text 19"/>
+          <p:cNvSpPr/>
+          <p:nvPr/>
+        </p:nvSpPr>
+        <p:spPr>
+          <a:xfrm>
+            <a:off x="8915400" y="3127248"/>
+            <a:ext cx="1965960" cy="713232"/>
+          </a:xfrm>
+          <a:prstGeom prst="rect">
+            <a:avLst/>
+          </a:prstGeom>
+          <a:noFill/>
+          <a:ln/>
+        </p:spPr>
+        <p:txBody>
+          <a:bodyPr wrap="square" lIns="0" tIns="0" rIns="0" bIns="0" rtlCol="0" anchor="ctr">
+            <a:normAutofit/>
+          </a:bodyPr>
+          <a:lstStyle/>
+          <a:p>
+            <a:pPr indent="0" marL="0">
+              <a:buNone/>
+            </a:pPr>
+            <a:r>
+              <a:rPr lang="en-US" sz="1080" dirty="0">
+                <a:solidFill>
+                  <a:srgbClr val="776C64"/>
+                </a:solidFill>
+                <a:latin typeface="Hiragino Sans" pitchFamily="34" charset="0"/>
+                <a:ea typeface="Hiragino Sans" pitchFamily="34" charset="-122"/>
+                <a:cs typeface="Hiragino Sans" pitchFamily="34" charset="-120"/>
+              </a:rPr>
+              <a:t>複数の肉片が接触・重なっている場合でも、1つずつの領域と種類を分けて検出する。</a:t>
+            </a:r>
+            <a:endParaRPr lang="en-US" sz="1080" dirty="0"/>
+          </a:p>
+        </p:txBody>
+      </p:sp>
+      <p:sp>
+        <p:nvSpPr>
+          <p:cNvPr id="24" name="Shape 20"/>
+          <p:cNvSpPr/>
+          <p:nvPr/>
+        </p:nvSpPr>
+        <p:spPr>
+          <a:xfrm>
+            <a:off x="6547104" y="4480560"/>
+            <a:ext cx="4480560" cy="0"/>
+          </a:xfrm>
+          <a:prstGeom prst="line">
+            <a:avLst/>
+          </a:prstGeom>
+          <a:noFill/>
+          <a:ln w="15240">
+            <a:solidFill>
+              <a:srgbClr val="1BAE9D"/>
+            </a:solidFill>
+            <a:prstDash val="solid"/>
+          </a:ln>
+        </p:spPr>
+      </p:sp>
+      <p:sp>
+        <p:nvSpPr>
+          <p:cNvPr id="25" name="Text 21"/>
+          <p:cNvSpPr/>
+          <p:nvPr/>
+        </p:nvSpPr>
+        <p:spPr>
+          <a:xfrm>
+            <a:off x="6565392" y="4681728"/>
+            <a:ext cx="4297680" cy="146304"/>
+          </a:xfrm>
+          <a:prstGeom prst="rect">
+            <a:avLst/>
+          </a:prstGeom>
+          <a:noFill/>
+          <a:ln/>
+        </p:spPr>
+        <p:txBody>
+          <a:bodyPr wrap="square" lIns="0" tIns="0" rIns="0" bIns="0" rtlCol="0" anchor="ctr"/>
+          <a:lstStyle/>
+          <a:p>
+            <a:pPr indent="0" marL="0">
+              <a:buNone/>
+            </a:pPr>
+            <a:r>
+              <a:rPr lang="en-US" sz="920" dirty="0">
+                <a:solidFill>
+                  <a:srgbClr val="776C64"/>
+                </a:solidFill>
+                <a:latin typeface="Hiragino Sans" pitchFamily="34" charset="0"/>
+                <a:ea typeface="Hiragino Sans" pitchFamily="34" charset="-122"/>
+                <a:cs typeface="Hiragino Sans" pitchFamily="34" charset="-120"/>
+              </a:rPr>
+              <a:t>肉同士が重なって見える例</a:t>
+            </a:r>
+            <a:endParaRPr lang="en-US" sz="920" dirty="0"/>
+          </a:p>
+        </p:txBody>
+      </p:sp>
+      <p:sp>
+        <p:nvSpPr>
+          <p:cNvPr id="26" name="Shape 22"/>
+          <p:cNvSpPr/>
+          <p:nvPr/>
+        </p:nvSpPr>
+        <p:spPr>
+          <a:xfrm>
+            <a:off x="713232" y="5596128"/>
+            <a:ext cx="1371600" cy="292608"/>
+          </a:xfrm>
+          <a:prstGeom prst="rect">
+            <a:avLst/>
+          </a:prstGeom>
+          <a:solidFill>
+            <a:srgbClr val="305C8A"/>
+          </a:solidFill>
+          <a:ln w="12700">
+            <a:solidFill>
+              <a:srgbClr val="305C8A">
+                <a:alpha val="0"/>
+              </a:srgbClr>
+            </a:solidFill>
+            <a:prstDash val="solid"/>
+          </a:ln>
+        </p:spPr>
+      </p:sp>
+      <p:sp>
+        <p:nvSpPr>
+          <p:cNvPr id="27" name="Text 23"/>
+          <p:cNvSpPr/>
+          <p:nvPr/>
+        </p:nvSpPr>
+        <p:spPr>
+          <a:xfrm>
+            <a:off x="804672" y="5655564"/>
             <a:ext cx="1188720" cy="128016"/>
           </a:xfrm>
           <a:prstGeom prst="rect">
@@ -10062,30 +10683,30 @@
       </p:sp>
       <p:sp>
         <p:nvSpPr>
-          <p:cNvPr id="14" name="Text 10"/>
-          <p:cNvSpPr/>
-          <p:nvPr/>
-        </p:nvSpPr>
-        <p:spPr>
-          <a:xfrm>
-            <a:off x="8759952" y="4791456"/>
-            <a:ext cx="2743200" cy="256032"/>
-          </a:xfrm>
-          <a:prstGeom prst="rect">
-            <a:avLst/>
-          </a:prstGeom>
-          <a:noFill/>
-          <a:ln/>
-        </p:spPr>
-        <p:txBody>
-          <a:bodyPr wrap="square" lIns="0" tIns="0" rIns="0" bIns="0" rtlCol="0" anchor="ctr"/>
-          <a:lstStyle/>
-          <a:p>
-            <a:pPr indent="0" marL="0">
-              <a:buNone/>
-            </a:pPr>
-            <a:r>
-              <a:rPr lang="en-US" sz="1220" b="1" dirty="0">
+          <p:cNvPr id="28" name="Text 24"/>
+          <p:cNvSpPr/>
+          <p:nvPr/>
+        </p:nvSpPr>
+        <p:spPr>
+          <a:xfrm>
+            <a:off x="2331720" y="5605272"/>
+            <a:ext cx="7452360" cy="219456"/>
+          </a:xfrm>
+          <a:prstGeom prst="rect">
+            <a:avLst/>
+          </a:prstGeom>
+          <a:noFill/>
+          <a:ln/>
+        </p:spPr>
+        <p:txBody>
+          <a:bodyPr wrap="square" lIns="0" tIns="0" rIns="0" bIns="0" rtlCol="0" anchor="ctr"/>
+          <a:lstStyle/>
+          <a:p>
+            <a:pPr indent="0" marL="0">
+              <a:buNone/>
+            </a:pPr>
+            <a:r>
+              <a:rPr lang="en-US" sz="1240" b="1" dirty="0">
                 <a:solidFill>
                   <a:srgbClr val="1F1A17"/>
                 </a:solidFill>
@@ -10093,9 +10714,9 @@
                 <a:ea typeface="Hiragino Sans" pitchFamily="34" charset="-122"/>
                 <a:cs typeface="Hiragino Sans" pitchFamily="34" charset="-120"/>
               </a:rPr>
-              <a:t>モデル性能だけでなく、データの作り方が精度を左右する</a:t>
-            </a:r>
-            <a:endParaRPr lang="en-US" sz="1220" dirty="0"/>
+              <a:t>背景に強いモデルから、重なった複数対象も分離できるモデルへ評価範囲を広げる</a:t>
+            </a:r>
+            <a:endParaRPr lang="en-US" sz="1240" dirty="0"/>
           </a:p>
         </p:txBody>
       </p:sp>
@@ -13510,7 +14131,7 @@
         </p:nvSpPr>
         <p:spPr>
           <a:xfrm>
-            <a:off x="804672" y="2148840"/>
+            <a:off x="804672" y="2029968"/>
             <a:ext cx="146304" cy="146304"/>
           </a:xfrm>
           <a:prstGeom prst="rect">
@@ -13537,7 +14158,7 @@
         </p:nvSpPr>
         <p:spPr>
           <a:xfrm>
-            <a:off x="1143000" y="2103120"/>
+            <a:off x="1143000" y="1984248"/>
             <a:ext cx="1097280" cy="137160"/>
           </a:xfrm>
           <a:prstGeom prst="rect">
@@ -13576,7 +14197,7 @@
         </p:nvSpPr>
         <p:spPr>
           <a:xfrm>
-            <a:off x="2514600" y="2093976"/>
+            <a:off x="2514600" y="1975104"/>
             <a:ext cx="3291840" cy="164592"/>
           </a:xfrm>
           <a:prstGeom prst="rect">
@@ -13615,7 +14236,7 @@
         </p:nvSpPr>
         <p:spPr>
           <a:xfrm>
-            <a:off x="804672" y="2532888"/>
+            <a:off x="804672" y="2359152"/>
             <a:ext cx="5166360" cy="0"/>
           </a:xfrm>
           <a:prstGeom prst="line">
@@ -13638,7 +14259,7 @@
         </p:nvSpPr>
         <p:spPr>
           <a:xfrm>
-            <a:off x="804672" y="2898648"/>
+            <a:off x="804672" y="2651760"/>
             <a:ext cx="146304" cy="146304"/>
           </a:xfrm>
           <a:prstGeom prst="rect">
@@ -13665,7 +14286,7 @@
         </p:nvSpPr>
         <p:spPr>
           <a:xfrm>
-            <a:off x="1143000" y="2852928"/>
+            <a:off x="1143000" y="2606040"/>
             <a:ext cx="1097280" cy="137160"/>
           </a:xfrm>
           <a:prstGeom prst="rect">
@@ -13704,7 +14325,7 @@
         </p:nvSpPr>
         <p:spPr>
           <a:xfrm>
-            <a:off x="2514600" y="2843784"/>
+            <a:off x="2514600" y="2596896"/>
             <a:ext cx="3291840" cy="164592"/>
           </a:xfrm>
           <a:prstGeom prst="rect">
@@ -13743,7 +14364,7 @@
         </p:nvSpPr>
         <p:spPr>
           <a:xfrm>
-            <a:off x="804672" y="3282696"/>
+            <a:off x="804672" y="2980944"/>
             <a:ext cx="5166360" cy="0"/>
           </a:xfrm>
           <a:prstGeom prst="line">
@@ -13766,7 +14387,7 @@
         </p:nvSpPr>
         <p:spPr>
           <a:xfrm>
-            <a:off x="804672" y="3648456"/>
+            <a:off x="804672" y="3273552"/>
             <a:ext cx="146304" cy="146304"/>
           </a:xfrm>
           <a:prstGeom prst="rect">
@@ -13793,7 +14414,7 @@
         </p:nvSpPr>
         <p:spPr>
           <a:xfrm>
-            <a:off x="1143000" y="3602736"/>
+            <a:off x="1143000" y="3227832"/>
             <a:ext cx="1097280" cy="137160"/>
           </a:xfrm>
           <a:prstGeom prst="rect">
@@ -13832,7 +14453,7 @@
         </p:nvSpPr>
         <p:spPr>
           <a:xfrm>
-            <a:off x="2514600" y="3593592"/>
+            <a:off x="2514600" y="3218688"/>
             <a:ext cx="3291840" cy="164592"/>
           </a:xfrm>
           <a:prstGeom prst="rect">
@@ -13871,7 +14492,7 @@
         </p:nvSpPr>
         <p:spPr>
           <a:xfrm>
-            <a:off x="804672" y="4032504"/>
+            <a:off x="804672" y="3602736"/>
             <a:ext cx="5166360" cy="0"/>
           </a:xfrm>
           <a:prstGeom prst="line">
@@ -13894,7 +14515,135 @@
         </p:nvSpPr>
         <p:spPr>
           <a:xfrm>
-            <a:off x="804672" y="4398264"/>
+            <a:off x="804672" y="3895344"/>
+            <a:ext cx="146304" cy="146304"/>
+          </a:xfrm>
+          <a:prstGeom prst="rect">
+            <a:avLst/>
+          </a:prstGeom>
+          <a:solidFill>
+            <a:srgbClr val="D94E59"/>
+          </a:solidFill>
+          <a:ln w="12700">
+            <a:solidFill>
+              <a:srgbClr val="D94E59">
+                <a:alpha val="0"/>
+              </a:srgbClr>
+            </a:solidFill>
+            <a:prstDash val="solid"/>
+          </a:ln>
+        </p:spPr>
+      </p:sp>
+      <p:sp>
+        <p:nvSpPr>
+          <p:cNvPr id="21" name="Text 19"/>
+          <p:cNvSpPr/>
+          <p:nvPr/>
+        </p:nvSpPr>
+        <p:spPr>
+          <a:xfrm>
+            <a:off x="1143000" y="3849624"/>
+            <a:ext cx="1097280" cy="137160"/>
+          </a:xfrm>
+          <a:prstGeom prst="rect">
+            <a:avLst/>
+          </a:prstGeom>
+          <a:noFill/>
+          <a:ln/>
+        </p:spPr>
+        <p:txBody>
+          <a:bodyPr wrap="square" lIns="0" tIns="0" rIns="0" bIns="0" rtlCol="0" anchor="ctr"/>
+          <a:lstStyle/>
+          <a:p>
+            <a:pPr indent="0" marL="0">
+              <a:buNone/>
+            </a:pPr>
+            <a:r>
+              <a:rPr lang="en-US" sz="950" b="1" dirty="0">
+                <a:solidFill>
+                  <a:srgbClr val="D94E59"/>
+                </a:solidFill>
+                <a:latin typeface="Hiragino Sans" pitchFamily="34" charset="0"/>
+                <a:ea typeface="Hiragino Sans" pitchFamily="34" charset="-122"/>
+                <a:cs typeface="Hiragino Sans" pitchFamily="34" charset="-120"/>
+              </a:rPr>
+              <a:t>Add data</a:t>
+            </a:r>
+            <a:endParaRPr lang="en-US" sz="950" dirty="0"/>
+          </a:p>
+        </p:txBody>
+      </p:sp>
+      <p:sp>
+        <p:nvSpPr>
+          <p:cNvPr id="22" name="Text 20"/>
+          <p:cNvSpPr/>
+          <p:nvPr/>
+        </p:nvSpPr>
+        <p:spPr>
+          <a:xfrm>
+            <a:off x="2514600" y="3840480"/>
+            <a:ext cx="3291840" cy="164592"/>
+          </a:xfrm>
+          <a:prstGeom prst="rect">
+            <a:avLst/>
+          </a:prstGeom>
+          <a:noFill/>
+          <a:ln/>
+        </p:spPr>
+        <p:txBody>
+          <a:bodyPr wrap="square" lIns="0" tIns="0" rIns="0" bIns="0" rtlCol="0" anchor="ctr"/>
+          <a:lstStyle/>
+          <a:p>
+            <a:pPr indent="0" marL="0">
+              <a:buNone/>
+            </a:pPr>
+            <a:r>
+              <a:rPr lang="en-US" sz="1340" dirty="0">
+                <a:solidFill>
+                  <a:srgbClr val="1F1A17"/>
+                </a:solidFill>
+                <a:latin typeface="Hiragino Sans" pitchFamily="34" charset="0"/>
+                <a:ea typeface="Hiragino Sans" pitchFamily="34" charset="-122"/>
+                <a:cs typeface="Hiragino Sans" pitchFamily="34" charset="-120"/>
+              </a:rPr>
+              <a:t>重なりケースを追加して再学習</a:t>
+            </a:r>
+            <a:endParaRPr lang="en-US" sz="1340" dirty="0"/>
+          </a:p>
+        </p:txBody>
+      </p:sp>
+      <p:sp>
+        <p:nvSpPr>
+          <p:cNvPr id="23" name="Shape 21"/>
+          <p:cNvSpPr/>
+          <p:nvPr/>
+        </p:nvSpPr>
+        <p:spPr>
+          <a:xfrm>
+            <a:off x="804672" y="4224528"/>
+            <a:ext cx="5166360" cy="0"/>
+          </a:xfrm>
+          <a:prstGeom prst="line">
+            <a:avLst/>
+          </a:prstGeom>
+          <a:noFill/>
+          <a:ln w="8890">
+            <a:solidFill>
+              <a:srgbClr val="E4DAD2"/>
+            </a:solidFill>
+            <a:prstDash val="solid"/>
+          </a:ln>
+        </p:spPr>
+      </p:sp>
+      <p:sp>
+        <p:nvSpPr>
+          <p:cNvPr id="24" name="Shape 22"/>
+          <p:cNvSpPr/>
+          <p:nvPr/>
+        </p:nvSpPr>
+        <p:spPr>
+          <a:xfrm>
+            <a:off x="804672" y="4517136"/>
             <a:ext cx="146304" cy="146304"/>
           </a:xfrm>
           <a:prstGeom prst="rect">
@@ -13915,13 +14664,13 @@
       </p:sp>
       <p:sp>
         <p:nvSpPr>
-          <p:cNvPr id="21" name="Text 19"/>
-          <p:cNvSpPr/>
-          <p:nvPr/>
-        </p:nvSpPr>
-        <p:spPr>
-          <a:xfrm>
-            <a:off x="1143000" y="4352544"/>
+          <p:cNvPr id="25" name="Text 23"/>
+          <p:cNvSpPr/>
+          <p:nvPr/>
+        </p:nvSpPr>
+        <p:spPr>
+          <a:xfrm>
+            <a:off x="1143000" y="4471416"/>
             <a:ext cx="1097280" cy="137160"/>
           </a:xfrm>
           <a:prstGeom prst="rect">
@@ -13954,13 +14703,13 @@
       </p:sp>
       <p:sp>
         <p:nvSpPr>
-          <p:cNvPr id="22" name="Text 20"/>
-          <p:cNvSpPr/>
-          <p:nvPr/>
-        </p:nvSpPr>
-        <p:spPr>
-          <a:xfrm>
-            <a:off x="2514600" y="4343400"/>
+          <p:cNvPr id="26" name="Text 24"/>
+          <p:cNvSpPr/>
+          <p:nvPr/>
+        </p:nvSpPr>
+        <p:spPr>
+          <a:xfrm>
+            <a:off x="2514600" y="4462272"/>
             <a:ext cx="3291840" cy="164592"/>
           </a:xfrm>
           <a:prstGeom prst="rect">
@@ -13993,13 +14742,13 @@
       </p:sp>
       <p:sp>
         <p:nvSpPr>
-          <p:cNvPr id="23" name="Shape 21"/>
-          <p:cNvSpPr/>
-          <p:nvPr/>
-        </p:nvSpPr>
-        <p:spPr>
-          <a:xfrm>
-            <a:off x="804672" y="4782312"/>
+          <p:cNvPr id="27" name="Shape 25"/>
+          <p:cNvSpPr/>
+          <p:nvPr/>
+        </p:nvSpPr>
+        <p:spPr>
+          <a:xfrm>
+            <a:off x="804672" y="4846320"/>
             <a:ext cx="5166360" cy="0"/>
           </a:xfrm>
           <a:prstGeom prst="line">
@@ -14016,7 +14765,7 @@
       </p:sp>
       <p:sp>
         <p:nvSpPr>
-          <p:cNvPr id="24" name="Shape 22"/>
+          <p:cNvPr id="28" name="Shape 26"/>
           <p:cNvSpPr/>
           <p:nvPr/>
         </p:nvSpPr>
@@ -14041,7 +14790,7 @@
       </p:sp>
       <p:sp>
         <p:nvSpPr>
-          <p:cNvPr id="25" name="Text 23"/>
+          <p:cNvPr id="29" name="Text 27"/>
           <p:cNvSpPr/>
           <p:nvPr/>
         </p:nvSpPr>
@@ -14080,7 +14829,7 @@
       </p:sp>
       <p:sp>
         <p:nvSpPr>
-          <p:cNvPr id="26" name="Text 24"/>
+          <p:cNvPr id="30" name="Text 28"/>
           <p:cNvSpPr/>
           <p:nvPr/>
         </p:nvSpPr>
@@ -14103,7 +14852,7 @@
               <a:buNone/>
             </a:pPr>
             <a:r>
-              <a:rPr lang="en-US" sz="1795" b="1" dirty="0">
+              <a:rPr lang="en-US" sz="1638" b="1" dirty="0">
                 <a:solidFill>
                   <a:srgbClr val="1F1A17"/>
                 </a:solidFill>
@@ -14111,15 +14860,15 @@
                 <a:ea typeface="Hiragino Sans" pitchFamily="34" charset="-122"/>
                 <a:cs typeface="Hiragino Sans" pitchFamily="34" charset="-120"/>
               </a:rPr>
-              <a:t>肉の見え方が変わる前提で、データセット設計と失敗例分析を重視した</a:t>
-            </a:r>
-            <a:endParaRPr lang="en-US" sz="1795" dirty="0"/>
-          </a:p>
-        </p:txBody>
-      </p:sp>
-      <p:sp>
-        <p:nvSpPr>
-          <p:cNvPr id="27" name="Text 25"/>
+              <a:t>背景差と重なりを分けて検証できるよう、データセット設計と失敗例分析を重視した</a:t>
+            </a:r>
+            <a:endParaRPr lang="en-US" sz="1638" dirty="0"/>
+          </a:p>
+        </p:txBody>
+      </p:sp>
+      <p:sp>
+        <p:nvSpPr>
+          <p:cNvPr id="31" name="Text 29"/>
           <p:cNvSpPr/>
           <p:nvPr/>
         </p:nvSpPr>
@@ -14150,7 +14899,7 @@
                 <a:ea typeface="Hiragino Sans" pitchFamily="34" charset="-122"/>
                 <a:cs typeface="Hiragino Sans" pitchFamily="34" charset="-120"/>
               </a:rPr>
-              <a:t>モデルを新規提案するのではなく、対象に合わせたデータ作成を検証対象にした。</a:t>
+              <a:t>追加学習では、複数の肉片が接触する画像を増やし、BBoxの分離性能も確認する。</a:t>
             </a:r>
             <a:endParaRPr lang="en-US" sz="1030" dirty="0"/>
           </a:p>
